--- a/CampusNotify_Review_Presentation.pptx
+++ b/CampusNotify_Review_Presentation.pptx
@@ -3255,7 +3255,7 @@
         <p:spPr>
           <a:xfrm>
             <a:off x="731520" y="274320"/>
-            <a:ext cx="7772400" cy="1775834"/>
+            <a:ext cx="7772400" cy="2450095"/>
           </a:xfrm>
           <a:prstGeom prst="rect">
             <a:avLst/>

--- a/CampusNotify_Review_Presentation.pptx
+++ b/CampusNotify_Review_Presentation.pptx
@@ -17,10 +17,6 @@
     <p:sldId id="265" r:id="rId16"/>
     <p:sldId id="266" r:id="rId17"/>
     <p:sldId id="267" r:id="rId18"/>
-    <p:sldId id="268" r:id="rId19"/>
-    <p:sldId id="269" r:id="rId20"/>
-    <p:sldId id="270" r:id="rId21"/>
-    <p:sldId id="271" r:id="rId22"/>
   </p:sldIdLst>
   <p:sldSz cx="12191695" cy="6858000" type="screen4x3"/>
   <p:notesSz cx="6858000" cy="9144000"/>
@@ -3103,144 +3099,9 @@
         <p:nvPr/>
       </p:nvGrpSpPr>
       <p:grpSpPr/>
-      <p:sp>
-        <p:nvSpPr>
-          <p:cNvPr id="2" name="Right Triangle 1"/>
-          <p:cNvSpPr/>
-          <p:nvPr/>
-        </p:nvSpPr>
-        <p:spPr>
-          <a:xfrm rot="10800000">
-            <a:off x="9601200" y="0"/>
-            <a:ext cx="2590495" cy="6858000"/>
-          </a:xfrm>
-          <a:prstGeom prst="rtTriangle">
-            <a:avLst/>
-          </a:prstGeom>
-          <a:solidFill>
-            <a:srgbClr val="E2EFDA"/>
-          </a:solidFill>
-          <a:ln>
-            <a:solidFill>
-              <a:srgbClr val="E2EFDA"/>
-            </a:solidFill>
-          </a:ln>
-        </p:spPr>
-        <p:style>
-          <a:lnRef idx="1">
-            <a:schemeClr val="accent1"/>
-          </a:lnRef>
-          <a:fillRef idx="3">
-            <a:schemeClr val="accent1"/>
-          </a:fillRef>
-          <a:effectRef idx="2">
-            <a:schemeClr val="accent1"/>
-          </a:effectRef>
-          <a:fontRef idx="minor">
-            <a:schemeClr val="lt1"/>
-          </a:fontRef>
-        </p:style>
-        <p:txBody>
-          <a:bodyPr rtlCol="0" anchor="ctr"/>
-          <a:lstStyle/>
-          <a:p>
-            <a:pPr algn="ctr"/>
-          </a:p>
-        </p:txBody>
-      </p:sp>
-      <p:sp>
-        <p:nvSpPr>
-          <p:cNvPr id="3" name="Right Triangle 2"/>
-          <p:cNvSpPr/>
-          <p:nvPr/>
-        </p:nvSpPr>
-        <p:spPr>
-          <a:xfrm>
-            <a:off x="10241280" y="1371600"/>
-            <a:ext cx="1950415" cy="5486400"/>
-          </a:xfrm>
-          <a:prstGeom prst="rtTriangle">
-            <a:avLst/>
-          </a:prstGeom>
-          <a:solidFill>
-            <a:srgbClr val="A9D08E"/>
-          </a:solidFill>
-          <a:ln>
-            <a:solidFill>
-              <a:srgbClr val="A9D08E"/>
-            </a:solidFill>
-          </a:ln>
-        </p:spPr>
-        <p:style>
-          <a:lnRef idx="1">
-            <a:schemeClr val="accent1"/>
-          </a:lnRef>
-          <a:fillRef idx="3">
-            <a:schemeClr val="accent1"/>
-          </a:fillRef>
-          <a:effectRef idx="2">
-            <a:schemeClr val="accent1"/>
-          </a:effectRef>
-          <a:fontRef idx="minor">
-            <a:schemeClr val="lt1"/>
-          </a:fontRef>
-        </p:style>
-        <p:txBody>
-          <a:bodyPr rtlCol="0" anchor="ctr"/>
-          <a:lstStyle/>
-          <a:p>
-            <a:pPr algn="ctr"/>
-          </a:p>
-        </p:txBody>
-      </p:sp>
-      <p:sp>
-        <p:nvSpPr>
-          <p:cNvPr id="4" name="Right Triangle 3"/>
-          <p:cNvSpPr/>
-          <p:nvPr/>
-        </p:nvSpPr>
-        <p:spPr>
-          <a:xfrm rot="5400000">
-            <a:off x="10789920" y="2743200"/>
-            <a:ext cx="1401775" cy="4114800"/>
-          </a:xfrm>
-          <a:prstGeom prst="rtTriangle">
-            <a:avLst/>
-          </a:prstGeom>
-          <a:solidFill>
-            <a:srgbClr val="70AD47"/>
-          </a:solidFill>
-          <a:ln>
-            <a:solidFill>
-              <a:srgbClr val="70AD47"/>
-            </a:solidFill>
-          </a:ln>
-        </p:spPr>
-        <p:style>
-          <a:lnRef idx="1">
-            <a:schemeClr val="accent1"/>
-          </a:lnRef>
-          <a:fillRef idx="3">
-            <a:schemeClr val="accent1"/>
-          </a:fillRef>
-          <a:effectRef idx="2">
-            <a:schemeClr val="accent1"/>
-          </a:effectRef>
-          <a:fontRef idx="minor">
-            <a:schemeClr val="lt1"/>
-          </a:fontRef>
-        </p:style>
-        <p:txBody>
-          <a:bodyPr rtlCol="0" anchor="ctr"/>
-          <a:lstStyle/>
-          <a:p>
-            <a:pPr algn="ctr"/>
-          </a:p>
-        </p:txBody>
-      </p:sp>
       <p:pic>
         <p:nvPicPr>
-          <p:cNvPr id="5" name="Picture 4" descr="extracted_img.jpg"/>
+          <p:cNvPr id="2" name="Picture 1" descr="extracted_img.jpg"/>
           <p:cNvPicPr>
             <a:picLocks noChangeAspect="1"/>
           </p:cNvPicPr>
@@ -3264,421 +3125,7 @@
       </p:pic>
       <p:sp>
         <p:nvSpPr>
-          <p:cNvPr id="6" name="TextBox 5"/>
-          <p:cNvSpPr txBox="1"/>
-          <p:nvPr/>
-        </p:nvSpPr>
-        <p:spPr>
-          <a:xfrm>
-            <a:off x="731520" y="1463040"/>
-            <a:ext cx="9144000" cy="1188720"/>
-          </a:xfrm>
-          <a:prstGeom prst="rect">
-            <a:avLst/>
-          </a:prstGeom>
-          <a:noFill/>
-        </p:spPr>
-        <p:txBody>
-          <a:bodyPr wrap="square">
-            <a:spAutoFit/>
-          </a:bodyPr>
-          <a:lstStyle/>
-          <a:p>
-            <a:pPr algn="ctr">
-              <a:defRPr sz="4000" b="1">
-                <a:solidFill>
-                  <a:srgbClr val="70AD47"/>
-                </a:solidFill>
-                <a:latin typeface="Calibri"/>
-              </a:defRPr>
-            </a:pPr>
-            <a:r>
-              <a:t>Campus Notify</a:t>
-            </a:r>
-          </a:p>
-          <a:p>
-            <a:pPr algn="ctr">
-              <a:defRPr sz="2000" b="1">
-                <a:solidFill>
-                  <a:srgbClr val="375623"/>
-                </a:solidFill>
-                <a:latin typeface="Calibri"/>
-              </a:defRPr>
-            </a:pPr>
-            <a:r>
-              <a:t>Institutional Circular &amp; Announcement Management System</a:t>
-            </a:r>
-          </a:p>
-          <a:p>
-            <a:pPr algn="ctr">
-              <a:defRPr sz="1300" i="1">
-                <a:solidFill>
-                  <a:srgbClr val="64748B"/>
-                </a:solidFill>
-                <a:latin typeface="Calibri"/>
-              </a:defRPr>
-            </a:pPr>
-            <a:r>
-              <a:t>A Modular Object-Oriented System in Core Java with File Persistence &amp; Cloud Sync</a:t>
-            </a:r>
-          </a:p>
-        </p:txBody>
-      </p:sp>
-      <p:sp>
-        <p:nvSpPr>
-          <p:cNvPr id="7" name="TextBox 6"/>
-          <p:cNvSpPr txBox="1"/>
-          <p:nvPr/>
-        </p:nvSpPr>
-        <p:spPr>
-          <a:xfrm>
-            <a:off x="731520" y="2926080"/>
-            <a:ext cx="9144000" cy="548640"/>
-          </a:xfrm>
-          <a:prstGeom prst="rect">
-            <a:avLst/>
-          </a:prstGeom>
-          <a:noFill/>
-        </p:spPr>
-        <p:txBody>
-          <a:bodyPr wrap="none">
-            <a:spAutoFit/>
-          </a:bodyPr>
-          <a:lstStyle/>
-          <a:p>
-            <a:pPr algn="ctr">
-              <a:defRPr sz="1600" b="1">
-                <a:solidFill>
-                  <a:srgbClr val="1E293B"/>
-                </a:solidFill>
-                <a:latin typeface="Calibri"/>
-              </a:defRPr>
-            </a:pPr>
-            <a:r>
-              <a:t>Guide: Prof. Sonali Kharat</a:t>
-            </a:r>
-          </a:p>
-        </p:txBody>
-      </p:sp>
-      <p:sp>
-        <p:nvSpPr>
-          <p:cNvPr id="8" name="TextBox 7"/>
-          <p:cNvSpPr txBox="1"/>
-          <p:nvPr/>
-        </p:nvSpPr>
-        <p:spPr>
-          <a:xfrm>
-            <a:off x="731520" y="3566160"/>
-            <a:ext cx="9144000" cy="365760"/>
-          </a:xfrm>
-          <a:prstGeom prst="rect">
-            <a:avLst/>
-          </a:prstGeom>
-          <a:noFill/>
-        </p:spPr>
-        <p:txBody>
-          <a:bodyPr wrap="none">
-            <a:spAutoFit/>
-          </a:bodyPr>
-          <a:lstStyle/>
-          <a:p>
-            <a:pPr algn="ctr">
-              <a:defRPr sz="1400" b="1">
-                <a:solidFill>
-                  <a:srgbClr val="1E293B"/>
-                </a:solidFill>
-                <a:latin typeface="Calibri"/>
-              </a:defRPr>
-            </a:pPr>
-            <a:r>
-              <a:t>Team Details:</a:t>
-            </a:r>
-          </a:p>
-        </p:txBody>
-      </p:sp>
-      <p:graphicFrame>
-        <p:nvGraphicFramePr>
-          <p:cNvPr id="9" name="Table 8"/>
-          <p:cNvGraphicFramePr>
-            <a:graphicFrameLocks noGrp="1"/>
-          </p:cNvGraphicFramePr>
-          <p:nvPr/>
-        </p:nvGraphicFramePr>
-        <p:xfrm>
-          <a:off x="2926080" y="3977639"/>
-          <a:ext cx="4754880" cy="1645920"/>
-        </p:xfrm>
-        <a:graphic>
-          <a:graphicData uri="http://schemas.openxmlformats.org/drawingml/2006/table">
-            <a:tbl>
-              <a:tblPr firstRow="1" bandRow="1">
-                <a:tableStyleId>{5C22544A-7EE6-4342-B048-85BDC9FD1C3A}</a:tableStyleId>
-              </a:tblPr>
-              <a:tblGrid>
-                <a:gridCol w="2011680"/>
-                <a:gridCol w="2743200"/>
-              </a:tblGrid>
-              <a:tr h="411480">
-                <a:tc>
-                  <a:txBody>
-                    <a:bodyPr wrap="square" tIns="54864" bIns="54864"/>
-                    <a:lstStyle/>
-                    <a:p>
-                      <a:pPr algn="ctr">
-                        <a:defRPr sz="1200" b="1">
-                          <a:solidFill>
-                            <a:srgbClr val="FFFFFF"/>
-                          </a:solidFill>
-                          <a:latin typeface="Calibri"/>
-                        </a:defRPr>
-                      </a:pPr>
-                      <a:r>
-                        <a:t>Student ID</a:t>
-                      </a:r>
-                    </a:p>
-                  </a:txBody>
-                  <a:tcPr anchor="ctr">
-                    <a:solidFill>
-                      <a:srgbClr val="70AD47"/>
-                    </a:solidFill>
-                  </a:tcPr>
-                </a:tc>
-                <a:tc>
-                  <a:txBody>
-                    <a:bodyPr wrap="square" tIns="54864" bIns="54864"/>
-                    <a:lstStyle/>
-                    <a:p>
-                      <a:pPr algn="ctr">
-                        <a:defRPr sz="1200" b="1">
-                          <a:solidFill>
-                            <a:srgbClr val="FFFFFF"/>
-                          </a:solidFill>
-                          <a:latin typeface="Calibri"/>
-                        </a:defRPr>
-                      </a:pPr>
-                      <a:r>
-                        <a:t>Student Name</a:t>
-                      </a:r>
-                    </a:p>
-                  </a:txBody>
-                  <a:tcPr anchor="ctr">
-                    <a:solidFill>
-                      <a:srgbClr val="70AD47"/>
-                    </a:solidFill>
-                  </a:tcPr>
-                </a:tc>
-              </a:tr>
-              <a:tr h="411480">
-                <a:tc>
-                  <a:txBody>
-                    <a:bodyPr wrap="square" tIns="54864" bIns="54864"/>
-                    <a:lstStyle/>
-                    <a:p>
-                      <a:pPr algn="ctr">
-                        <a:defRPr sz="1100" b="0">
-                          <a:solidFill>
-                            <a:srgbClr val="1E293B"/>
-                          </a:solidFill>
-                          <a:latin typeface="Calibri"/>
-                        </a:defRPr>
-                      </a:pPr>
-                      <a:r>
-                        <a:t>VU4F2526072</a:t>
-                      </a:r>
-                    </a:p>
-                  </a:txBody>
-                  <a:tcPr anchor="ctr">
-                    <a:solidFill>
-                      <a:srgbClr val="E2EFDA"/>
-                    </a:solidFill>
-                  </a:tcPr>
-                </a:tc>
-                <a:tc>
-                  <a:txBody>
-                    <a:bodyPr wrap="square" tIns="54864" bIns="54864"/>
-                    <a:lstStyle/>
-                    <a:p>
-                      <a:pPr algn="ctr">
-                        <a:defRPr sz="1100" b="1">
-                          <a:solidFill>
-                            <a:srgbClr val="1E293B"/>
-                          </a:solidFill>
-                          <a:latin typeface="Calibri"/>
-                        </a:defRPr>
-                      </a:pPr>
-                      <a:r>
-                        <a:t>PRATIK ATPADKAR</a:t>
-                      </a:r>
-                    </a:p>
-                  </a:txBody>
-                  <a:tcPr anchor="ctr">
-                    <a:solidFill>
-                      <a:srgbClr val="E2EFDA"/>
-                    </a:solidFill>
-                  </a:tcPr>
-                </a:tc>
-              </a:tr>
-              <a:tr h="411480">
-                <a:tc>
-                  <a:txBody>
-                    <a:bodyPr wrap="square" tIns="54864" bIns="54864"/>
-                    <a:lstStyle/>
-                    <a:p>
-                      <a:pPr algn="ctr">
-                        <a:defRPr sz="1100" b="0">
-                          <a:solidFill>
-                            <a:srgbClr val="1E293B"/>
-                          </a:solidFill>
-                          <a:latin typeface="Calibri"/>
-                        </a:defRPr>
-                      </a:pPr>
-                      <a:r>
-                        <a:t>VU4F2526066</a:t>
-                      </a:r>
-                    </a:p>
-                  </a:txBody>
-                  <a:tcPr anchor="ctr">
-                    <a:solidFill>
-                      <a:srgbClr val="FFFFFF"/>
-                    </a:solidFill>
-                  </a:tcPr>
-                </a:tc>
-                <a:tc>
-                  <a:txBody>
-                    <a:bodyPr wrap="square" tIns="54864" bIns="54864"/>
-                    <a:lstStyle/>
-                    <a:p>
-                      <a:pPr algn="ctr">
-                        <a:defRPr sz="1100" b="1">
-                          <a:solidFill>
-                            <a:srgbClr val="1E293B"/>
-                          </a:solidFill>
-                          <a:latin typeface="Calibri"/>
-                        </a:defRPr>
-                      </a:pPr>
-                      <a:r>
-                        <a:t>HARSH TIWAR</a:t>
-                      </a:r>
-                    </a:p>
-                  </a:txBody>
-                  <a:tcPr anchor="ctr">
-                    <a:solidFill>
-                      <a:srgbClr val="FFFFFF"/>
-                    </a:solidFill>
-                  </a:tcPr>
-                </a:tc>
-              </a:tr>
-              <a:tr h="411480">
-                <a:tc>
-                  <a:txBody>
-                    <a:bodyPr wrap="square" tIns="54864" bIns="54864"/>
-                    <a:lstStyle/>
-                    <a:p>
-                      <a:pPr algn="ctr">
-                        <a:defRPr sz="1100" b="0">
-                          <a:solidFill>
-                            <a:srgbClr val="1E293B"/>
-                          </a:solidFill>
-                          <a:latin typeface="Calibri"/>
-                        </a:defRPr>
-                      </a:pPr>
-                      <a:r>
-                        <a:t>VU4F2526062</a:t>
-                      </a:r>
-                    </a:p>
-                  </a:txBody>
-                  <a:tcPr anchor="ctr">
-                    <a:solidFill>
-                      <a:srgbClr val="E2EFDA"/>
-                    </a:solidFill>
-                  </a:tcPr>
-                </a:tc>
-                <a:tc>
-                  <a:txBody>
-                    <a:bodyPr wrap="square" tIns="54864" bIns="54864"/>
-                    <a:lstStyle/>
-                    <a:p>
-                      <a:pPr algn="ctr">
-                        <a:defRPr sz="1100" b="1">
-                          <a:solidFill>
-                            <a:srgbClr val="1E293B"/>
-                          </a:solidFill>
-                          <a:latin typeface="Calibri"/>
-                        </a:defRPr>
-                      </a:pPr>
-                      <a:r>
-                        <a:t>PARTH GADADHE</a:t>
-                      </a:r>
-                    </a:p>
-                  </a:txBody>
-                  <a:tcPr anchor="ctr">
-                    <a:solidFill>
-                      <a:srgbClr val="E2EFDA"/>
-                    </a:solidFill>
-                  </a:tcPr>
-                </a:tc>
-              </a:tr>
-            </a:tbl>
-          </a:graphicData>
-        </a:graphic>
-      </p:graphicFrame>
-      <p:sp>
-        <p:nvSpPr>
-          <p:cNvPr id="10" name="TextBox 9"/>
-          <p:cNvSpPr txBox="1"/>
-          <p:nvPr/>
-        </p:nvSpPr>
-        <p:spPr>
-          <a:xfrm>
-            <a:off x="731520" y="5852160"/>
-            <a:ext cx="9144000" cy="457200"/>
-          </a:xfrm>
-          <a:prstGeom prst="rect">
-            <a:avLst/>
-          </a:prstGeom>
-          <a:noFill/>
-        </p:spPr>
-        <p:txBody>
-          <a:bodyPr wrap="none">
-            <a:spAutoFit/>
-          </a:bodyPr>
-          <a:lstStyle/>
-          <a:p>
-            <a:pPr algn="ctr">
-              <a:defRPr sz="1100" b="1">
-                <a:solidFill>
-                  <a:srgbClr val="64748B"/>
-                </a:solidFill>
-                <a:latin typeface="Calibri"/>
-              </a:defRPr>
-            </a:pPr>
-            <a:r>
-              <a:t>Class: SE(IT) DIV :- A BATCH :- C | Academic Year: 2025–2026 | Department of Information Technology</a:t>
-            </a:r>
-          </a:p>
-        </p:txBody>
-      </p:sp>
-    </p:spTree>
-  </p:cSld>
-  <p:clrMapOvr>
-    <a:masterClrMapping/>
-  </p:clrMapOvr>
-</p:sld>
-</file>
-
-<file path=ppt/slides/slide10.xml><?xml version="1.0" encoding="utf-8"?>
-<p:sld xmlns:a="http://schemas.openxmlformats.org/drawingml/2006/main" xmlns:p="http://schemas.openxmlformats.org/presentationml/2006/main" xmlns:r="http://schemas.openxmlformats.org/officeDocument/2006/relationships">
-  <p:cSld>
-    <p:spTree>
-      <p:nvGrpSpPr>
-        <p:cNvPr id="1" name=""/>
-        <p:cNvGrpSpPr/>
-        <p:nvPr/>
-      </p:nvGrpSpPr>
-      <p:grpSpPr/>
-      <p:sp>
-        <p:nvSpPr>
-          <p:cNvPr id="2" name="Right Triangle 1"/>
+          <p:cNvPr id="3" name="Right Triangle 2"/>
           <p:cNvSpPr/>
           <p:nvPr/>
         </p:nvSpPr>
@@ -3723,7 +3170,7 @@
       </p:sp>
       <p:sp>
         <p:nvSpPr>
-          <p:cNvPr id="3" name="Right Triangle 2"/>
+          <p:cNvPr id="4" name="Right Triangle 3"/>
           <p:cNvSpPr/>
           <p:nvPr/>
         </p:nvSpPr>
@@ -3768,7 +3215,7 @@
       </p:sp>
       <p:sp>
         <p:nvSpPr>
-          <p:cNvPr id="4" name="Right Triangle 3"/>
+          <p:cNvPr id="5" name="Right Triangle 4"/>
           <p:cNvSpPr/>
           <p:nvPr/>
         </p:nvSpPr>
@@ -3813,14 +3260,14 @@
       </p:sp>
       <p:sp>
         <p:nvSpPr>
-          <p:cNvPr id="5" name="TextBox 4"/>
+          <p:cNvPr id="6" name="TextBox 5"/>
           <p:cNvSpPr txBox="1"/>
           <p:nvPr/>
         </p:nvSpPr>
         <p:spPr>
           <a:xfrm>
-            <a:off x="731520" y="548640"/>
-            <a:ext cx="9144000" cy="731520"/>
+            <a:off x="731520" y="1371600"/>
+            <a:ext cx="8961120" cy="2011680"/>
           </a:xfrm>
           <a:prstGeom prst="rect">
             <a:avLst/>
@@ -3834,29 +3281,60 @@
           <a:lstStyle/>
           <a:p>
             <a:pPr>
-              <a:defRPr sz="2800" b="1">
+              <a:spcAft>
+                <a:spcPts val="600"/>
+              </a:spcAft>
+            </a:pPr>
+            <a:r>
+              <a:rPr b="1" i="0" sz="2600">
+                <a:solidFill>
+                  <a:srgbClr val="375623"/>
+                </a:solidFill>
+                <a:latin typeface="Calibri"/>
+              </a:rPr>
+              <a:t>CAMPUS NOTIFY: INSTITUTIONAL CIRCULAR &amp;
+ANNOUNCEMENT MANAGEMENT SYSTEM</a:t>
+            </a:r>
+          </a:p>
+          <a:p>
+            <a:pPr>
+              <a:spcAft>
+                <a:spcPts val="1000"/>
+              </a:spcAft>
+            </a:pPr>
+            <a:r>
+              <a:rPr b="0" i="1" sz="1400">
+                <a:solidFill>
+                  <a:srgbClr val="64748B"/>
+                </a:solidFill>
+                <a:latin typeface="Calibri"/>
+              </a:rPr>
+              <a:t>A Modular, Object-Oriented System in Core Java SE 17 with Responsive Web Interface</a:t>
+            </a:r>
+          </a:p>
+          <a:p>
+            <a:r>
+              <a:rPr b="1" i="0" sz="1200">
                 <a:solidFill>
                   <a:srgbClr val="70AD47"/>
                 </a:solidFill>
                 <a:latin typeface="Calibri"/>
-              </a:defRPr>
-            </a:pPr>
-            <a:r>
-              <a:t>Web Dashboard, Security &amp; Governance:</a:t>
-            </a:r>
-          </a:p>
-        </p:txBody>
-      </p:sp>
-      <p:sp>
-        <p:nvSpPr>
-          <p:cNvPr id="6" name="TextBox 5"/>
+              </a:rPr>
+              <a:t>Review – 1 Presentation | Java Programming Laboratory (Semester – III)</a:t>
+            </a:r>
+          </a:p>
+        </p:txBody>
+      </p:sp>
+      <p:sp>
+        <p:nvSpPr>
+          <p:cNvPr id="7" name="TextBox 6"/>
           <p:cNvSpPr txBox="1"/>
           <p:nvPr/>
         </p:nvSpPr>
         <p:spPr>
           <a:xfrm>
-            <a:off x="731520" y="1371600"/>
-            <a:ext cx="9601200" cy="4754880"/>
+            <a:off x="731520" y="3474720"/>
+            <a:ext cx="8961120" cy="548640"/>
           </a:xfrm>
           <a:prstGeom prst="rect">
             <a:avLst/>
@@ -3864,138 +3342,314 @@
           <a:noFill/>
         </p:spPr>
         <p:txBody>
-          <a:bodyPr wrap="square">
+          <a:bodyPr wrap="none">
             <a:spAutoFit/>
           </a:bodyPr>
           <a:lstStyle/>
           <a:p>
-            <a:pPr>
-              <a:spcAft>
-                <a:spcPts val="1000"/>
-              </a:spcAft>
-            </a:pPr>
-            <a:r>
-              <a:rPr b="1" i="0" sz="1300">
-                <a:solidFill>
-                  <a:srgbClr val="375623"/>
-                </a:solidFill>
-                <a:latin typeface="Calibri"/>
-              </a:rPr>
-              <a:t>◆  Super Admin Restricted Theme Studio:
-   </a:t>
-            </a:r>
-            <a:r>
-              <a:rPr b="0" i="0" sz="1150">
+            <a:r>
+              <a:rPr b="1" i="0" sz="1500">
                 <a:solidFill>
                   <a:srgbClr val="1E293B"/>
                 </a:solidFill>
                 <a:latin typeface="Calibri"/>
               </a:rPr>
-              <a:t>College brand consistency requires strict academic visual standards. Palette Studio color customization is restricted strictly to Super Admin (role === 'ADMIN'); regular students experience a clean Academic Royal Blue theme.</a:t>
-            </a:r>
-          </a:p>
-          <a:p>
-            <a:pPr>
-              <a:spcAft>
-                <a:spcPts val="1000"/>
-              </a:spcAft>
-            </a:pPr>
-            <a:r>
-              <a:rPr b="1" i="0" sz="1300">
-                <a:solidFill>
-                  <a:srgbClr val="375623"/>
-                </a:solidFill>
-                <a:latin typeface="Calibri"/>
-              </a:rPr>
-              <a:t>◆  Student Privacy Shield &amp; Telemetry Isolation:
-   </a:t>
-            </a:r>
-            <a:r>
-              <a:rPr b="0" i="0" sz="1150">
+              <a:t>Guide: </a:t>
+            </a:r>
+            <a:r>
+              <a:rPr b="1" i="0" sz="1500">
+                <a:solidFill>
+                  <a:srgbClr val="70AD47"/>
+                </a:solidFill>
+                <a:latin typeface="Calibri"/>
+              </a:rPr>
+              <a:t>Prof. Sonali Kharat</a:t>
+            </a:r>
+          </a:p>
+        </p:txBody>
+      </p:sp>
+      <p:sp>
+        <p:nvSpPr>
+          <p:cNvPr id="8" name="TextBox 7"/>
+          <p:cNvSpPr txBox="1"/>
+          <p:nvPr/>
+        </p:nvSpPr>
+        <p:spPr>
+          <a:xfrm>
+            <a:off x="731520" y="4069080"/>
+            <a:ext cx="5486400" cy="365760"/>
+          </a:xfrm>
+          <a:prstGeom prst="rect">
+            <a:avLst/>
+          </a:prstGeom>
+          <a:noFill/>
+        </p:spPr>
+        <p:txBody>
+          <a:bodyPr wrap="none">
+            <a:spAutoFit/>
+          </a:bodyPr>
+          <a:lstStyle/>
+          <a:p>
+            <a:r>
+              <a:rPr b="1" i="0" sz="1400">
                 <a:solidFill>
                   <a:srgbClr val="1E293B"/>
                 </a:solidFill>
                 <a:latin typeface="Calibri"/>
               </a:rPr>
-              <a:t>Sensitive server telemetry (traffic meters, system load metrics) is removed from the student feed and protected inside the Super Admin Governance Desk.</a:t>
-            </a:r>
-          </a:p>
-          <a:p>
-            <a:pPr>
-              <a:spcAft>
-                <a:spcPts val="1000"/>
-              </a:spcAft>
-            </a:pPr>
-            <a:r>
-              <a:rPr b="1" i="0" sz="1300">
-                <a:solidFill>
-                  <a:srgbClr val="375623"/>
-                </a:solidFill>
-                <a:latin typeface="Calibri"/>
-              </a:rPr>
-              <a:t>◆  End-to-End Encryption (E2EE):
-   </a:t>
-            </a:r>
-            <a:r>
-              <a:rPr b="0" i="0" sz="1150">
-                <a:solidFill>
-                  <a:srgbClr val="1E293B"/>
-                </a:solidFill>
-                <a:latin typeface="Calibri"/>
-              </a:rPr>
-              <a:t>Student inquiry channels and confidential notices are encrypted using client-side cryptographic hashing, ensuring zero eavesdropping on public networks.</a:t>
-            </a:r>
-          </a:p>
-          <a:p>
-            <a:pPr>
-              <a:spcAft>
-                <a:spcPts val="1000"/>
-              </a:spcAft>
-            </a:pPr>
-            <a:r>
-              <a:rPr b="1" i="0" sz="1300">
-                <a:solidFill>
-                  <a:srgbClr val="375623"/>
-                </a:solidFill>
-                <a:latin typeface="Calibri"/>
-              </a:rPr>
-              <a:t>◆  Universal Multi-Device Responsiveness:
-   </a:t>
-            </a:r>
-            <a:r>
-              <a:rPr b="0" i="0" sz="1150">
-                <a:solidFill>
-                  <a:srgbClr val="1E293B"/>
-                </a:solidFill>
-                <a:latin typeface="Calibri"/>
-              </a:rPr>
-              <a:t>Optimized layout for mobile phones, tablets, and desktops. Includes sticky header/footer modal dialogs, compact mobile navigation avatars, and touch-friendly 2-column actions to prevent button clipping.</a:t>
-            </a:r>
-          </a:p>
-          <a:p>
-            <a:pPr>
-              <a:spcAft>
-                <a:spcPts val="1000"/>
-              </a:spcAft>
-            </a:pPr>
-            <a:r>
-              <a:rPr b="1" i="0" sz="1300">
-                <a:solidFill>
-                  <a:srgbClr val="375623"/>
-                </a:solidFill>
-                <a:latin typeface="Calibri"/>
-              </a:rPr>
-              <a:t>◆  Live Cloud Synchronization:
-   </a:t>
-            </a:r>
-            <a:r>
-              <a:rPr b="0" i="0" sz="1150">
-                <a:solidFill>
-                  <a:srgbClr val="1E293B"/>
-                </a:solidFill>
-                <a:latin typeface="Calibri"/>
-              </a:rPr>
-              <a:t>Hosted on Google Firebase Hosting (https://campnotify-eef91.web.app) with Cloud Firestore real-time listeners and offline caching.</a:t>
+              <a:t>Team Details:</a:t>
+            </a:r>
+          </a:p>
+        </p:txBody>
+      </p:sp>
+      <p:graphicFrame>
+        <p:nvGraphicFramePr>
+          <p:cNvPr id="9" name="Table 8"/>
+          <p:cNvGraphicFramePr>
+            <a:graphicFrameLocks noGrp="1"/>
+          </p:cNvGraphicFramePr>
+          <p:nvPr/>
+        </p:nvGraphicFramePr>
+        <p:xfrm>
+          <a:off x="731520" y="4480560"/>
+          <a:ext cx="5943599" cy="1371600"/>
+        </p:xfrm>
+        <a:graphic>
+          <a:graphicData uri="http://schemas.openxmlformats.org/drawingml/2006/table">
+            <a:tbl>
+              <a:tblPr firstRow="1" bandRow="1">
+                <a:tableStyleId>{5C22544A-7EE6-4342-B048-85BDC9FD1C3A}</a:tableStyleId>
+              </a:tblPr>
+              <a:tblGrid>
+                <a:gridCol w="2194560"/>
+                <a:gridCol w="3749039"/>
+              </a:tblGrid>
+              <a:tr h="342900">
+                <a:tc>
+                  <a:txBody>
+                    <a:bodyPr wrap="square" tIns="54864" bIns="54864"/>
+                    <a:lstStyle/>
+                    <a:p>
+                      <a:pPr algn="l"/>
+                      <a:r>
+                        <a:rPr b="1" i="0" sz="1100">
+                          <a:solidFill>
+                            <a:srgbClr val="FFFFFF"/>
+                          </a:solidFill>
+                          <a:latin typeface="Calibri"/>
+                        </a:rPr>
+                        <a:t>Student ID</a:t>
+                      </a:r>
+                    </a:p>
+                  </a:txBody>
+                  <a:tcPr anchor="ctr">
+                    <a:solidFill>
+                      <a:srgbClr val="70AD47"/>
+                    </a:solidFill>
+                  </a:tcPr>
+                </a:tc>
+                <a:tc>
+                  <a:txBody>
+                    <a:bodyPr wrap="square" tIns="54864" bIns="54864"/>
+                    <a:lstStyle/>
+                    <a:p>
+                      <a:pPr algn="l"/>
+                      <a:r>
+                        <a:rPr b="1" i="0" sz="1100">
+                          <a:solidFill>
+                            <a:srgbClr val="FFFFFF"/>
+                          </a:solidFill>
+                          <a:latin typeface="Calibri"/>
+                        </a:rPr>
+                        <a:t>Student Name</a:t>
+                      </a:r>
+                    </a:p>
+                  </a:txBody>
+                  <a:tcPr anchor="ctr">
+                    <a:solidFill>
+                      <a:srgbClr val="70AD47"/>
+                    </a:solidFill>
+                  </a:tcPr>
+                </a:tc>
+              </a:tr>
+              <a:tr h="342900">
+                <a:tc>
+                  <a:txBody>
+                    <a:bodyPr wrap="square" tIns="54864" bIns="54864"/>
+                    <a:lstStyle/>
+                    <a:p>
+                      <a:pPr algn="l"/>
+                      <a:r>
+                        <a:rPr b="1" i="0" sz="1100">
+                          <a:solidFill>
+                            <a:srgbClr val="1E293B"/>
+                          </a:solidFill>
+                          <a:latin typeface="Calibri"/>
+                        </a:rPr>
+                        <a:t>VU4F2526072</a:t>
+                      </a:r>
+                    </a:p>
+                  </a:txBody>
+                  <a:tcPr anchor="ctr">
+                    <a:solidFill>
+                      <a:srgbClr val="E2EFDA"/>
+                    </a:solidFill>
+                  </a:tcPr>
+                </a:tc>
+                <a:tc>
+                  <a:txBody>
+                    <a:bodyPr wrap="square" tIns="54864" bIns="54864"/>
+                    <a:lstStyle/>
+                    <a:p>
+                      <a:pPr algn="l"/>
+                      <a:r>
+                        <a:rPr b="1" i="0" sz="1100">
+                          <a:solidFill>
+                            <a:srgbClr val="1E293B"/>
+                          </a:solidFill>
+                          <a:latin typeface="Calibri"/>
+                        </a:rPr>
+                        <a:t>PRATIK ATPADKAR</a:t>
+                      </a:r>
+                    </a:p>
+                  </a:txBody>
+                  <a:tcPr anchor="ctr">
+                    <a:solidFill>
+                      <a:srgbClr val="E2EFDA"/>
+                    </a:solidFill>
+                  </a:tcPr>
+                </a:tc>
+              </a:tr>
+              <a:tr h="342900">
+                <a:tc>
+                  <a:txBody>
+                    <a:bodyPr wrap="square" tIns="54864" bIns="54864"/>
+                    <a:lstStyle/>
+                    <a:p>
+                      <a:pPr algn="l"/>
+                      <a:r>
+                        <a:rPr b="1" i="0" sz="1100">
+                          <a:solidFill>
+                            <a:srgbClr val="1E293B"/>
+                          </a:solidFill>
+                          <a:latin typeface="Calibri"/>
+                        </a:rPr>
+                        <a:t>VU4F2526066</a:t>
+                      </a:r>
+                    </a:p>
+                  </a:txBody>
+                  <a:tcPr anchor="ctr">
+                    <a:solidFill>
+                      <a:srgbClr val="F2F8EE"/>
+                    </a:solidFill>
+                  </a:tcPr>
+                </a:tc>
+                <a:tc>
+                  <a:txBody>
+                    <a:bodyPr wrap="square" tIns="54864" bIns="54864"/>
+                    <a:lstStyle/>
+                    <a:p>
+                      <a:pPr algn="l"/>
+                      <a:r>
+                        <a:rPr b="1" i="0" sz="1100">
+                          <a:solidFill>
+                            <a:srgbClr val="1E293B"/>
+                          </a:solidFill>
+                          <a:latin typeface="Calibri"/>
+                        </a:rPr>
+                        <a:t>HARSH TIWAR</a:t>
+                      </a:r>
+                    </a:p>
+                  </a:txBody>
+                  <a:tcPr anchor="ctr">
+                    <a:solidFill>
+                      <a:srgbClr val="F2F8EE"/>
+                    </a:solidFill>
+                  </a:tcPr>
+                </a:tc>
+              </a:tr>
+              <a:tr h="342900">
+                <a:tc>
+                  <a:txBody>
+                    <a:bodyPr wrap="square" tIns="54864" bIns="54864"/>
+                    <a:lstStyle/>
+                    <a:p>
+                      <a:pPr algn="l"/>
+                      <a:r>
+                        <a:rPr b="1" i="0" sz="1100">
+                          <a:solidFill>
+                            <a:srgbClr val="1E293B"/>
+                          </a:solidFill>
+                          <a:latin typeface="Calibri"/>
+                        </a:rPr>
+                        <a:t>VU4F2526062</a:t>
+                      </a:r>
+                    </a:p>
+                  </a:txBody>
+                  <a:tcPr anchor="ctr">
+                    <a:solidFill>
+                      <a:srgbClr val="E2EFDA"/>
+                    </a:solidFill>
+                  </a:tcPr>
+                </a:tc>
+                <a:tc>
+                  <a:txBody>
+                    <a:bodyPr wrap="square" tIns="54864" bIns="54864"/>
+                    <a:lstStyle/>
+                    <a:p>
+                      <a:pPr algn="l"/>
+                      <a:r>
+                        <a:rPr b="1" i="0" sz="1100">
+                          <a:solidFill>
+                            <a:srgbClr val="1E293B"/>
+                          </a:solidFill>
+                          <a:latin typeface="Calibri"/>
+                        </a:rPr>
+                        <a:t>PARTH GADADHE</a:t>
+                      </a:r>
+                    </a:p>
+                  </a:txBody>
+                  <a:tcPr anchor="ctr">
+                    <a:solidFill>
+                      <a:srgbClr val="E2EFDA"/>
+                    </a:solidFill>
+                  </a:tcPr>
+                </a:tc>
+              </a:tr>
+            </a:tbl>
+          </a:graphicData>
+        </a:graphic>
+      </p:graphicFrame>
+      <p:sp>
+        <p:nvSpPr>
+          <p:cNvPr id="10" name="TextBox 9"/>
+          <p:cNvSpPr txBox="1"/>
+          <p:nvPr/>
+        </p:nvSpPr>
+        <p:spPr>
+          <a:xfrm>
+            <a:off x="731520" y="6035040"/>
+            <a:ext cx="8961120" cy="457200"/>
+          </a:xfrm>
+          <a:prstGeom prst="rect">
+            <a:avLst/>
+          </a:prstGeom>
+          <a:noFill/>
+        </p:spPr>
+        <p:txBody>
+          <a:bodyPr wrap="none">
+            <a:spAutoFit/>
+          </a:bodyPr>
+          <a:lstStyle/>
+          <a:p>
+            <a:r>
+              <a:rPr b="0" i="1" sz="1100">
+                <a:solidFill>
+                  <a:srgbClr val="64748B"/>
+                </a:solidFill>
+                <a:latin typeface="Calibri"/>
+              </a:rPr>
+              <a:t>Department of Information Technology | VPPCOE&amp;VA, Sion, Mumbai</a:t>
             </a:r>
           </a:p>
         </p:txBody>
@@ -4008,7 +3662,7 @@
 </p:sld>
 </file>
 
-<file path=ppt/slides/slide11.xml><?xml version="1.0" encoding="utf-8"?>
+<file path=ppt/slides/slide10.xml><?xml version="1.0" encoding="utf-8"?>
 <p:sld xmlns:a="http://schemas.openxmlformats.org/drawingml/2006/main" xmlns:p="http://schemas.openxmlformats.org/presentationml/2006/main" xmlns:r="http://schemas.openxmlformats.org/officeDocument/2006/relationships">
   <p:cSld>
     <p:spTree>
@@ -4184,725 +3838,204 @@
               </a:defRPr>
             </a:pPr>
             <a:r>
-              <a:t>Project Planning &amp; 13-Week Timeline:</a:t>
-            </a:r>
-          </a:p>
-        </p:txBody>
-      </p:sp>
-      <p:graphicFrame>
-        <p:nvGraphicFramePr>
-          <p:cNvPr id="6" name="Table 5"/>
-          <p:cNvGraphicFramePr>
-            <a:graphicFrameLocks noGrp="1"/>
-          </p:cNvGraphicFramePr>
+              <a:t>Conclusion:</a:t>
+            </a:r>
+          </a:p>
+        </p:txBody>
+      </p:sp>
+      <p:sp>
+        <p:nvSpPr>
+          <p:cNvPr id="6" name="TextBox 5"/>
+          <p:cNvSpPr txBox="1"/>
           <p:nvPr/>
-        </p:nvGraphicFramePr>
-        <p:xfrm>
-          <a:off x="731520" y="1463040"/>
-          <a:ext cx="9601200" cy="4572000"/>
-        </p:xfrm>
-        <a:graphic>
-          <a:graphicData uri="http://schemas.openxmlformats.org/drawingml/2006/table">
-            <a:tbl>
-              <a:tblPr firstRow="1" bandRow="1">
-                <a:tableStyleId>{5C22544A-7EE6-4342-B048-85BDC9FD1C3A}</a:tableStyleId>
-              </a:tblPr>
-              <a:tblGrid>
-                <a:gridCol w="1280160"/>
-                <a:gridCol w="5029200"/>
-                <a:gridCol w="1645920"/>
-                <a:gridCol w="1645920"/>
-              </a:tblGrid>
-              <a:tr h="653142">
-                <a:tc>
-                  <a:txBody>
-                    <a:bodyPr wrap="square" tIns="54864" bIns="54864"/>
-                    <a:lstStyle/>
-                    <a:p>
-                      <a:pPr algn="ctr">
-                        <a:defRPr sz="1100" b="1">
-                          <a:solidFill>
-                            <a:srgbClr val="FFFFFF"/>
-                          </a:solidFill>
-                          <a:latin typeface="Calibri"/>
-                        </a:defRPr>
-                      </a:pPr>
-                      <a:r>
-                        <a:t>Phase / Week</a:t>
-                      </a:r>
-                    </a:p>
-                  </a:txBody>
-                  <a:tcPr anchor="ctr">
-                    <a:solidFill>
-                      <a:srgbClr val="70AD47"/>
-                    </a:solidFill>
-                  </a:tcPr>
-                </a:tc>
-                <a:tc>
-                  <a:txBody>
-                    <a:bodyPr wrap="square" tIns="54864" bIns="54864"/>
-                    <a:lstStyle/>
-                    <a:p>
-                      <a:pPr algn="ctr">
-                        <a:defRPr sz="1100" b="1">
-                          <a:solidFill>
-                            <a:srgbClr val="FFFFFF"/>
-                          </a:solidFill>
-                          <a:latin typeface="Calibri"/>
-                        </a:defRPr>
-                      </a:pPr>
-                      <a:r>
-                        <a:t>Planned Activity Description</a:t>
-                      </a:r>
-                    </a:p>
-                  </a:txBody>
-                  <a:tcPr anchor="ctr">
-                    <a:solidFill>
-                      <a:srgbClr val="70AD47"/>
-                    </a:solidFill>
-                  </a:tcPr>
-                </a:tc>
-                <a:tc>
-                  <a:txBody>
-                    <a:bodyPr wrap="square" tIns="54864" bIns="54864"/>
-                    <a:lstStyle/>
-                    <a:p>
-                      <a:pPr algn="ctr">
-                        <a:defRPr sz="1100" b="1">
-                          <a:solidFill>
-                            <a:srgbClr val="FFFFFF"/>
-                          </a:solidFill>
-                          <a:latin typeface="Calibri"/>
-                        </a:defRPr>
-                      </a:pPr>
-                      <a:r>
-                        <a:t>Target Date</a:t>
-                      </a:r>
-                    </a:p>
-                  </a:txBody>
-                  <a:tcPr anchor="ctr">
-                    <a:solidFill>
-                      <a:srgbClr val="70AD47"/>
-                    </a:solidFill>
-                  </a:tcPr>
-                </a:tc>
-                <a:tc>
-                  <a:txBody>
-                    <a:bodyPr wrap="square" tIns="54864" bIns="54864"/>
-                    <a:lstStyle/>
-                    <a:p>
-                      <a:pPr algn="ctr">
-                        <a:defRPr sz="1100" b="1">
-                          <a:solidFill>
-                            <a:srgbClr val="FFFFFF"/>
-                          </a:solidFill>
-                          <a:latin typeface="Calibri"/>
-                        </a:defRPr>
-                      </a:pPr>
-                      <a:r>
-                        <a:t>Status</a:t>
-                      </a:r>
-                    </a:p>
-                  </a:txBody>
-                  <a:tcPr anchor="ctr">
-                    <a:solidFill>
-                      <a:srgbClr val="70AD47"/>
-                    </a:solidFill>
-                  </a:tcPr>
-                </a:tc>
-              </a:tr>
-              <a:tr h="653142">
-                <a:tc>
-                  <a:txBody>
-                    <a:bodyPr wrap="square" tIns="54864" bIns="54864"/>
-                    <a:lstStyle/>
-                    <a:p>
-                      <a:pPr algn="ctr">
-                        <a:defRPr sz="1000" b="1">
-                          <a:solidFill>
-                            <a:srgbClr val="1E293B"/>
-                          </a:solidFill>
-                          <a:latin typeface="Calibri"/>
-                        </a:defRPr>
-                      </a:pPr>
-                      <a:r>
-                        <a:t>Weeks 1 – 2</a:t>
-                      </a:r>
-                    </a:p>
-                  </a:txBody>
-                  <a:tcPr anchor="ctr">
-                    <a:solidFill>
-                      <a:srgbClr val="E2EFDA"/>
-                    </a:solidFill>
-                  </a:tcPr>
-                </a:tc>
-                <a:tc>
-                  <a:txBody>
-                    <a:bodyPr wrap="square" tIns="54864" bIns="54864"/>
-                    <a:lstStyle/>
-                    <a:p>
-                      <a:pPr algn="l">
-                        <a:defRPr sz="1000" b="0">
-                          <a:solidFill>
-                            <a:srgbClr val="1E293B"/>
-                          </a:solidFill>
-                          <a:latin typeface="Calibri"/>
-                        </a:defRPr>
-                      </a:pPr>
-                      <a:r>
-                        <a:t>Domain selection, survey of campus announcement bottlenecks, team formulation &amp; literature review</a:t>
-                      </a:r>
-                    </a:p>
-                  </a:txBody>
-                  <a:tcPr anchor="ctr">
-                    <a:solidFill>
-                      <a:srgbClr val="E2EFDA"/>
-                    </a:solidFill>
-                  </a:tcPr>
-                </a:tc>
-                <a:tc>
-                  <a:txBody>
-                    <a:bodyPr wrap="square" tIns="54864" bIns="54864"/>
-                    <a:lstStyle/>
-                    <a:p>
-                      <a:pPr algn="ctr">
-                        <a:defRPr sz="1000" b="0">
-                          <a:solidFill>
-                            <a:srgbClr val="1E293B"/>
-                          </a:solidFill>
-                          <a:latin typeface="Calibri"/>
-                        </a:defRPr>
-                      </a:pPr>
-                      <a:r>
-                        <a:t>08/07/2025 - 15/07/2025</a:t>
-                      </a:r>
-                    </a:p>
-                  </a:txBody>
-                  <a:tcPr anchor="ctr">
-                    <a:solidFill>
-                      <a:srgbClr val="E2EFDA"/>
-                    </a:solidFill>
-                  </a:tcPr>
-                </a:tc>
-                <a:tc>
-                  <a:txBody>
-                    <a:bodyPr wrap="square" tIns="54864" bIns="54864"/>
-                    <a:lstStyle/>
-                    <a:p>
-                      <a:pPr algn="ctr">
-                        <a:defRPr sz="1000" b="0">
-                          <a:solidFill>
-                            <a:srgbClr val="1E293B"/>
-                          </a:solidFill>
-                          <a:latin typeface="Calibri"/>
-                        </a:defRPr>
-                      </a:pPr>
-                      <a:r>
-                        <a:t>Completed</a:t>
-                      </a:r>
-                    </a:p>
-                  </a:txBody>
-                  <a:tcPr anchor="ctr">
-                    <a:solidFill>
-                      <a:srgbClr val="E2EFDA"/>
-                    </a:solidFill>
-                  </a:tcPr>
-                </a:tc>
-              </a:tr>
-              <a:tr h="653142">
-                <a:tc>
-                  <a:txBody>
-                    <a:bodyPr wrap="square" tIns="54864" bIns="54864"/>
-                    <a:lstStyle/>
-                    <a:p>
-                      <a:pPr algn="ctr">
-                        <a:defRPr sz="1000" b="1">
-                          <a:solidFill>
-                            <a:srgbClr val="1E293B"/>
-                          </a:solidFill>
-                          <a:latin typeface="Calibri"/>
-                        </a:defRPr>
-                      </a:pPr>
-                      <a:r>
-                        <a:t>Weeks 3 – 4</a:t>
-                      </a:r>
-                    </a:p>
-                  </a:txBody>
-                  <a:tcPr anchor="ctr">
-                    <a:solidFill>
-                      <a:srgbClr val="FFFFFF"/>
-                    </a:solidFill>
-                  </a:tcPr>
-                </a:tc>
-                <a:tc>
-                  <a:txBody>
-                    <a:bodyPr wrap="square" tIns="54864" bIns="54864"/>
-                    <a:lstStyle/>
-                    <a:p>
-                      <a:pPr algn="l">
-                        <a:defRPr sz="1000" b="0">
-                          <a:solidFill>
-                            <a:srgbClr val="1E293B"/>
-                          </a:solidFill>
-                          <a:latin typeface="Calibri"/>
-                        </a:defRPr>
-                      </a:pPr>
-                      <a:r>
-                        <a:t>System Requirement Specification (SRS), hardware/software constraints, JDK setup &amp; UML architecture</a:t>
-                      </a:r>
-                    </a:p>
-                  </a:txBody>
-                  <a:tcPr anchor="ctr">
-                    <a:solidFill>
-                      <a:srgbClr val="FFFFFF"/>
-                    </a:solidFill>
-                  </a:tcPr>
-                </a:tc>
-                <a:tc>
-                  <a:txBody>
-                    <a:bodyPr wrap="square" tIns="54864" bIns="54864"/>
-                    <a:lstStyle/>
-                    <a:p>
-                      <a:pPr algn="ctr">
-                        <a:defRPr sz="1000" b="0">
-                          <a:solidFill>
-                            <a:srgbClr val="1E293B"/>
-                          </a:solidFill>
-                          <a:latin typeface="Calibri"/>
-                        </a:defRPr>
-                      </a:pPr>
-                      <a:r>
-                        <a:t>22/07/2025 - 29/07/2025</a:t>
-                      </a:r>
-                    </a:p>
-                  </a:txBody>
-                  <a:tcPr anchor="ctr">
-                    <a:solidFill>
-                      <a:srgbClr val="FFFFFF"/>
-                    </a:solidFill>
-                  </a:tcPr>
-                </a:tc>
-                <a:tc>
-                  <a:txBody>
-                    <a:bodyPr wrap="square" tIns="54864" bIns="54864"/>
-                    <a:lstStyle/>
-                    <a:p>
-                      <a:pPr algn="ctr">
-                        <a:defRPr sz="1000" b="0">
-                          <a:solidFill>
-                            <a:srgbClr val="1E293B"/>
-                          </a:solidFill>
-                          <a:latin typeface="Calibri"/>
-                        </a:defRPr>
-                      </a:pPr>
-                      <a:r>
-                        <a:t>Completed</a:t>
-                      </a:r>
-                    </a:p>
-                  </a:txBody>
-                  <a:tcPr anchor="ctr">
-                    <a:solidFill>
-                      <a:srgbClr val="FFFFFF"/>
-                    </a:solidFill>
-                  </a:tcPr>
-                </a:tc>
-              </a:tr>
-              <a:tr h="653142">
-                <a:tc>
-                  <a:txBody>
-                    <a:bodyPr wrap="square" tIns="54864" bIns="54864"/>
-                    <a:lstStyle/>
-                    <a:p>
-                      <a:pPr algn="ctr">
-                        <a:defRPr sz="1000" b="1">
-                          <a:solidFill>
-                            <a:srgbClr val="1E293B"/>
-                          </a:solidFill>
-                          <a:latin typeface="Calibri"/>
-                        </a:defRPr>
-                      </a:pPr>
-                      <a:r>
-                        <a:t>Weeks 5 – 6</a:t>
-                      </a:r>
-                    </a:p>
-                  </a:txBody>
-                  <a:tcPr anchor="ctr">
-                    <a:solidFill>
-                      <a:srgbClr val="E2EFDA"/>
-                    </a:solidFill>
-                  </a:tcPr>
-                </a:tc>
-                <a:tc>
-                  <a:txBody>
-                    <a:bodyPr wrap="square" tIns="54864" bIns="54864"/>
-                    <a:lstStyle/>
-                    <a:p>
-                      <a:pPr algn="l">
-                        <a:defRPr sz="1000" b="0">
-                          <a:solidFill>
-                            <a:srgbClr val="1E293B"/>
-                          </a:solidFill>
-                          <a:latin typeface="Calibri"/>
-                        </a:defRPr>
-                      </a:pPr>
-                      <a:r>
-                        <a:t>Core Java Model classes implementation, service layer, file persistence engine (BufferedReader/PrintWriter)</a:t>
-                      </a:r>
-                    </a:p>
-                  </a:txBody>
-                  <a:tcPr anchor="ctr">
-                    <a:solidFill>
-                      <a:srgbClr val="E2EFDA"/>
-                    </a:solidFill>
-                  </a:tcPr>
-                </a:tc>
-                <a:tc>
-                  <a:txBody>
-                    <a:bodyPr wrap="square" tIns="54864" bIns="54864"/>
-                    <a:lstStyle/>
-                    <a:p>
-                      <a:pPr algn="ctr">
-                        <a:defRPr sz="1000" b="0">
-                          <a:solidFill>
-                            <a:srgbClr val="1E293B"/>
-                          </a:solidFill>
-                          <a:latin typeface="Calibri"/>
-                        </a:defRPr>
-                      </a:pPr>
-                      <a:r>
-                        <a:t>05/08/2025 - 12/08/2025</a:t>
-                      </a:r>
-                    </a:p>
-                  </a:txBody>
-                  <a:tcPr anchor="ctr">
-                    <a:solidFill>
-                      <a:srgbClr val="E2EFDA"/>
-                    </a:solidFill>
-                  </a:tcPr>
-                </a:tc>
-                <a:tc>
-                  <a:txBody>
-                    <a:bodyPr wrap="square" tIns="54864" bIns="54864"/>
-                    <a:lstStyle/>
-                    <a:p>
-                      <a:pPr algn="ctr">
-                        <a:defRPr sz="1000" b="0">
-                          <a:solidFill>
-                            <a:srgbClr val="1E293B"/>
-                          </a:solidFill>
-                          <a:latin typeface="Calibri"/>
-                        </a:defRPr>
-                      </a:pPr>
-                      <a:r>
-                        <a:t>Completed</a:t>
-                      </a:r>
-                    </a:p>
-                  </a:txBody>
-                  <a:tcPr anchor="ctr">
-                    <a:solidFill>
-                      <a:srgbClr val="E2EFDA"/>
-                    </a:solidFill>
-                  </a:tcPr>
-                </a:tc>
-              </a:tr>
-              <a:tr h="653142">
-                <a:tc>
-                  <a:txBody>
-                    <a:bodyPr wrap="square" tIns="54864" bIns="54864"/>
-                    <a:lstStyle/>
-                    <a:p>
-                      <a:pPr algn="ctr">
-                        <a:defRPr sz="1000" b="1">
-                          <a:solidFill>
-                            <a:srgbClr val="1E293B"/>
-                          </a:solidFill>
-                          <a:latin typeface="Calibri"/>
-                        </a:defRPr>
-                      </a:pPr>
-                      <a:r>
-                        <a:t>Week 7</a:t>
-                      </a:r>
-                    </a:p>
-                  </a:txBody>
-                  <a:tcPr anchor="ctr">
-                    <a:solidFill>
-                      <a:srgbClr val="FFFFFF"/>
-                    </a:solidFill>
-                  </a:tcPr>
-                </a:tc>
-                <a:tc>
-                  <a:txBody>
-                    <a:bodyPr wrap="square" tIns="54864" bIns="54864"/>
-                    <a:lstStyle/>
-                    <a:p>
-                      <a:pPr algn="l">
-                        <a:defRPr sz="1000" b="0">
-                          <a:solidFill>
-                            <a:srgbClr val="1E293B"/>
-                          </a:solidFill>
-                          <a:latin typeface="Calibri"/>
-                        </a:defRPr>
-                      </a:pPr>
-                      <a:r>
-                        <a:t>Review – I Evaluation presentation &amp; project synopsis assessment before faculty panel</a:t>
-                      </a:r>
-                    </a:p>
-                  </a:txBody>
-                  <a:tcPr anchor="ctr">
-                    <a:solidFill>
-                      <a:srgbClr val="FFFFFF"/>
-                    </a:solidFill>
-                  </a:tcPr>
-                </a:tc>
-                <a:tc>
-                  <a:txBody>
-                    <a:bodyPr wrap="square" tIns="54864" bIns="54864"/>
-                    <a:lstStyle/>
-                    <a:p>
-                      <a:pPr algn="ctr">
-                        <a:defRPr sz="1000" b="0">
-                          <a:solidFill>
-                            <a:srgbClr val="1E293B"/>
-                          </a:solidFill>
-                          <a:latin typeface="Calibri"/>
-                        </a:defRPr>
-                      </a:pPr>
-                      <a:r>
-                        <a:t>19/08/2025</a:t>
-                      </a:r>
-                    </a:p>
-                  </a:txBody>
-                  <a:tcPr anchor="ctr">
-                    <a:solidFill>
-                      <a:srgbClr val="FFFFFF"/>
-                    </a:solidFill>
-                  </a:tcPr>
-                </a:tc>
-                <a:tc>
-                  <a:txBody>
-                    <a:bodyPr wrap="square" tIns="54864" bIns="54864"/>
-                    <a:lstStyle/>
-                    <a:p>
-                      <a:pPr algn="ctr">
-                        <a:defRPr sz="1000" b="0">
-                          <a:solidFill>
-                            <a:srgbClr val="1E293B"/>
-                          </a:solidFill>
-                          <a:latin typeface="Calibri"/>
-                        </a:defRPr>
-                      </a:pPr>
-                      <a:r>
-                        <a:t>Completed</a:t>
-                      </a:r>
-                    </a:p>
-                  </a:txBody>
-                  <a:tcPr anchor="ctr">
-                    <a:solidFill>
-                      <a:srgbClr val="FFFFFF"/>
-                    </a:solidFill>
-                  </a:tcPr>
-                </a:tc>
-              </a:tr>
-              <a:tr h="653142">
-                <a:tc>
-                  <a:txBody>
-                    <a:bodyPr wrap="square" tIns="54864" bIns="54864"/>
-                    <a:lstStyle/>
-                    <a:p>
-                      <a:pPr algn="ctr">
-                        <a:defRPr sz="1000" b="1">
-                          <a:solidFill>
-                            <a:srgbClr val="1E293B"/>
-                          </a:solidFill>
-                          <a:latin typeface="Calibri"/>
-                        </a:defRPr>
-                      </a:pPr>
-                      <a:r>
-                        <a:t>Weeks 8 – 10</a:t>
-                      </a:r>
-                    </a:p>
-                  </a:txBody>
-                  <a:tcPr anchor="ctr">
-                    <a:solidFill>
-                      <a:srgbClr val="E2EFDA"/>
-                    </a:solidFill>
-                  </a:tcPr>
-                </a:tc>
-                <a:tc>
-                  <a:txBody>
-                    <a:bodyPr wrap="square" tIns="54864" bIns="54864"/>
-                    <a:lstStyle/>
-                    <a:p>
-                      <a:pPr algn="l">
-                        <a:defRPr sz="1000" b="0">
-                          <a:solidFill>
-                            <a:srgbClr val="1E293B"/>
-                          </a:solidFill>
-                          <a:latin typeface="Calibri"/>
-                        </a:defRPr>
-                      </a:pPr>
-                      <a:r>
-                        <a:t>Console CLI driver interactive menu, Web dashboard UI (HTML5/CSS3), and Firebase real-time cloud sync</a:t>
-                      </a:r>
-                    </a:p>
-                  </a:txBody>
-                  <a:tcPr anchor="ctr">
-                    <a:solidFill>
-                      <a:srgbClr val="E2EFDA"/>
-                    </a:solidFill>
-                  </a:tcPr>
-                </a:tc>
-                <a:tc>
-                  <a:txBody>
-                    <a:bodyPr wrap="square" tIns="54864" bIns="54864"/>
-                    <a:lstStyle/>
-                    <a:p>
-                      <a:pPr algn="ctr">
-                        <a:defRPr sz="1000" b="0">
-                          <a:solidFill>
-                            <a:srgbClr val="1E293B"/>
-                          </a:solidFill>
-                          <a:latin typeface="Calibri"/>
-                        </a:defRPr>
-                      </a:pPr>
-                      <a:r>
-                        <a:t>26/08/2025 - 09/09/2025</a:t>
-                      </a:r>
-                    </a:p>
-                  </a:txBody>
-                  <a:tcPr anchor="ctr">
-                    <a:solidFill>
-                      <a:srgbClr val="E2EFDA"/>
-                    </a:solidFill>
-                  </a:tcPr>
-                </a:tc>
-                <a:tc>
-                  <a:txBody>
-                    <a:bodyPr wrap="square" tIns="54864" bIns="54864"/>
-                    <a:lstStyle/>
-                    <a:p>
-                      <a:pPr algn="ctr">
-                        <a:defRPr sz="1000" b="0">
-                          <a:solidFill>
-                            <a:srgbClr val="1E293B"/>
-                          </a:solidFill>
-                          <a:latin typeface="Calibri"/>
-                        </a:defRPr>
-                      </a:pPr>
-                      <a:r>
-                        <a:t>Completed</a:t>
-                      </a:r>
-                    </a:p>
-                  </a:txBody>
-                  <a:tcPr anchor="ctr">
-                    <a:solidFill>
-                      <a:srgbClr val="E2EFDA"/>
-                    </a:solidFill>
-                  </a:tcPr>
-                </a:tc>
-              </a:tr>
-              <a:tr h="653148">
-                <a:tc>
-                  <a:txBody>
-                    <a:bodyPr wrap="square" tIns="54864" bIns="54864"/>
-                    <a:lstStyle/>
-                    <a:p>
-                      <a:pPr algn="ctr">
-                        <a:defRPr sz="1000" b="1">
-                          <a:solidFill>
-                            <a:srgbClr val="1E293B"/>
-                          </a:solidFill>
-                          <a:latin typeface="Calibri"/>
-                        </a:defRPr>
-                      </a:pPr>
-                      <a:r>
-                        <a:t>Weeks 11 – 13</a:t>
-                      </a:r>
-                    </a:p>
-                  </a:txBody>
-                  <a:tcPr anchor="ctr">
-                    <a:solidFill>
-                      <a:srgbClr val="FFFFFF"/>
-                    </a:solidFill>
-                  </a:tcPr>
-                </a:tc>
-                <a:tc>
-                  <a:txBody>
-                    <a:bodyPr wrap="square" tIns="54864" bIns="54864"/>
-                    <a:lstStyle/>
-                    <a:p>
-                      <a:pPr algn="l">
-                        <a:defRPr sz="1000" b="0">
-                          <a:solidFill>
-                            <a:srgbClr val="1E293B"/>
-                          </a:solidFill>
-                          <a:latin typeface="Calibri"/>
-                        </a:defRPr>
-                      </a:pPr>
-                      <a:r>
-                        <a:t>92 Automated test suite execution, Review – II presentation, documentation compilation &amp; viva rehearsal</a:t>
-                      </a:r>
-                    </a:p>
-                  </a:txBody>
-                  <a:tcPr anchor="ctr">
-                    <a:solidFill>
-                      <a:srgbClr val="FFFFFF"/>
-                    </a:solidFill>
-                  </a:tcPr>
-                </a:tc>
-                <a:tc>
-                  <a:txBody>
-                    <a:bodyPr wrap="square" tIns="54864" bIns="54864"/>
-                    <a:lstStyle/>
-                    <a:p>
-                      <a:pPr algn="ctr">
-                        <a:defRPr sz="1000" b="0">
-                          <a:solidFill>
-                            <a:srgbClr val="1E293B"/>
-                          </a:solidFill>
-                          <a:latin typeface="Calibri"/>
-                        </a:defRPr>
-                      </a:pPr>
-                      <a:r>
-                        <a:t>16/09/2025 - 30/09/2025</a:t>
-                      </a:r>
-                    </a:p>
-                  </a:txBody>
-                  <a:tcPr anchor="ctr">
-                    <a:solidFill>
-                      <a:srgbClr val="FFFFFF"/>
-                    </a:solidFill>
-                  </a:tcPr>
-                </a:tc>
-                <a:tc>
-                  <a:txBody>
-                    <a:bodyPr wrap="square" tIns="54864" bIns="54864"/>
-                    <a:lstStyle/>
-                    <a:p>
-                      <a:pPr algn="ctr">
-                        <a:defRPr sz="1000" b="0">
-                          <a:solidFill>
-                            <a:srgbClr val="1E293B"/>
-                          </a:solidFill>
-                          <a:latin typeface="Calibri"/>
-                        </a:defRPr>
-                      </a:pPr>
-                      <a:r>
-                        <a:t>Completed</a:t>
-                      </a:r>
-                    </a:p>
-                  </a:txBody>
-                  <a:tcPr anchor="ctr">
-                    <a:solidFill>
-                      <a:srgbClr val="FFFFFF"/>
-                    </a:solidFill>
-                  </a:tcPr>
-                </a:tc>
-              </a:tr>
-            </a:tbl>
-          </a:graphicData>
-        </a:graphic>
-      </p:graphicFrame>
+        </p:nvSpPr>
+        <p:spPr>
+          <a:xfrm>
+            <a:off x="914400" y="1371600"/>
+            <a:ext cx="8686800" cy="4754880"/>
+          </a:xfrm>
+          <a:prstGeom prst="rect">
+            <a:avLst/>
+          </a:prstGeom>
+          <a:noFill/>
+        </p:spPr>
+        <p:txBody>
+          <a:bodyPr wrap="square">
+            <a:spAutoFit/>
+          </a:bodyPr>
+          <a:lstStyle/>
+          <a:p>
+            <a:pPr>
+              <a:spcAft>
+                <a:spcPts val="1200"/>
+              </a:spcAft>
+            </a:pPr>
+            <a:r>
+              <a:rPr b="1" i="0" sz="1400">
+                <a:solidFill>
+                  <a:srgbClr val="70AD47"/>
+                </a:solidFill>
+                <a:latin typeface="Calibri"/>
+              </a:rPr>
+              <a:t>►  </a:t>
+            </a:r>
+            <a:r>
+              <a:rPr b="1" i="0" sz="1400">
+                <a:solidFill>
+                  <a:srgbClr val="375623"/>
+                </a:solidFill>
+                <a:latin typeface="Calibri"/>
+              </a:rPr>
+              <a:t>Successful Academic &amp; Technical Delivery: </a:t>
+            </a:r>
+            <a:r>
+              <a:rPr b="0" i="0" sz="1300">
+                <a:solidFill>
+                  <a:srgbClr val="1E293B"/>
+                </a:solidFill>
+                <a:latin typeface="Calibri"/>
+              </a:rPr>
+              <a:t>Campus Notify successfully bridges the gap between academic theory and practical software engineering using Core Java SE 17 object-oriented paradigms.</a:t>
+            </a:r>
+          </a:p>
+          <a:p>
+            <a:pPr>
+              <a:spcAft>
+                <a:spcPts val="1200"/>
+              </a:spcAft>
+            </a:pPr>
+            <a:r>
+              <a:rPr b="1" i="0" sz="1400">
+                <a:solidFill>
+                  <a:srgbClr val="70AD47"/>
+                </a:solidFill>
+                <a:latin typeface="Calibri"/>
+              </a:rPr>
+              <a:t>►  </a:t>
+            </a:r>
+            <a:r>
+              <a:rPr b="1" i="0" sz="1400">
+                <a:solidFill>
+                  <a:srgbClr val="375623"/>
+                </a:solidFill>
+                <a:latin typeface="Calibri"/>
+              </a:rPr>
+              <a:t>Elimination of Communication Bottlenecks: </a:t>
+            </a:r>
+            <a:r>
+              <a:rPr b="0" i="0" sz="1300">
+                <a:solidFill>
+                  <a:srgbClr val="1E293B"/>
+                </a:solidFill>
+                <a:latin typeface="Calibri"/>
+              </a:rPr>
+              <a:t>Replaced fragmented physical notice boards and chaotic WhatsApp groups with a structured, instant, and searchable institutional platform.</a:t>
+            </a:r>
+          </a:p>
+          <a:p>
+            <a:pPr>
+              <a:spcAft>
+                <a:spcPts val="1200"/>
+              </a:spcAft>
+            </a:pPr>
+            <a:r>
+              <a:rPr b="1" i="0" sz="1400">
+                <a:solidFill>
+                  <a:srgbClr val="70AD47"/>
+                </a:solidFill>
+                <a:latin typeface="Calibri"/>
+              </a:rPr>
+              <a:t>►  </a:t>
+            </a:r>
+            <a:r>
+              <a:rPr b="1" i="0" sz="1400">
+                <a:solidFill>
+                  <a:srgbClr val="375623"/>
+                </a:solidFill>
+                <a:latin typeface="Calibri"/>
+              </a:rPr>
+              <a:t>Administrative Governance &amp; Transparency: </a:t>
+            </a:r>
+            <a:r>
+              <a:rPr b="0" i="0" sz="1300">
+                <a:solidFill>
+                  <a:srgbClr val="1E293B"/>
+                </a:solidFill>
+                <a:latin typeface="Calibri"/>
+              </a:rPr>
+              <a:t>Enforced strict Role-Based Access Control and verifiable digital acknowledgment receipts, completely eliminating lost circular disputes.</a:t>
+            </a:r>
+          </a:p>
+          <a:p>
+            <a:pPr>
+              <a:spcAft>
+                <a:spcPts val="1200"/>
+              </a:spcAft>
+            </a:pPr>
+            <a:r>
+              <a:rPr b="1" i="0" sz="1400">
+                <a:solidFill>
+                  <a:srgbClr val="70AD47"/>
+                </a:solidFill>
+                <a:latin typeface="Calibri"/>
+              </a:rPr>
+              <a:t>►  </a:t>
+            </a:r>
+            <a:r>
+              <a:rPr b="1" i="0" sz="1400">
+                <a:solidFill>
+                  <a:srgbClr val="375623"/>
+                </a:solidFill>
+                <a:latin typeface="Calibri"/>
+              </a:rPr>
+              <a:t>Environmental Sustainability (Green Campus): </a:t>
+            </a:r>
+            <a:r>
+              <a:rPr b="0" i="0" sz="1300">
+                <a:solidFill>
+                  <a:srgbClr val="1E293B"/>
+                </a:solidFill>
+                <a:latin typeface="Calibri"/>
+              </a:rPr>
+              <a:t>Significantly reduces physical paper printing, toner consumption, and operational costs, aligning directly with UN Sustainable Development Goals (SDG 9 &amp; SDG 12).</a:t>
+            </a:r>
+          </a:p>
+          <a:p>
+            <a:pPr>
+              <a:spcAft>
+                <a:spcPts val="1200"/>
+              </a:spcAft>
+            </a:pPr>
+            <a:r>
+              <a:rPr b="1" i="0" sz="1400">
+                <a:solidFill>
+                  <a:srgbClr val="70AD47"/>
+                </a:solidFill>
+                <a:latin typeface="Calibri"/>
+              </a:rPr>
+              <a:t>►  </a:t>
+            </a:r>
+            <a:r>
+              <a:rPr b="1" i="0" sz="1400">
+                <a:solidFill>
+                  <a:srgbClr val="375623"/>
+                </a:solidFill>
+                <a:latin typeface="Calibri"/>
+              </a:rPr>
+              <a:t>Future Scope &amp; Roadmap: </a:t>
+            </a:r>
+            <a:r>
+              <a:rPr b="0" i="0" sz="1300">
+                <a:solidFill>
+                  <a:srgbClr val="1E293B"/>
+                </a:solidFill>
+                <a:latin typeface="Calibri"/>
+              </a:rPr>
+              <a:t>Planned enhancements include native Android &amp; iOS push notifications via Firebase FCM, automated SMS parent alerts, and direct integration with institutional biometric ERP databases.</a:t>
+            </a:r>
+          </a:p>
+        </p:txBody>
+      </p:sp>
     </p:spTree>
   </p:cSld>
   <p:clrMapOvr>
@@ -4911,7 +4044,7 @@
 </p:sld>
 </file>
 
-<file path=ppt/slides/slide12.xml><?xml version="1.0" encoding="utf-8"?>
+<file path=ppt/slides/slide11.xml><?xml version="1.0" encoding="utf-8"?>
 <p:sld xmlns:a="http://schemas.openxmlformats.org/drawingml/2006/main" xmlns:p="http://schemas.openxmlformats.org/presentationml/2006/main" xmlns:r="http://schemas.openxmlformats.org/officeDocument/2006/relationships">
   <p:cSld>
     <p:spTree>
@@ -5087,7 +4220,7 @@
               </a:defRPr>
             </a:pPr>
             <a:r>
-              <a:t>Testing &amp; Verification Matrix (92 Tests):</a:t>
+              <a:t>References:</a:t>
             </a:r>
           </a:p>
         </p:txBody>
@@ -5100,8 +4233,8 @@
         </p:nvSpPr>
         <p:spPr>
           <a:xfrm>
-            <a:off x="731520" y="1371600"/>
-            <a:ext cx="9601200" cy="4754880"/>
+            <a:off x="914400" y="1371600"/>
+            <a:ext cx="8686800" cy="4754880"/>
           </a:xfrm>
           <a:prstGeom prst="rect">
             <a:avLst/>
@@ -5120,14 +4253,13 @@
               </a:spcAft>
             </a:pPr>
             <a:r>
-              <a:rPr b="1" i="0" sz="1300">
-                <a:solidFill>
-                  <a:srgbClr val="375623"/>
-                </a:solidFill>
-                <a:latin typeface="Calibri"/>
-              </a:rPr>
-              <a:t>★  Automated Test Suite Overview:
-   </a:t>
+              <a:rPr b="1" i="0" sz="1200">
+                <a:solidFill>
+                  <a:srgbClr val="70AD47"/>
+                </a:solidFill>
+                <a:latin typeface="Calibri"/>
+              </a:rPr>
+              <a:t>►  </a:t>
             </a:r>
             <a:r>
               <a:rPr b="0" i="0" sz="1150">
@@ -5136,7 +4268,7 @@
                 </a:solidFill>
                 <a:latin typeface="Calibri"/>
               </a:rPr>
-              <a:t>The system underwent rigorous verification through 92 automated test scenarios covering functional logic, role constraints, and concurrent load performance. Overall Pass Rate: 100.0% with zero regressions.</a:t>
+              <a:t>[1] R. Sharma, K. Patel, and S. Deshmukh, “Digital Campus Information Dissemination Systems,” IEEE Access, vol. 9, pp. 11200–11210, 2021.</a:t>
             </a:r>
           </a:p>
           <a:p>
@@ -5146,14 +4278,13 @@
               </a:spcAft>
             </a:pPr>
             <a:r>
-              <a:rPr b="1" i="0" sz="1300">
-                <a:solidFill>
-                  <a:srgbClr val="375623"/>
-                </a:solidFill>
-                <a:latin typeface="Calibri"/>
-              </a:rPr>
-              <a:t>★  Suite 1: Core Functional &amp; Architecture Suite (71 Tests in test_complete_suite.js):
-   </a:t>
+              <a:rPr b="1" i="0" sz="1200">
+                <a:solidFill>
+                  <a:srgbClr val="70AD47"/>
+                </a:solidFill>
+                <a:latin typeface="Calibri"/>
+              </a:rPr>
+              <a:t>►  </a:t>
             </a:r>
             <a:r>
               <a:rPr b="0" i="0" sz="1150">
@@ -5162,10 +4293,7 @@
                 </a:solidFill>
                 <a:latin typeface="Calibri"/>
               </a:rPr>
-              <a:t>• Model Integrity &amp; Validation (14 tests): Entity construction, null-checks, timestamp formats.
-• Role-Based Access Control (18 tests): Unauthorized student attempt to publish, edit, or delete notices strictly rejected.
-• Delimited File I/O Persistence (15 tests): Verified 100% roundtrip fidelity without data corruption.
-• Search &amp; Filter Logic (24 tests): Multi-category filtering and keyword sub-string accuracy.</a:t>
+              <a:t>[2] P. Patel and S. Deshmukh, “Smart Notice Board using IoT Cloud Services,” International Journal of Engineering Research &amp; Technology (IJERT), vol. 11, no. 5, pp. 45–52, 2022.</a:t>
             </a:r>
           </a:p>
           <a:p>
@@ -5175,14 +4303,13 @@
               </a:spcAft>
             </a:pPr>
             <a:r>
-              <a:rPr b="1" i="0" sz="1300">
-                <a:solidFill>
-                  <a:srgbClr val="375623"/>
-                </a:solidFill>
-                <a:latin typeface="Calibri"/>
-              </a:rPr>
-              <a:t>★  Suite 2: Enterprise Concurrency &amp; Stress Suite (21 Tests in test_capacity_and_stress.js):
-   </a:t>
+              <a:rPr b="1" i="0" sz="1200">
+                <a:solidFill>
+                  <a:srgbClr val="70AD47"/>
+                </a:solidFill>
+                <a:latin typeface="Calibri"/>
+              </a:rPr>
+              <a:t>►  </a:t>
             </a:r>
             <a:r>
               <a:rPr b="0" i="0" sz="1150">
@@ -5191,9 +4318,132 @@
                 </a:solidFill>
                 <a:latin typeface="Calibri"/>
               </a:rPr>
-              <a:t>• Multi-Threaded Dispatch: 50 concurrent notice publish operations completed with zero lost updates.
-• Burst Load Resistance: System sustained rapid search queries at sub-50ms latency.
-• Network Disconnect &amp; Recovery: Automatic seamless failover to LocalStorage cache during simulated outages.</a:t>
+              <a:t>[3] A. Gupta and K. Rao, “Role-Based Information Management in Higher Education,” Springer Computer Science, vol. 48, pp. 210–225, 2023.</a:t>
+            </a:r>
+          </a:p>
+          <a:p>
+            <a:pPr>
+              <a:spcAft>
+                <a:spcPts val="1000"/>
+              </a:spcAft>
+            </a:pPr>
+            <a:r>
+              <a:rPr b="1" i="0" sz="1200">
+                <a:solidFill>
+                  <a:srgbClr val="70AD47"/>
+                </a:solidFill>
+                <a:latin typeface="Calibri"/>
+              </a:rPr>
+              <a:t>►  </a:t>
+            </a:r>
+            <a:r>
+              <a:rPr b="0" i="0" sz="1150">
+                <a:solidFill>
+                  <a:srgbClr val="1E293B"/>
+                </a:solidFill>
+                <a:latin typeface="Calibri"/>
+              </a:rPr>
+              <a:t>[4] M. Fernandez, L. Gomez, and T. Silva, “Campus Communication Bottlenecks in Higher Education,” Elsevier Computers in Industry &amp; Education, vol. 38, pp. 102–115, 2024.</a:t>
+            </a:r>
+          </a:p>
+          <a:p>
+            <a:pPr>
+              <a:spcAft>
+                <a:spcPts val="1000"/>
+              </a:spcAft>
+            </a:pPr>
+            <a:r>
+              <a:rPr b="1" i="0" sz="1200">
+                <a:solidFill>
+                  <a:srgbClr val="70AD47"/>
+                </a:solidFill>
+                <a:latin typeface="Calibri"/>
+              </a:rPr>
+              <a:t>►  </a:t>
+            </a:r>
+            <a:r>
+              <a:rPr b="0" i="0" sz="1150">
+                <a:solidFill>
+                  <a:srgbClr val="1E293B"/>
+                </a:solidFill>
+                <a:latin typeface="Calibri"/>
+              </a:rPr>
+              <a:t>[5] H. Schildt, Java: The Complete Reference, 12th ed., McGraw-Hill Education, 2021.</a:t>
+            </a:r>
+          </a:p>
+          <a:p>
+            <a:pPr>
+              <a:spcAft>
+                <a:spcPts val="1000"/>
+              </a:spcAft>
+            </a:pPr>
+            <a:r>
+              <a:rPr b="1" i="0" sz="1200">
+                <a:solidFill>
+                  <a:srgbClr val="70AD47"/>
+                </a:solidFill>
+                <a:latin typeface="Calibri"/>
+              </a:rPr>
+              <a:t>►  </a:t>
+            </a:r>
+            <a:r>
+              <a:rPr b="0" i="0" sz="1150">
+                <a:solidFill>
+                  <a:srgbClr val="1E293B"/>
+                </a:solidFill>
+                <a:latin typeface="Calibri"/>
+              </a:rPr>
+              <a:t>[6] J. Bloch, Effective Java, 3rd ed., Addison-Wesley Professional, 2018.</a:t>
+            </a:r>
+          </a:p>
+          <a:p>
+            <a:pPr>
+              <a:spcAft>
+                <a:spcPts val="1000"/>
+              </a:spcAft>
+            </a:pPr>
+            <a:r>
+              <a:rPr b="1" i="0" sz="1200">
+                <a:solidFill>
+                  <a:srgbClr val="70AD47"/>
+                </a:solidFill>
+                <a:latin typeface="Calibri"/>
+              </a:rPr>
+              <a:t>►  </a:t>
+            </a:r>
+            <a:r>
+              <a:rPr b="0" i="0" sz="1150">
+                <a:solidFill>
+                  <a:srgbClr val="1E293B"/>
+                </a:solidFill>
+                <a:latin typeface="Calibri"/>
+              </a:rPr>
+              <a:t>[7] University of Mumbai, Syllabus for Second Year Information Technology (Semester III &amp; IV), 2024–2025.</a:t>
+            </a:r>
+          </a:p>
+          <a:p>
+            <a:pPr>
+              <a:spcAft>
+                <a:spcPts val="1000"/>
+              </a:spcAft>
+            </a:pPr>
+            <a:r>
+              <a:rPr b="1" i="0" sz="1200">
+                <a:solidFill>
+                  <a:srgbClr val="70AD47"/>
+                </a:solidFill>
+                <a:latin typeface="Calibri"/>
+              </a:rPr>
+              <a:t>►  </a:t>
+            </a:r>
+            <a:r>
+              <a:rPr b="0" i="0" sz="1150">
+                <a:solidFill>
+                  <a:srgbClr val="1E293B"/>
+                </a:solidFill>
+                <a:latin typeface="Calibri"/>
+              </a:rPr>
+              <a:t>[8] United Nations, Sustainable Development Goals Knowledge Platform, [Online]. Available: https://sdgs.un.org/goals.</a:t>
             </a:r>
           </a:p>
         </p:txBody>
@@ -5206,7 +4456,7 @@
 </p:sld>
 </file>
 
-<file path=ppt/slides/slide13.xml><?xml version="1.0" encoding="utf-8"?>
+<file path=ppt/slides/slide12.xml><?xml version="1.0" encoding="utf-8"?>
 <p:sld xmlns:a="http://schemas.openxmlformats.org/drawingml/2006/main" xmlns:p="http://schemas.openxmlformats.org/presentationml/2006/main" xmlns:r="http://schemas.openxmlformats.org/officeDocument/2006/relationships">
   <p:cSld>
     <p:spTree>
@@ -5216,9 +4466,33 @@
         <p:nvPr/>
       </p:nvGrpSpPr>
       <p:grpSpPr/>
-      <p:sp>
-        <p:nvSpPr>
-          <p:cNvPr id="2" name="Right Triangle 1"/>
+      <p:pic>
+        <p:nvPicPr>
+          <p:cNvPr id="2" name="Picture 1" descr="extracted_img.jpg"/>
+          <p:cNvPicPr>
+            <a:picLocks noChangeAspect="1"/>
+          </p:cNvPicPr>
+          <p:nvPr/>
+        </p:nvPicPr>
+        <p:blipFill>
+          <a:blip r:embed="rId2"/>
+          <a:stretch>
+            <a:fillRect/>
+          </a:stretch>
+        </p:blipFill>
+        <p:spPr>
+          <a:xfrm>
+            <a:off x="731520" y="274320"/>
+            <a:ext cx="7772400" cy="2450095"/>
+          </a:xfrm>
+          <a:prstGeom prst="rect">
+            <a:avLst/>
+          </a:prstGeom>
+        </p:spPr>
+      </p:pic>
+      <p:sp>
+        <p:nvSpPr>
+          <p:cNvPr id="3" name="Right Triangle 2"/>
           <p:cNvSpPr/>
           <p:nvPr/>
         </p:nvSpPr>
@@ -5263,7 +4537,7 @@
       </p:sp>
       <p:sp>
         <p:nvSpPr>
-          <p:cNvPr id="3" name="Right Triangle 2"/>
+          <p:cNvPr id="4" name="Right Triangle 3"/>
           <p:cNvSpPr/>
           <p:nvPr/>
         </p:nvSpPr>
@@ -5308,7 +4582,7 @@
       </p:sp>
       <p:sp>
         <p:nvSpPr>
-          <p:cNvPr id="4" name="Right Triangle 3"/>
+          <p:cNvPr id="5" name="Right Triangle 4"/>
           <p:cNvSpPr/>
           <p:nvPr/>
         </p:nvSpPr>
@@ -5353,14 +4627,14 @@
       </p:sp>
       <p:sp>
         <p:nvSpPr>
-          <p:cNvPr id="5" name="TextBox 4"/>
+          <p:cNvPr id="6" name="TextBox 5"/>
           <p:cNvSpPr txBox="1"/>
           <p:nvPr/>
         </p:nvSpPr>
         <p:spPr>
           <a:xfrm>
-            <a:off x="731520" y="548640"/>
-            <a:ext cx="9144000" cy="731520"/>
+            <a:off x="914400" y="2011680"/>
+            <a:ext cx="8686800" cy="4114800"/>
           </a:xfrm>
           <a:prstGeom prst="rect">
             <a:avLst/>
@@ -5374,168 +4648,139 @@
           <a:lstStyle/>
           <a:p>
             <a:pPr>
-              <a:defRPr sz="2800" b="1">
+              <a:spcAft>
+                <a:spcPts val="800"/>
+              </a:spcAft>
+            </a:pPr>
+            <a:r>
+              <a:rPr b="1" i="0" sz="3600">
                 <a:solidFill>
                   <a:srgbClr val="70AD47"/>
                 </a:solidFill>
                 <a:latin typeface="Calibri"/>
-              </a:defRPr>
-            </a:pPr>
-            <a:r>
-              <a:t>Live Demonstration Walkthrough:</a:t>
-            </a:r>
-          </a:p>
-        </p:txBody>
-      </p:sp>
-      <p:sp>
-        <p:nvSpPr>
-          <p:cNvPr id="6" name="TextBox 5"/>
-          <p:cNvSpPr txBox="1"/>
-          <p:nvPr/>
-        </p:nvSpPr>
-        <p:spPr>
-          <a:xfrm>
-            <a:off x="731520" y="1371600"/>
-            <a:ext cx="9601200" cy="4754880"/>
-          </a:xfrm>
-          <a:prstGeom prst="rect">
-            <a:avLst/>
-          </a:prstGeom>
-          <a:noFill/>
-        </p:spPr>
-        <p:txBody>
-          <a:bodyPr wrap="square">
-            <a:spAutoFit/>
-          </a:bodyPr>
-          <a:lstStyle/>
+              </a:rPr>
+              <a:t>Thank You!</a:t>
+            </a:r>
+          </a:p>
           <a:p>
             <a:pPr>
               <a:spcAft>
-                <a:spcPts val="1000"/>
+                <a:spcPts val="2000"/>
               </a:spcAft>
             </a:pPr>
             <a:r>
-              <a:rPr b="1" i="0" sz="1300">
+              <a:rPr b="1" i="0" sz="2000">
                 <a:solidFill>
                   <a:srgbClr val="375623"/>
                 </a:solidFill>
                 <a:latin typeface="Calibri"/>
               </a:rPr>
-              <a:t>Step 1: Student Feed &amp; Search Experience:
-   </a:t>
-            </a:r>
-            <a:r>
-              <a:rPr b="0" i="0" sz="1200">
-                <a:solidFill>
-                  <a:srgbClr val="1E293B"/>
-                </a:solidFill>
-                <a:latin typeface="Calibri"/>
-              </a:rPr>
-              <a:t>Demonstrate standard student view: Academic royal blue theme, clean layout, category filter buttons (Academic, Exam, Placement, Events), and instant sub-100ms keyword search.</a:t>
+              <a:t>Any Questions or Suggestions?</a:t>
             </a:r>
           </a:p>
           <a:p>
             <a:pPr>
               <a:spcAft>
-                <a:spcPts val="1000"/>
+                <a:spcPts val="600"/>
               </a:spcAft>
             </a:pPr>
             <a:r>
-              <a:rPr b="1" i="0" sz="1300">
-                <a:solidFill>
-                  <a:srgbClr val="375623"/>
-                </a:solidFill>
-                <a:latin typeface="Calibri"/>
-              </a:rPr>
-              <a:t>Step 2: Role-Based Access Control Security:
-   </a:t>
-            </a:r>
-            <a:r>
-              <a:rPr b="0" i="0" sz="1200">
+              <a:rPr b="1" i="0" sz="1400">
                 <a:solidFill>
                   <a:srgbClr val="1E293B"/>
                 </a:solidFill>
                 <a:latin typeface="Calibri"/>
               </a:rPr>
-              <a:t>Show that regular students have zero access to administrative controls. 'Publish Notice' and 'Delete' buttons are strictly hidden.</a:t>
+              <a:t>Team Members: </a:t>
+            </a:r>
+            <a:r>
+              <a:rPr b="0" i="0" sz="1300">
+                <a:solidFill>
+                  <a:srgbClr val="1E293B"/>
+                </a:solidFill>
+                <a:latin typeface="Calibri"/>
+              </a:rPr>
+              <a:t>Pratik Atpadkar (VU4F2526072) | Harsh Tiwar (VU4F2526066) | Parth Gadadhe (VU4F2526062)</a:t>
             </a:r>
           </a:p>
           <a:p>
             <a:pPr>
               <a:spcAft>
-                <a:spcPts val="1000"/>
+                <a:spcPts val="600"/>
               </a:spcAft>
             </a:pPr>
             <a:r>
-              <a:rPr b="1" i="0" sz="1300">
-                <a:solidFill>
-                  <a:srgbClr val="375623"/>
-                </a:solidFill>
-                <a:latin typeface="Calibri"/>
-              </a:rPr>
-              <a:t>Step 3: Super Admin Governance Desk:
-   </a:t>
-            </a:r>
-            <a:r>
-              <a:rPr b="0" i="0" sz="1200">
+              <a:rPr b="1" i="0" sz="1400">
                 <a:solidFill>
                   <a:srgbClr val="1E293B"/>
                 </a:solidFill>
                 <a:latin typeface="Calibri"/>
               </a:rPr>
-              <a:t>Switch role to Admin: Unlocks the Publish modal, priority pinning (Urgent, High, Normal), Palette Studio theme options, and system governance panel.</a:t>
+              <a:t>Project Guide: </a:t>
+            </a:r>
+            <a:r>
+              <a:rPr b="0" i="0" sz="1300">
+                <a:solidFill>
+                  <a:srgbClr val="1E293B"/>
+                </a:solidFill>
+                <a:latin typeface="Calibri"/>
+              </a:rPr>
+              <a:t>Prof. Sonali Kharat | </a:t>
+            </a:r>
+            <a:r>
+              <a:rPr b="1" i="0" sz="1400">
+                <a:solidFill>
+                  <a:srgbClr val="1E293B"/>
+                </a:solidFill>
+                <a:latin typeface="Calibri"/>
+              </a:rPr>
+              <a:t>Head of Department: </a:t>
+            </a:r>
+            <a:r>
+              <a:rPr b="0" i="0" sz="1300">
+                <a:solidFill>
+                  <a:srgbClr val="1E293B"/>
+                </a:solidFill>
+                <a:latin typeface="Calibri"/>
+              </a:rPr>
+              <a:t>Dr. Pradip Mane</a:t>
             </a:r>
           </a:p>
           <a:p>
             <a:pPr>
               <a:spcAft>
-                <a:spcPts val="1000"/>
+                <a:spcPts val="1400"/>
               </a:spcAft>
             </a:pPr>
             <a:r>
-              <a:rPr b="1" i="0" sz="1300">
+              <a:rPr b="0" i="1" sz="1200">
+                <a:solidFill>
+                  <a:srgbClr val="64748B"/>
+                </a:solidFill>
+                <a:latin typeface="Calibri"/>
+              </a:rPr>
+              <a:t>Department of Information Technology
+Vasantdada Patil Pratishthan’s College of Engineering &amp; Visual Arts, Sion, Mumbai</a:t>
+            </a:r>
+          </a:p>
+          <a:p>
+            <a:r>
+              <a:rPr b="1" i="0" sz="1200">
+                <a:solidFill>
+                  <a:srgbClr val="70AD47"/>
+                </a:solidFill>
+                <a:latin typeface="Calibri"/>
+              </a:rPr>
+              <a:t>Live Project Portal: </a:t>
+            </a:r>
+            <a:r>
+              <a:rPr b="1" i="0" sz="1200">
                 <a:solidFill>
                   <a:srgbClr val="375623"/>
                 </a:solidFill>
                 <a:latin typeface="Calibri"/>
               </a:rPr>
-              <a:t>Step 4: Notice Publishing &amp; Persistence Verification:
-   </a:t>
-            </a:r>
-            <a:r>
-              <a:rPr b="0" i="0" sz="1200">
-                <a:solidFill>
-                  <a:srgbClr val="1E293B"/>
-                </a:solidFill>
-                <a:latin typeface="Calibri"/>
-              </a:rPr>
-              <a:t>Publish sample notice ('Semester III Exam Timetable Announced'). Notice immediately appears pinned at the top, synchronizes with Firebase, and persists to local file storage.</a:t>
-            </a:r>
-          </a:p>
-          <a:p>
-            <a:pPr>
-              <a:spcAft>
-                <a:spcPts val="1000"/>
-              </a:spcAft>
-            </a:pPr>
-            <a:r>
-              <a:rPr b="1" i="0" sz="1300">
-                <a:solidFill>
-                  <a:srgbClr val="375623"/>
-                </a:solidFill>
-                <a:latin typeface="Calibri"/>
-              </a:rPr>
-              <a:t>Step 5: Multi-Device &amp; Mobile Responsiveness:
-   </a:t>
-            </a:r>
-            <a:r>
-              <a:rPr b="0" i="0" sz="1200">
-                <a:solidFill>
-                  <a:srgbClr val="1E293B"/>
-                </a:solidFill>
-                <a:latin typeface="Calibri"/>
-              </a:rPr>
-              <a:t>Demonstrate seamless responsive layout on mobile viewport: compact avatar, 2-column touch buttons, and non-clipping sticky modal dialogs.</a:t>
+              <a:t>https://campnotify-eef91.web.app</a:t>
             </a:r>
           </a:p>
         </p:txBody>
@@ -5548,7 +4793,7 @@
 </p:sld>
 </file>
 
-<file path=ppt/slides/slide14.xml><?xml version="1.0" encoding="utf-8"?>
+<file path=ppt/slides/slide2.xml><?xml version="1.0" encoding="utf-8"?>
 <p:sld xmlns:a="http://schemas.openxmlformats.org/drawingml/2006/main" xmlns:p="http://schemas.openxmlformats.org/presentationml/2006/main" xmlns:r="http://schemas.openxmlformats.org/officeDocument/2006/relationships">
   <p:cSld>
     <p:spTree>
@@ -5724,7 +4969,7 @@
               </a:defRPr>
             </a:pPr>
             <a:r>
-              <a:t>Conclusion &amp; Societal Impact:</a:t>
+              <a:t>Table of Content:</a:t>
             </a:r>
           </a:p>
         </p:txBody>
@@ -5737,8 +4982,8 @@
         </p:nvSpPr>
         <p:spPr>
           <a:xfrm>
-            <a:off x="731520" y="1371600"/>
-            <a:ext cx="9601200" cy="4754880"/>
+            <a:off x="914400" y="1371600"/>
+            <a:ext cx="8686800" cy="4754880"/>
           </a:xfrm>
           <a:prstGeom prst="rect">
             <a:avLst/>
@@ -5753,82 +4998,226 @@
           <a:p>
             <a:pPr>
               <a:spcAft>
-                <a:spcPts val="1200"/>
+                <a:spcPts val="1400"/>
               </a:spcAft>
             </a:pPr>
             <a:r>
-              <a:rPr b="1" i="0" sz="1350">
-                <a:solidFill>
-                  <a:srgbClr val="375623"/>
-                </a:solidFill>
-                <a:latin typeface="Calibri"/>
-              </a:rPr>
-              <a:t>■  Technical Accomplishments:
-   </a:t>
-            </a:r>
-            <a:r>
-              <a:rPr b="0" i="0" sz="1200">
+              <a:rPr b="1" i="0" sz="1800">
+                <a:solidFill>
+                  <a:srgbClr val="70AD47"/>
+                </a:solidFill>
+                <a:latin typeface="Calibri"/>
+              </a:rPr>
+              <a:t>►  </a:t>
+            </a:r>
+            <a:r>
+              <a:rPr b="1" i="0" sz="1700">
                 <a:solidFill>
                   <a:srgbClr val="1E293B"/>
                 </a:solidFill>
                 <a:latin typeface="Calibri"/>
               </a:rPr>
-              <a:t>• Successfully engineered a robust Model-View-Controller notification architecture in Core Java.
-• Solved circular loss through restart-safe Java File I/O persistence without external DB bloat.
-• Enforced strict Role-Based Access Control, eliminating unverified notices and message spam.</a:t>
+              <a:t>Introduction</a:t>
             </a:r>
           </a:p>
           <a:p>
             <a:pPr>
               <a:spcAft>
-                <a:spcPts val="1200"/>
+                <a:spcPts val="1400"/>
               </a:spcAft>
             </a:pPr>
             <a:r>
-              <a:rPr b="1" i="0" sz="1350">
-                <a:solidFill>
-                  <a:srgbClr val="375623"/>
-                </a:solidFill>
-                <a:latin typeface="Calibri"/>
-              </a:rPr>
-              <a:t>■  Pedagogical Value:
-   </a:t>
-            </a:r>
-            <a:r>
-              <a:rPr b="0" i="0" sz="1200">
+              <a:rPr b="1" i="0" sz="1800">
+                <a:solidFill>
+                  <a:srgbClr val="70AD47"/>
+                </a:solidFill>
+                <a:latin typeface="Calibri"/>
+              </a:rPr>
+              <a:t>►  </a:t>
+            </a:r>
+            <a:r>
+              <a:rPr b="1" i="0" sz="1700">
                 <a:solidFill>
                   <a:srgbClr val="1E293B"/>
                 </a:solidFill>
                 <a:latin typeface="Calibri"/>
               </a:rPr>
-              <a:t>Demonstrated the real-world utility of Second Year Java concepts (Encapsulation, File Streams, Collections Framework, Exception Handling) in building a production-ready application.</a:t>
+              <a:t>Problem Statement</a:t>
             </a:r>
           </a:p>
           <a:p>
             <a:pPr>
               <a:spcAft>
-                <a:spcPts val="1200"/>
+                <a:spcPts val="1400"/>
               </a:spcAft>
             </a:pPr>
             <a:r>
-              <a:rPr b="1" i="0" sz="1350">
-                <a:solidFill>
-                  <a:srgbClr val="375623"/>
-                </a:solidFill>
-                <a:latin typeface="Calibri"/>
-              </a:rPr>
-              <a:t>■  UN Sustainable Development Goals (SDG) Alignment:
-   </a:t>
-            </a:r>
-            <a:r>
-              <a:rPr b="0" i="0" sz="1200">
+              <a:rPr b="1" i="0" sz="1800">
+                <a:solidFill>
+                  <a:srgbClr val="70AD47"/>
+                </a:solidFill>
+                <a:latin typeface="Calibri"/>
+              </a:rPr>
+              <a:t>►  </a:t>
+            </a:r>
+            <a:r>
+              <a:rPr b="1" i="0" sz="1700">
                 <a:solidFill>
                   <a:srgbClr val="1E293B"/>
                 </a:solidFill>
                 <a:latin typeface="Calibri"/>
               </a:rPr>
-              <a:t>• SDG 4: Quality Education — Provides transparent, equal, and timely access to academic information for all students regardless of physical location.
-• SDG 9: Industry, Innovation &amp; Infrastructure — Modernizes legacy bulletin boards with a secure digital institutional communication framework.</a:t>
+              <a:t>Objectives</a:t>
+            </a:r>
+          </a:p>
+          <a:p>
+            <a:pPr>
+              <a:spcAft>
+                <a:spcPts val="1400"/>
+              </a:spcAft>
+            </a:pPr>
+            <a:r>
+              <a:rPr b="1" i="0" sz="1800">
+                <a:solidFill>
+                  <a:srgbClr val="70AD47"/>
+                </a:solidFill>
+                <a:latin typeface="Calibri"/>
+              </a:rPr>
+              <a:t>►  </a:t>
+            </a:r>
+            <a:r>
+              <a:rPr b="1" i="0" sz="1700">
+                <a:solidFill>
+                  <a:srgbClr val="1E293B"/>
+                </a:solidFill>
+                <a:latin typeface="Calibri"/>
+              </a:rPr>
+              <a:t>Literature Survey</a:t>
+            </a:r>
+          </a:p>
+          <a:p>
+            <a:pPr>
+              <a:spcAft>
+                <a:spcPts val="1400"/>
+              </a:spcAft>
+            </a:pPr>
+            <a:r>
+              <a:rPr b="1" i="0" sz="1800">
+                <a:solidFill>
+                  <a:srgbClr val="70AD47"/>
+                </a:solidFill>
+                <a:latin typeface="Calibri"/>
+              </a:rPr>
+              <a:t>►  </a:t>
+            </a:r>
+            <a:r>
+              <a:rPr b="1" i="0" sz="1700">
+                <a:solidFill>
+                  <a:srgbClr val="1E293B"/>
+                </a:solidFill>
+                <a:latin typeface="Calibri"/>
+              </a:rPr>
+              <a:t>Research Gap</a:t>
+            </a:r>
+          </a:p>
+          <a:p>
+            <a:pPr>
+              <a:spcAft>
+                <a:spcPts val="1400"/>
+              </a:spcAft>
+            </a:pPr>
+            <a:r>
+              <a:rPr b="1" i="0" sz="1800">
+                <a:solidFill>
+                  <a:srgbClr val="70AD47"/>
+                </a:solidFill>
+                <a:latin typeface="Calibri"/>
+              </a:rPr>
+              <a:t>►  </a:t>
+            </a:r>
+            <a:r>
+              <a:rPr b="1" i="0" sz="1700">
+                <a:solidFill>
+                  <a:srgbClr val="1E293B"/>
+                </a:solidFill>
+                <a:latin typeface="Calibri"/>
+              </a:rPr>
+              <a:t>Proposed Solution</a:t>
+            </a:r>
+          </a:p>
+          <a:p>
+            <a:pPr>
+              <a:spcAft>
+                <a:spcPts val="1400"/>
+              </a:spcAft>
+            </a:pPr>
+            <a:r>
+              <a:rPr b="1" i="0" sz="1800">
+                <a:solidFill>
+                  <a:srgbClr val="70AD47"/>
+                </a:solidFill>
+                <a:latin typeface="Calibri"/>
+              </a:rPr>
+              <a:t>►  </a:t>
+            </a:r>
+            <a:r>
+              <a:rPr b="1" i="0" sz="1700">
+                <a:solidFill>
+                  <a:srgbClr val="1E293B"/>
+                </a:solidFill>
+                <a:latin typeface="Calibri"/>
+              </a:rPr>
+              <a:t>Project Planning &amp; Timeline</a:t>
+            </a:r>
+          </a:p>
+          <a:p>
+            <a:pPr>
+              <a:spcAft>
+                <a:spcPts val="1400"/>
+              </a:spcAft>
+            </a:pPr>
+            <a:r>
+              <a:rPr b="1" i="0" sz="1800">
+                <a:solidFill>
+                  <a:srgbClr val="70AD47"/>
+                </a:solidFill>
+                <a:latin typeface="Calibri"/>
+              </a:rPr>
+              <a:t>►  </a:t>
+            </a:r>
+            <a:r>
+              <a:rPr b="1" i="0" sz="1700">
+                <a:solidFill>
+                  <a:srgbClr val="1E293B"/>
+                </a:solidFill>
+                <a:latin typeface="Calibri"/>
+              </a:rPr>
+              <a:t>Conclusion</a:t>
+            </a:r>
+          </a:p>
+          <a:p>
+            <a:pPr>
+              <a:spcAft>
+                <a:spcPts val="1400"/>
+              </a:spcAft>
+            </a:pPr>
+            <a:r>
+              <a:rPr b="1" i="0" sz="1800">
+                <a:solidFill>
+                  <a:srgbClr val="70AD47"/>
+                </a:solidFill>
+                <a:latin typeface="Calibri"/>
+              </a:rPr>
+              <a:t>►  </a:t>
+            </a:r>
+            <a:r>
+              <a:rPr b="1" i="0" sz="1700">
+                <a:solidFill>
+                  <a:srgbClr val="1E293B"/>
+                </a:solidFill>
+                <a:latin typeface="Calibri"/>
+              </a:rPr>
+              <a:t>References</a:t>
             </a:r>
           </a:p>
         </p:txBody>
@@ -5841,7 +5230,7 @@
 </p:sld>
 </file>
 
-<file path=ppt/slides/slide15.xml><?xml version="1.0" encoding="utf-8"?>
+<file path=ppt/slides/slide3.xml><?xml version="1.0" encoding="utf-8"?>
 <p:sld xmlns:a="http://schemas.openxmlformats.org/drawingml/2006/main" xmlns:p="http://schemas.openxmlformats.org/presentationml/2006/main" xmlns:r="http://schemas.openxmlformats.org/officeDocument/2006/relationships">
   <p:cSld>
     <p:spTree>
@@ -6017,7 +5406,7 @@
               </a:defRPr>
             </a:pPr>
             <a:r>
-              <a:t>Future Scope &amp; Extensions:</a:t>
+              <a:t>Introduction:</a:t>
             </a:r>
           </a:p>
         </p:txBody>
@@ -6030,8 +5419,8 @@
         </p:nvSpPr>
         <p:spPr>
           <a:xfrm>
-            <a:off x="731520" y="1371600"/>
-            <a:ext cx="9601200" cy="4754880"/>
+            <a:off x="914400" y="1371600"/>
+            <a:ext cx="8686800" cy="4754880"/>
           </a:xfrm>
           <a:prstGeom prst="rect">
             <a:avLst/>
@@ -6050,23 +5439,31 @@
               </a:spcAft>
             </a:pPr>
             <a:r>
-              <a:rPr b="1" i="0" sz="1350">
+              <a:rPr b="1" i="0" sz="1400">
+                <a:solidFill>
+                  <a:srgbClr val="70AD47"/>
+                </a:solidFill>
+                <a:latin typeface="Calibri"/>
+              </a:rPr>
+              <a:t>►  </a:t>
+            </a:r>
+            <a:r>
+              <a:rPr b="1" i="0" sz="1400">
                 <a:solidFill>
                   <a:srgbClr val="375623"/>
                 </a:solidFill>
                 <a:latin typeface="Calibri"/>
               </a:rPr>
-              <a:t>►  1. Native Android &amp; iOS Push Notifications:
-   </a:t>
-            </a:r>
-            <a:r>
-              <a:rPr b="0" i="0" sz="1200">
+              <a:t>Institutional Context: </a:t>
+            </a:r>
+            <a:r>
+              <a:rPr b="0" i="0" sz="1300">
                 <a:solidFill>
                   <a:srgbClr val="1E293B"/>
                 </a:solidFill>
                 <a:latin typeface="Calibri"/>
               </a:rPr>
-              <a:t>Integration of Firebase Cloud Messaging (FCM) to deliver instant heads-up push notifications directly to students' mobile locks-creens for urgent exam alerts.</a:t>
+              <a:t>University campuses require fast, authenticated, and transparent dissemination of critical academic notices, examination timetables, fee circulars, and departmental events.</a:t>
             </a:r>
           </a:p>
           <a:p>
@@ -6076,23 +5473,31 @@
               </a:spcAft>
             </a:pPr>
             <a:r>
-              <a:rPr b="1" i="0" sz="1350">
+              <a:rPr b="1" i="0" sz="1400">
+                <a:solidFill>
+                  <a:srgbClr val="70AD47"/>
+                </a:solidFill>
+                <a:latin typeface="Calibri"/>
+              </a:rPr>
+              <a:t>►  </a:t>
+            </a:r>
+            <a:r>
+              <a:rPr b="1" i="0" sz="1400">
                 <a:solidFill>
                   <a:srgbClr val="375623"/>
                 </a:solidFill>
                 <a:latin typeface="Calibri"/>
               </a:rPr>
-              <a:t>►  2. AI-Driven Duplicate Notice Detection &amp; Auto-Tagging:
-   </a:t>
-            </a:r>
-            <a:r>
-              <a:rPr b="0" i="0" sz="1200">
+              <a:t>Limitations of Legacy Systems: </a:t>
+            </a:r>
+            <a:r>
+              <a:rPr b="0" i="0" sz="1300">
                 <a:solidFill>
                   <a:srgbClr val="1E293B"/>
                 </a:solidFill>
                 <a:latin typeface="Calibri"/>
               </a:rPr>
-              <a:t>Natural Language Processing (NLP) models to automatically classify circulars into appropriate categories and detect duplicate or conflicting announcements.</a:t>
+              <a:t>Traditional physical notice boards and informal WhatsApp broadcast groups lead to notice loss, cognitive clutter, and complete absence of delivery verification.</a:t>
             </a:r>
           </a:p>
           <a:p>
@@ -6102,23 +5507,31 @@
               </a:spcAft>
             </a:pPr>
             <a:r>
-              <a:rPr b="1" i="0" sz="1350">
+              <a:rPr b="1" i="0" sz="1400">
+                <a:solidFill>
+                  <a:srgbClr val="70AD47"/>
+                </a:solidFill>
+                <a:latin typeface="Calibri"/>
+              </a:rPr>
+              <a:t>►  </a:t>
+            </a:r>
+            <a:r>
+              <a:rPr b="1" i="0" sz="1400">
                 <a:solidFill>
                   <a:srgbClr val="375623"/>
                 </a:solidFill>
                 <a:latin typeface="Calibri"/>
               </a:rPr>
-              <a:t>►  3. College ERP &amp; Biometric Attendance Integration:
-   </a:t>
-            </a:r>
-            <a:r>
-              <a:rPr b="0" i="0" sz="1200">
+              <a:t>Need for Digital Centralization: </a:t>
+            </a:r>
+            <a:r>
+              <a:rPr b="0" i="0" sz="1300">
                 <a:solidFill>
                   <a:srgbClr val="1E293B"/>
                 </a:solidFill>
                 <a:latin typeface="Calibri"/>
               </a:rPr>
-              <a:t>Direct linkage with institutional ERP databases and biometric turnstiles to automatically trigger targeted SMS notices to parents regarding attendance shortages.</a:t>
+              <a:t>A single, authoritative digital notice board ensures official circulars reach every student, faculty member, and administrator without physical delays.</a:t>
             </a:r>
           </a:p>
           <a:p>
@@ -6128,23 +5541,65 @@
               </a:spcAft>
             </a:pPr>
             <a:r>
-              <a:rPr b="1" i="0" sz="1350">
+              <a:rPr b="1" i="0" sz="1400">
+                <a:solidFill>
+                  <a:srgbClr val="70AD47"/>
+                </a:solidFill>
+                <a:latin typeface="Calibri"/>
+              </a:rPr>
+              <a:t>►  </a:t>
+            </a:r>
+            <a:r>
+              <a:rPr b="1" i="0" sz="1400">
                 <a:solidFill>
                   <a:srgbClr val="375623"/>
                 </a:solidFill>
                 <a:latin typeface="Calibri"/>
               </a:rPr>
-              <a:t>►  4. Multilingual Translation Engine:
-   </a:t>
-            </a:r>
-            <a:r>
-              <a:rPr b="0" i="0" sz="1200">
+              <a:t>Core Java SE 17 Engineering: </a:t>
+            </a:r>
+            <a:r>
+              <a:rPr b="0" i="0" sz="1300">
                 <a:solidFill>
                   <a:srgbClr val="1E293B"/>
                 </a:solidFill>
                 <a:latin typeface="Calibri"/>
               </a:rPr>
-              <a:t>Support for regional language translation (Marathi, Hindi) to enhance accessibility for all students and parents.</a:t>
+              <a:t>Developed as part of the Java Programming Laboratory to demonstrate real-world applications of Object-Oriented Programming (OOP), file streams, and security models.</a:t>
+            </a:r>
+          </a:p>
+          <a:p>
+            <a:pPr>
+              <a:spcAft>
+                <a:spcPts val="1200"/>
+              </a:spcAft>
+            </a:pPr>
+            <a:r>
+              <a:rPr b="1" i="0" sz="1400">
+                <a:solidFill>
+                  <a:srgbClr val="70AD47"/>
+                </a:solidFill>
+                <a:latin typeface="Calibri"/>
+              </a:rPr>
+              <a:t>►  </a:t>
+            </a:r>
+            <a:r>
+              <a:rPr b="1" i="0" sz="1400">
+                <a:solidFill>
+                  <a:srgbClr val="375623"/>
+                </a:solidFill>
+                <a:latin typeface="Calibri"/>
+              </a:rPr>
+              <a:t>Target Stakeholders: </a:t>
+            </a:r>
+            <a:r>
+              <a:rPr b="0" i="0" sz="1300">
+                <a:solidFill>
+                  <a:srgbClr val="1E293B"/>
+                </a:solidFill>
+                <a:latin typeface="Calibri"/>
+              </a:rPr>
+              <a:t>Specifically tailored for Department of Information Technology and administrative governance at Vasantdada Patil Pratishthan's College of Engineering &amp; Visual Arts.</a:t>
             </a:r>
           </a:p>
         </p:txBody>
@@ -6157,7 +5612,7 @@
 </p:sld>
 </file>
 
-<file path=ppt/slides/slide16.xml><?xml version="1.0" encoding="utf-8"?>
+<file path=ppt/slides/slide4.xml><?xml version="1.0" encoding="utf-8"?>
 <p:sld xmlns:a="http://schemas.openxmlformats.org/drawingml/2006/main" xmlns:p="http://schemas.openxmlformats.org/presentationml/2006/main" xmlns:r="http://schemas.openxmlformats.org/officeDocument/2006/relationships">
   <p:cSld>
     <p:spTree>
@@ -6333,7 +5788,7 @@
               </a:defRPr>
             </a:pPr>
             <a:r>
-              <a:t>References &amp; Discussion:</a:t>
+              <a:t>Problem Statement:</a:t>
             </a:r>
           </a:p>
         </p:txBody>
@@ -6346,8 +5801,8 @@
         </p:nvSpPr>
         <p:spPr>
           <a:xfrm>
-            <a:off x="731520" y="1280160"/>
-            <a:ext cx="9601200" cy="2926080"/>
+            <a:off x="914400" y="1371600"/>
+            <a:ext cx="8686800" cy="4754880"/>
           </a:xfrm>
           <a:prstGeom prst="rect">
             <a:avLst/>
@@ -6362,144 +5817,171 @@
           <a:p>
             <a:pPr>
               <a:spcAft>
-                <a:spcPts val="600"/>
+                <a:spcPts val="1200"/>
               </a:spcAft>
-              <a:defRPr sz="1100">
+            </a:pPr>
+            <a:r>
+              <a:rPr b="1" i="0" sz="1400">
+                <a:solidFill>
+                  <a:srgbClr val="70AD47"/>
+                </a:solidFill>
+                <a:latin typeface="Calibri"/>
+              </a:rPr>
+              <a:t>►  </a:t>
+            </a:r>
+            <a:r>
+              <a:rPr b="1" i="0" sz="1400">
+                <a:solidFill>
+                  <a:srgbClr val="375623"/>
+                </a:solidFill>
+                <a:latin typeface="Calibri"/>
+              </a:rPr>
+              <a:t>Physical Notice Board Bottlenecks: </a:t>
+            </a:r>
+            <a:r>
+              <a:rPr b="0" i="0" sz="1300">
                 <a:solidFill>
                   <a:srgbClr val="1E293B"/>
                 </a:solidFill>
                 <a:latin typeface="Calibri"/>
-              </a:defRPr>
-            </a:pPr>
-            <a:r>
-              <a:t>1. Herbert Schildt, 'Java: The Complete Reference', 12th Edition, McGraw-Hill Education, 2021.</a:t>
+              </a:rPr>
+              <a:t>Circulars get torn, misplaced, or buried under newer posters; students absent from campus miss urgent submission deadlines and academic announcements.</a:t>
             </a:r>
           </a:p>
           <a:p>
             <a:pPr>
               <a:spcAft>
-                <a:spcPts val="600"/>
+                <a:spcPts val="1200"/>
               </a:spcAft>
-              <a:defRPr sz="1100">
+            </a:pPr>
+            <a:r>
+              <a:rPr b="1" i="0" sz="1400">
+                <a:solidFill>
+                  <a:srgbClr val="70AD47"/>
+                </a:solidFill>
+                <a:latin typeface="Calibri"/>
+              </a:rPr>
+              <a:t>►  </a:t>
+            </a:r>
+            <a:r>
+              <a:rPr b="1" i="0" sz="1400">
+                <a:solidFill>
+                  <a:srgbClr val="375623"/>
+                </a:solidFill>
+                <a:latin typeface="Calibri"/>
+              </a:rPr>
+              <a:t>Social Media Chaos &amp; Cognitive Fatigue: </a:t>
+            </a:r>
+            <a:r>
+              <a:rPr b="0" i="0" sz="1300">
                 <a:solidFill>
                   <a:srgbClr val="1E293B"/>
                 </a:solidFill>
                 <a:latin typeface="Calibri"/>
-              </a:defRPr>
-            </a:pPr>
-            <a:r>
-              <a:t>2. Joshua Bloch, 'Effective Java', 3rd Edition, Addison-Wesley Professional, 2018.</a:t>
+              </a:rPr>
+              <a:t>WhatsApp and Telegram groups mix official circulars with informal chatter, memes, and non-academic media, leading to missed examination dates.</a:t>
             </a:r>
           </a:p>
           <a:p>
             <a:pPr>
               <a:spcAft>
-                <a:spcPts val="600"/>
+                <a:spcPts val="1200"/>
               </a:spcAft>
-              <a:defRPr sz="1100">
+            </a:pPr>
+            <a:r>
+              <a:rPr b="1" i="0" sz="1400">
+                <a:solidFill>
+                  <a:srgbClr val="70AD47"/>
+                </a:solidFill>
+                <a:latin typeface="Calibri"/>
+              </a:rPr>
+              <a:t>►  </a:t>
+            </a:r>
+            <a:r>
+              <a:rPr b="1" i="0" sz="1400">
+                <a:solidFill>
+                  <a:srgbClr val="375623"/>
+                </a:solidFill>
+                <a:latin typeface="Calibri"/>
+              </a:rPr>
+              <a:t>Zero Proof of Delivery &amp; Acknowledgment: </a:t>
+            </a:r>
+            <a:r>
+              <a:rPr b="0" i="0" sz="1300">
                 <a:solidFill>
                   <a:srgbClr val="1E293B"/>
                 </a:solidFill>
                 <a:latin typeface="Calibri"/>
-              </a:defRPr>
-            </a:pPr>
-            <a:r>
-              <a:t>3. University of Mumbai, 'Syllabus for Second Year Information Technology (Semester III &amp; IV)', 2024–2025.</a:t>
+              </a:rPr>
+              <a:t>Faculty and examination cells have no verifiable mechanism or digital logs to confirm whether targeted students actually read critical notices.</a:t>
             </a:r>
           </a:p>
           <a:p>
             <a:pPr>
               <a:spcAft>
-                <a:spcPts val="600"/>
+                <a:spcPts val="1200"/>
               </a:spcAft>
-              <a:defRPr sz="1100">
+            </a:pPr>
+            <a:r>
+              <a:rPr b="1" i="0" sz="1400">
+                <a:solidFill>
+                  <a:srgbClr val="70AD47"/>
+                </a:solidFill>
+                <a:latin typeface="Calibri"/>
+              </a:rPr>
+              <a:t>►  </a:t>
+            </a:r>
+            <a:r>
+              <a:rPr b="1" i="0" sz="1400">
+                <a:solidFill>
+                  <a:srgbClr val="375623"/>
+                </a:solidFill>
+                <a:latin typeface="Calibri"/>
+              </a:rPr>
+              <a:t>Vulnerability to Fake Circulars &amp; Rumors: </a:t>
+            </a:r>
+            <a:r>
+              <a:rPr b="0" i="0" sz="1300">
                 <a:solidFill>
                   <a:srgbClr val="1E293B"/>
                 </a:solidFill>
                 <a:latin typeface="Calibri"/>
-              </a:defRPr>
-            </a:pPr>
-            <a:r>
-              <a:t>4. Oracle Corporation, 'Java Platform Standard Edition 17 &amp; 21 API Documentation', docs.oracle.com.</a:t>
+              </a:rPr>
+              <a:t>Unofficial broadcast channels lack Role-Based Access Control (RBAC), leaving students susceptible to unverified exam cancellation rumors.</a:t>
             </a:r>
           </a:p>
           <a:p>
             <a:pPr>
               <a:spcAft>
-                <a:spcPts val="600"/>
+                <a:spcPts val="1200"/>
               </a:spcAft>
-              <a:defRPr sz="1100">
+            </a:pPr>
+            <a:r>
+              <a:rPr b="1" i="0" sz="1400">
+                <a:solidFill>
+                  <a:srgbClr val="70AD47"/>
+                </a:solidFill>
+                <a:latin typeface="Calibri"/>
+              </a:rPr>
+              <a:t>►  </a:t>
+            </a:r>
+            <a:r>
+              <a:rPr b="1" i="0" sz="1400">
+                <a:solidFill>
+                  <a:srgbClr val="375623"/>
+                </a:solidFill>
+                <a:latin typeface="Calibri"/>
+              </a:rPr>
+              <a:t>Paper Waste &amp; High Operational Overhead: </a:t>
+            </a:r>
+            <a:r>
+              <a:rPr b="0" i="0" sz="1300">
                 <a:solidFill>
                   <a:srgbClr val="1E293B"/>
                 </a:solidFill>
                 <a:latin typeface="Calibri"/>
-              </a:defRPr>
-            </a:pPr>
-            <a:r>
-              <a:t>5. IEEE Computer Society, 'Software Engineering Standards &amp; Design Patterns Handbook', 2024.</a:t>
-            </a:r>
-          </a:p>
-        </p:txBody>
-      </p:sp>
-      <p:sp>
-        <p:nvSpPr>
-          <p:cNvPr id="7" name="TextBox 6"/>
-          <p:cNvSpPr txBox="1"/>
-          <p:nvPr/>
-        </p:nvSpPr>
-        <p:spPr>
-          <a:xfrm>
-            <a:off x="1371600" y="4297680"/>
-            <a:ext cx="7772400" cy="2011680"/>
-          </a:xfrm>
-          <a:prstGeom prst="rect">
-            <a:avLst/>
-          </a:prstGeom>
-          <a:noFill/>
-        </p:spPr>
-        <p:txBody>
-          <a:bodyPr wrap="none">
-            <a:spAutoFit/>
-          </a:bodyPr>
-          <a:lstStyle/>
-          <a:p>
-            <a:pPr algn="ctr">
-              <a:defRPr sz="3200" b="1">
-                <a:solidFill>
-                  <a:srgbClr val="70AD47"/>
-                </a:solidFill>
-                <a:latin typeface="Calibri"/>
-              </a:defRPr>
-            </a:pPr>
-            <a:r>
-              <a:t>Thank You!</a:t>
-            </a:r>
-          </a:p>
-          <a:p>
-            <a:pPr algn="ctr">
-              <a:defRPr sz="1600" b="1">
-                <a:solidFill>
-                  <a:srgbClr val="375623"/>
-                </a:solidFill>
-                <a:latin typeface="Calibri"/>
-              </a:defRPr>
-            </a:pPr>
-            <a:r>
-              <a:t>Questions &amp; Feedback Welcome</a:t>
-            </a:r>
-            <a:br/>
-          </a:p>
-          <a:p>
-            <a:pPr algn="ctr">
-              <a:defRPr sz="1100" i="1">
-                <a:solidFill>
-                  <a:srgbClr val="64748B"/>
-                </a:solidFill>
-                <a:latin typeface="Calibri"/>
-              </a:defRPr>
-            </a:pPr>
-            <a:r>
-              <a:t>Live Project: https://campnotify-eef91.web.app | GitHub: ATP0925/CampusNotify-Java-Mini-Project</a:t>
+              </a:rPr>
+              <a:t>High recurring paper printing costs, toner waste, and physical labor required to distribute and pin paper circulars across multiple campus buildings.</a:t>
             </a:r>
           </a:p>
         </p:txBody>
@@ -6512,7 +5994,7 @@
 </p:sld>
 </file>
 
-<file path=ppt/slides/slide2.xml><?xml version="1.0" encoding="utf-8"?>
+<file path=ppt/slides/slide5.xml><?xml version="1.0" encoding="utf-8"?>
 <p:sld xmlns:a="http://schemas.openxmlformats.org/drawingml/2006/main" xmlns:p="http://schemas.openxmlformats.org/presentationml/2006/main" xmlns:r="http://schemas.openxmlformats.org/officeDocument/2006/relationships">
   <p:cSld>
     <p:spTree>
@@ -6688,7 +6170,7 @@
               </a:defRPr>
             </a:pPr>
             <a:r>
-              <a:t>Table of Content:</a:t>
+              <a:t>Objectives:</a:t>
             </a:r>
           </a:p>
         </p:txBody>
@@ -6701,7 +6183,7 @@
         </p:nvSpPr>
         <p:spPr>
           <a:xfrm>
-            <a:off x="1097280" y="1371600"/>
+            <a:off x="914400" y="1371600"/>
             <a:ext cx="8686800" cy="4754880"/>
           </a:xfrm>
           <a:prstGeom prst="rect">
@@ -6717,193 +6199,205 @@
           <a:p>
             <a:pPr>
               <a:spcAft>
-                <a:spcPts val="800"/>
+                <a:spcPts val="1000"/>
               </a:spcAft>
-              <a:defRPr sz="1550" b="1">
+            </a:pPr>
+            <a:r>
+              <a:rPr b="1" i="0" sz="1350">
+                <a:solidFill>
+                  <a:srgbClr val="70AD47"/>
+                </a:solidFill>
+                <a:latin typeface="Calibri"/>
+              </a:rPr>
+              <a:t>►  </a:t>
+            </a:r>
+            <a:r>
+              <a:rPr b="1" i="0" sz="1350">
                 <a:solidFill>
                   <a:srgbClr val="375623"/>
                 </a:solidFill>
                 <a:latin typeface="Calibri"/>
-              </a:defRPr>
-            </a:pPr>
-            <a:r>
-              <a:t>►  Introduction &amp; Academic Background</a:t>
+              </a:rPr>
+              <a:t>Centralized Digital Notice Repository: </a:t>
+            </a:r>
+            <a:r>
+              <a:rPr b="0" i="0" sz="1250">
+                <a:solidFill>
+                  <a:srgbClr val="1E293B"/>
+                </a:solidFill>
+                <a:latin typeface="Calibri"/>
+              </a:rPr>
+              <a:t>To build a single authoritative portal categorized by department (IT, Comps, Mech, Civil) and priority (Urgent, Normal).</a:t>
             </a:r>
           </a:p>
           <a:p>
             <a:pPr>
               <a:spcAft>
-                <a:spcPts val="800"/>
+                <a:spcPts val="1000"/>
               </a:spcAft>
-              <a:defRPr sz="1550" b="0">
+            </a:pPr>
+            <a:r>
+              <a:rPr b="1" i="0" sz="1350">
+                <a:solidFill>
+                  <a:srgbClr val="70AD47"/>
+                </a:solidFill>
+                <a:latin typeface="Calibri"/>
+              </a:rPr>
+              <a:t>►  </a:t>
+            </a:r>
+            <a:r>
+              <a:rPr b="1" i="0" sz="1350">
+                <a:solidFill>
+                  <a:srgbClr val="375623"/>
+                </a:solidFill>
+                <a:latin typeface="Calibri"/>
+              </a:rPr>
+              <a:t>Implement Core Java OOP Architecture: </a:t>
+            </a:r>
+            <a:r>
+              <a:rPr b="0" i="0" sz="1250">
                 <a:solidFill>
                   <a:srgbClr val="1E293B"/>
                 </a:solidFill>
                 <a:latin typeface="Calibri"/>
-              </a:defRPr>
-            </a:pPr>
-            <a:r>
-              <a:t>►  Problem Statement &amp; Current Bottlenecks</a:t>
+              </a:rPr>
+              <a:t>To apply Encapsulation, Inheritance, Polymorphism, and Interfaces (Notifiable, AuditLoggable) for robust, maintainable domain services.</a:t>
             </a:r>
           </a:p>
           <a:p>
             <a:pPr>
               <a:spcAft>
-                <a:spcPts val="800"/>
+                <a:spcPts val="1000"/>
               </a:spcAft>
-              <a:defRPr sz="1550" b="0">
+            </a:pPr>
+            <a:r>
+              <a:rPr b="1" i="0" sz="1350">
+                <a:solidFill>
+                  <a:srgbClr val="70AD47"/>
+                </a:solidFill>
+                <a:latin typeface="Calibri"/>
+              </a:rPr>
+              <a:t>►  </a:t>
+            </a:r>
+            <a:r>
+              <a:rPr b="1" i="0" sz="1350">
+                <a:solidFill>
+                  <a:srgbClr val="375623"/>
+                </a:solidFill>
+                <a:latin typeface="Calibri"/>
+              </a:rPr>
+              <a:t>Enforce Role-Based Access Control (RBAC): </a:t>
+            </a:r>
+            <a:r>
+              <a:rPr b="0" i="0" sz="1250">
                 <a:solidFill>
                   <a:srgbClr val="1E293B"/>
                 </a:solidFill>
                 <a:latin typeface="Calibri"/>
-              </a:defRPr>
-            </a:pPr>
-            <a:r>
-              <a:t>►  Objectives of the Project</a:t>
+              </a:rPr>
+              <a:t>To establish a Zero-Access Security Wall restricting circular creation, editing, and deletion strictly to authenticated Super Admins and Faculty.</a:t>
             </a:r>
           </a:p>
           <a:p>
             <a:pPr>
               <a:spcAft>
-                <a:spcPts val="800"/>
+                <a:spcPts val="1000"/>
               </a:spcAft>
-              <a:defRPr sz="1550" b="0">
+            </a:pPr>
+            <a:r>
+              <a:rPr b="1" i="0" sz="1350">
+                <a:solidFill>
+                  <a:srgbClr val="70AD47"/>
+                </a:solidFill>
+                <a:latin typeface="Calibri"/>
+              </a:rPr>
+              <a:t>►  </a:t>
+            </a:r>
+            <a:r>
+              <a:rPr b="1" i="0" sz="1350">
+                <a:solidFill>
+                  <a:srgbClr val="375623"/>
+                </a:solidFill>
+                <a:latin typeface="Calibri"/>
+              </a:rPr>
+              <a:t>Provide Verifiable Digital Acknowledgment: </a:t>
+            </a:r>
+            <a:r>
+              <a:rPr b="0" i="0" sz="1250">
                 <a:solidFill>
                   <a:srgbClr val="1E293B"/>
                 </a:solidFill>
                 <a:latin typeface="Calibri"/>
-              </a:defRPr>
-            </a:pPr>
-            <a:r>
-              <a:t>►  Literature Survey (Comparative Matrix)</a:t>
+              </a:rPr>
+              <a:t>To enable students to digitally acknowledge circulars with instant timestamped receipts for administrative audit records.</a:t>
             </a:r>
           </a:p>
           <a:p>
             <a:pPr>
               <a:spcAft>
-                <a:spcPts val="800"/>
+                <a:spcPts val="1000"/>
               </a:spcAft>
-              <a:defRPr sz="1550" b="0">
+            </a:pPr>
+            <a:r>
+              <a:rPr b="1" i="0" sz="1350">
+                <a:solidFill>
+                  <a:srgbClr val="70AD47"/>
+                </a:solidFill>
+                <a:latin typeface="Calibri"/>
+              </a:rPr>
+              <a:t>►  </a:t>
+            </a:r>
+            <a:r>
+              <a:rPr b="1" i="0" sz="1350">
+                <a:solidFill>
+                  <a:srgbClr val="375623"/>
+                </a:solidFill>
+                <a:latin typeface="Calibri"/>
+              </a:rPr>
+              <a:t>Deliver Responsive &amp; Offline Accessibility: </a:t>
+            </a:r>
+            <a:r>
+              <a:rPr b="0" i="0" sz="1250">
                 <a:solidFill>
                   <a:srgbClr val="1E293B"/>
                 </a:solidFill>
                 <a:latin typeface="Calibri"/>
-              </a:defRPr>
-            </a:pPr>
-            <a:r>
-              <a:t>►  Research Gap &amp; System Innovation</a:t>
+              </a:rPr>
+              <a:t>To ensure 100% responsive user experience across mobile phones, tablets, and PCs with local caching during connectivity drops.</a:t>
             </a:r>
           </a:p>
           <a:p>
             <a:pPr>
               <a:spcAft>
-                <a:spcPts val="800"/>
+                <a:spcPts val="1000"/>
               </a:spcAft>
-              <a:defRPr sz="1550" b="1">
+            </a:pPr>
+            <a:r>
+              <a:rPr b="1" i="0" sz="1350">
+                <a:solidFill>
+                  <a:srgbClr val="70AD47"/>
+                </a:solidFill>
+                <a:latin typeface="Calibri"/>
+              </a:rPr>
+              <a:t>►  </a:t>
+            </a:r>
+            <a:r>
+              <a:rPr b="1" i="0" sz="1350">
                 <a:solidFill>
                   <a:srgbClr val="375623"/>
                 </a:solidFill>
                 <a:latin typeface="Calibri"/>
-              </a:defRPr>
-            </a:pPr>
-            <a:r>
-              <a:t>►  Proposed Solution &amp; MVC Architecture</a:t>
-            </a:r>
-          </a:p>
-          <a:p>
-            <a:pPr>
-              <a:spcAft>
-                <a:spcPts val="800"/>
-              </a:spcAft>
-              <a:defRPr sz="1550" b="1">
-                <a:solidFill>
-                  <a:srgbClr val="375623"/>
-                </a:solidFill>
-                <a:latin typeface="Calibri"/>
-              </a:defRPr>
-            </a:pPr>
-            <a:r>
-              <a:t>►  Core Java OOP Design &amp; Implementation</a:t>
-            </a:r>
-          </a:p>
-          <a:p>
-            <a:pPr>
-              <a:spcAft>
-                <a:spcPts val="800"/>
-              </a:spcAft>
-              <a:defRPr sz="1550" b="0">
+              </a:rPr>
+              <a:t>Promote Green Campus Sustainability: </a:t>
+            </a:r>
+            <a:r>
+              <a:rPr b="0" i="0" sz="1250">
                 <a:solidFill>
                   <a:srgbClr val="1E293B"/>
                 </a:solidFill>
                 <a:latin typeface="Calibri"/>
-              </a:defRPr>
-            </a:pPr>
-            <a:r>
-              <a:t>►  Web Dashboard, Real-time Sync &amp; Security Governance</a:t>
-            </a:r>
-          </a:p>
-          <a:p>
-            <a:pPr>
-              <a:spcAft>
-                <a:spcPts val="800"/>
-              </a:spcAft>
-              <a:defRPr sz="1550" b="0">
-                <a:solidFill>
-                  <a:srgbClr val="1E293B"/>
-                </a:solidFill>
-                <a:latin typeface="Calibri"/>
-              </a:defRPr>
-            </a:pPr>
-            <a:r>
-              <a:t>►  Project Planning &amp; 13-Week Timeline</a:t>
-            </a:r>
-          </a:p>
-          <a:p>
-            <a:pPr>
-              <a:spcAft>
-                <a:spcPts val="800"/>
-              </a:spcAft>
-              <a:defRPr sz="1550" b="1">
-                <a:solidFill>
-                  <a:srgbClr val="375623"/>
-                </a:solidFill>
-                <a:latin typeface="Calibri"/>
-              </a:defRPr>
-            </a:pPr>
-            <a:r>
-              <a:t>►  Automated Testing &amp; Reliability Matrix (92 Tests)</a:t>
-            </a:r>
-          </a:p>
-          <a:p>
-            <a:pPr>
-              <a:spcAft>
-                <a:spcPts val="800"/>
-              </a:spcAft>
-              <a:defRPr sz="1550" b="0">
-                <a:solidFill>
-                  <a:srgbClr val="1E293B"/>
-                </a:solidFill>
-                <a:latin typeface="Calibri"/>
-              </a:defRPr>
-            </a:pPr>
-            <a:r>
-              <a:t>►  Conclusion &amp; Societal Impact (SDG 4 &amp; SDG 9)</a:t>
-            </a:r>
-          </a:p>
-          <a:p>
-            <a:pPr>
-              <a:spcAft>
-                <a:spcPts val="800"/>
-              </a:spcAft>
-              <a:defRPr sz="1550" b="0">
-                <a:solidFill>
-                  <a:srgbClr val="1E293B"/>
-                </a:solidFill>
-                <a:latin typeface="Calibri"/>
-              </a:defRPr>
-            </a:pPr>
-            <a:r>
-              <a:t>►  Future Scope &amp; References</a:t>
+              </a:rPr>
+              <a:t>To eliminate paper dependency, advancing UN Sustainable Development Goals (SDG 9: Innovation, SDG 12: Responsible Consumption).</a:t>
             </a:r>
           </a:p>
         </p:txBody>
@@ -6916,7 +6410,7 @@
 </p:sld>
 </file>
 
-<file path=ppt/slides/slide3.xml><?xml version="1.0" encoding="utf-8"?>
+<file path=ppt/slides/slide6.xml><?xml version="1.0" encoding="utf-8"?>
 <p:sld xmlns:a="http://schemas.openxmlformats.org/drawingml/2006/main" xmlns:p="http://schemas.openxmlformats.org/presentationml/2006/main" xmlns:r="http://schemas.openxmlformats.org/officeDocument/2006/relationships">
   <p:cSld>
     <p:spTree>
@@ -7092,998 +6586,6 @@
               </a:defRPr>
             </a:pPr>
             <a:r>
-              <a:t>Introduction &amp; Academic Background:</a:t>
-            </a:r>
-          </a:p>
-        </p:txBody>
-      </p:sp>
-      <p:sp>
-        <p:nvSpPr>
-          <p:cNvPr id="6" name="TextBox 5"/>
-          <p:cNvSpPr txBox="1"/>
-          <p:nvPr/>
-        </p:nvSpPr>
-        <p:spPr>
-          <a:xfrm>
-            <a:off x="914400" y="1463040"/>
-            <a:ext cx="8961120" cy="4572000"/>
-          </a:xfrm>
-          <a:prstGeom prst="rect">
-            <a:avLst/>
-          </a:prstGeom>
-          <a:noFill/>
-        </p:spPr>
-        <p:txBody>
-          <a:bodyPr wrap="square">
-            <a:spAutoFit/>
-          </a:bodyPr>
-          <a:lstStyle/>
-          <a:p>
-            <a:pPr>
-              <a:spcAft>
-                <a:spcPts val="1400"/>
-              </a:spcAft>
-            </a:pPr>
-            <a:r>
-              <a:rPr b="1" i="0" sz="1400">
-                <a:solidFill>
-                  <a:srgbClr val="375623"/>
-                </a:solidFill>
-                <a:latin typeface="Calibri"/>
-              </a:rPr>
-              <a:t>•  Institutional Communication Need: </a:t>
-            </a:r>
-            <a:r>
-              <a:rPr b="0" i="0" sz="1300">
-                <a:solidFill>
-                  <a:srgbClr val="1E293B"/>
-                </a:solidFill>
-                <a:latin typeface="Calibri"/>
-              </a:rPr>
-              <a:t>In university campuses, timely, verified circular dissemination is a daily operational necessity. Every week, departments issue 30+ official circulars regarding exam schedules, KT forms, scholarship deadlines, and campus recruitment drives.</a:t>
-            </a:r>
-          </a:p>
-          <a:p>
-            <a:pPr>
-              <a:spcAft>
-                <a:spcPts val="1400"/>
-              </a:spcAft>
-            </a:pPr>
-            <a:r>
-              <a:rPr b="1" i="0" sz="1400">
-                <a:solidFill>
-                  <a:srgbClr val="375623"/>
-                </a:solidFill>
-                <a:latin typeface="Calibri"/>
-              </a:rPr>
-              <a:t>•  Diverse Stakeholders: </a:t>
-            </a:r>
-            <a:r>
-              <a:rPr b="0" i="0" sz="1300">
-                <a:solidFill>
-                  <a:srgbClr val="1E293B"/>
-                </a:solidFill>
-                <a:latin typeface="Calibri"/>
-              </a:rPr>
-              <a:t>The campus notification ecosystem connects three distinct groups: Institutional Administrators (Principal/HODs), Faculty Coordinators, and Students.</a:t>
-            </a:r>
-          </a:p>
-          <a:p>
-            <a:pPr>
-              <a:spcAft>
-                <a:spcPts val="1400"/>
-              </a:spcAft>
-            </a:pPr>
-            <a:r>
-              <a:rPr b="1" i="0" sz="1400">
-                <a:solidFill>
-                  <a:srgbClr val="375623"/>
-                </a:solidFill>
-                <a:latin typeface="Calibri"/>
-              </a:rPr>
-              <a:t>•  The Current Status Quo: </a:t>
-            </a:r>
-            <a:r>
-              <a:rPr b="0" i="0" sz="1300">
-                <a:solidFill>
-                  <a:srgbClr val="1E293B"/>
-                </a:solidFill>
-                <a:latin typeface="Calibri"/>
-              </a:rPr>
-              <a:t>Currently, institutions rely heavily on physical wooden bulletin boards in hallways or informal WhatsApp/Telegram groups. Critical circulars get overlooked, students miss strict deadlines, and unverified rumors circulate without audit trails.</a:t>
-            </a:r>
-          </a:p>
-          <a:p>
-            <a:pPr>
-              <a:spcAft>
-                <a:spcPts val="1400"/>
-              </a:spcAft>
-            </a:pPr>
-            <a:r>
-              <a:rPr b="1" i="0" sz="1400">
-                <a:solidFill>
-                  <a:srgbClr val="375623"/>
-                </a:solidFill>
-                <a:latin typeface="Calibri"/>
-              </a:rPr>
-              <a:t>•  Core Java Mini-Project Context: </a:t>
-            </a:r>
-            <a:r>
-              <a:rPr b="0" i="0" sz="1300">
-                <a:solidFill>
-                  <a:srgbClr val="1E293B"/>
-                </a:solidFill>
-                <a:latin typeface="Calibri"/>
-              </a:rPr>
-              <a:t>Campus Notify bridges laboratory Java concepts (Encapsulation, File I/O, Collections) with modern enterprise deployment to solve this real-world campus bottleneck.</a:t>
-            </a:r>
-          </a:p>
-        </p:txBody>
-      </p:sp>
-    </p:spTree>
-  </p:cSld>
-  <p:clrMapOvr>
-    <a:masterClrMapping/>
-  </p:clrMapOvr>
-</p:sld>
-</file>
-
-<file path=ppt/slides/slide4.xml><?xml version="1.0" encoding="utf-8"?>
-<p:sld xmlns:a="http://schemas.openxmlformats.org/drawingml/2006/main" xmlns:p="http://schemas.openxmlformats.org/presentationml/2006/main" xmlns:r="http://schemas.openxmlformats.org/officeDocument/2006/relationships">
-  <p:cSld>
-    <p:spTree>
-      <p:nvGrpSpPr>
-        <p:cNvPr id="1" name=""/>
-        <p:cNvGrpSpPr/>
-        <p:nvPr/>
-      </p:nvGrpSpPr>
-      <p:grpSpPr/>
-      <p:sp>
-        <p:nvSpPr>
-          <p:cNvPr id="2" name="Right Triangle 1"/>
-          <p:cNvSpPr/>
-          <p:nvPr/>
-        </p:nvSpPr>
-        <p:spPr>
-          <a:xfrm rot="10800000">
-            <a:off x="9601200" y="0"/>
-            <a:ext cx="2590495" cy="6858000"/>
-          </a:xfrm>
-          <a:prstGeom prst="rtTriangle">
-            <a:avLst/>
-          </a:prstGeom>
-          <a:solidFill>
-            <a:srgbClr val="E2EFDA"/>
-          </a:solidFill>
-          <a:ln>
-            <a:solidFill>
-              <a:srgbClr val="E2EFDA"/>
-            </a:solidFill>
-          </a:ln>
-        </p:spPr>
-        <p:style>
-          <a:lnRef idx="1">
-            <a:schemeClr val="accent1"/>
-          </a:lnRef>
-          <a:fillRef idx="3">
-            <a:schemeClr val="accent1"/>
-          </a:fillRef>
-          <a:effectRef idx="2">
-            <a:schemeClr val="accent1"/>
-          </a:effectRef>
-          <a:fontRef idx="minor">
-            <a:schemeClr val="lt1"/>
-          </a:fontRef>
-        </p:style>
-        <p:txBody>
-          <a:bodyPr rtlCol="0" anchor="ctr"/>
-          <a:lstStyle/>
-          <a:p>
-            <a:pPr algn="ctr"/>
-          </a:p>
-        </p:txBody>
-      </p:sp>
-      <p:sp>
-        <p:nvSpPr>
-          <p:cNvPr id="3" name="Right Triangle 2"/>
-          <p:cNvSpPr/>
-          <p:nvPr/>
-        </p:nvSpPr>
-        <p:spPr>
-          <a:xfrm>
-            <a:off x="10241280" y="1371600"/>
-            <a:ext cx="1950415" cy="5486400"/>
-          </a:xfrm>
-          <a:prstGeom prst="rtTriangle">
-            <a:avLst/>
-          </a:prstGeom>
-          <a:solidFill>
-            <a:srgbClr val="A9D08E"/>
-          </a:solidFill>
-          <a:ln>
-            <a:solidFill>
-              <a:srgbClr val="A9D08E"/>
-            </a:solidFill>
-          </a:ln>
-        </p:spPr>
-        <p:style>
-          <a:lnRef idx="1">
-            <a:schemeClr val="accent1"/>
-          </a:lnRef>
-          <a:fillRef idx="3">
-            <a:schemeClr val="accent1"/>
-          </a:fillRef>
-          <a:effectRef idx="2">
-            <a:schemeClr val="accent1"/>
-          </a:effectRef>
-          <a:fontRef idx="minor">
-            <a:schemeClr val="lt1"/>
-          </a:fontRef>
-        </p:style>
-        <p:txBody>
-          <a:bodyPr rtlCol="0" anchor="ctr"/>
-          <a:lstStyle/>
-          <a:p>
-            <a:pPr algn="ctr"/>
-          </a:p>
-        </p:txBody>
-      </p:sp>
-      <p:sp>
-        <p:nvSpPr>
-          <p:cNvPr id="4" name="Right Triangle 3"/>
-          <p:cNvSpPr/>
-          <p:nvPr/>
-        </p:nvSpPr>
-        <p:spPr>
-          <a:xfrm rot="5400000">
-            <a:off x="10789920" y="2743200"/>
-            <a:ext cx="1401775" cy="4114800"/>
-          </a:xfrm>
-          <a:prstGeom prst="rtTriangle">
-            <a:avLst/>
-          </a:prstGeom>
-          <a:solidFill>
-            <a:srgbClr val="70AD47"/>
-          </a:solidFill>
-          <a:ln>
-            <a:solidFill>
-              <a:srgbClr val="70AD47"/>
-            </a:solidFill>
-          </a:ln>
-        </p:spPr>
-        <p:style>
-          <a:lnRef idx="1">
-            <a:schemeClr val="accent1"/>
-          </a:lnRef>
-          <a:fillRef idx="3">
-            <a:schemeClr val="accent1"/>
-          </a:fillRef>
-          <a:effectRef idx="2">
-            <a:schemeClr val="accent1"/>
-          </a:effectRef>
-          <a:fontRef idx="minor">
-            <a:schemeClr val="lt1"/>
-          </a:fontRef>
-        </p:style>
-        <p:txBody>
-          <a:bodyPr rtlCol="0" anchor="ctr"/>
-          <a:lstStyle/>
-          <a:p>
-            <a:pPr algn="ctr"/>
-          </a:p>
-        </p:txBody>
-      </p:sp>
-      <p:sp>
-        <p:nvSpPr>
-          <p:cNvPr id="5" name="TextBox 4"/>
-          <p:cNvSpPr txBox="1"/>
-          <p:nvPr/>
-        </p:nvSpPr>
-        <p:spPr>
-          <a:xfrm>
-            <a:off x="731520" y="548640"/>
-            <a:ext cx="9144000" cy="731520"/>
-          </a:xfrm>
-          <a:prstGeom prst="rect">
-            <a:avLst/>
-          </a:prstGeom>
-          <a:noFill/>
-        </p:spPr>
-        <p:txBody>
-          <a:bodyPr wrap="square">
-            <a:spAutoFit/>
-          </a:bodyPr>
-          <a:lstStyle/>
-          <a:p>
-            <a:pPr>
-              <a:defRPr sz="2800" b="1">
-                <a:solidFill>
-                  <a:srgbClr val="70AD47"/>
-                </a:solidFill>
-                <a:latin typeface="Calibri"/>
-              </a:defRPr>
-            </a:pPr>
-            <a:r>
-              <a:t>Problem Statement &amp; Motivation:</a:t>
-            </a:r>
-          </a:p>
-        </p:txBody>
-      </p:sp>
-      <p:sp>
-        <p:nvSpPr>
-          <p:cNvPr id="6" name="TextBox 5"/>
-          <p:cNvSpPr txBox="1"/>
-          <p:nvPr/>
-        </p:nvSpPr>
-        <p:spPr>
-          <a:xfrm>
-            <a:off x="914400" y="1371600"/>
-            <a:ext cx="8961120" cy="4754880"/>
-          </a:xfrm>
-          <a:prstGeom prst="rect">
-            <a:avLst/>
-          </a:prstGeom>
-          <a:noFill/>
-        </p:spPr>
-        <p:txBody>
-          <a:bodyPr wrap="square">
-            <a:spAutoFit/>
-          </a:bodyPr>
-          <a:lstStyle/>
-          <a:p>
-            <a:pPr>
-              <a:spcAft>
-                <a:spcPts val="1000"/>
-              </a:spcAft>
-            </a:pPr>
-            <a:r>
-              <a:rPr b="1" i="0" sz="1350">
-                <a:solidFill>
-                  <a:srgbClr val="375623"/>
-                </a:solidFill>
-                <a:latin typeface="Calibri"/>
-              </a:rPr>
-              <a:t>►  Information Clutter in Chat Groups:
-   </a:t>
-            </a:r>
-            <a:r>
-              <a:rPr b="0" i="0" sz="1200">
-                <a:solidFill>
-                  <a:srgbClr val="1E293B"/>
-                </a:solidFill>
-                <a:latin typeface="Calibri"/>
-              </a:rPr>
-              <a:t>In WhatsApp/Telegram groups, official notices get buried under hundreds of student chats and forwarded messages. Students frequently miss hall-ticket releases and revaluation deadlines.</a:t>
-            </a:r>
-          </a:p>
-          <a:p>
-            <a:pPr>
-              <a:spcAft>
-                <a:spcPts val="1000"/>
-              </a:spcAft>
-            </a:pPr>
-            <a:r>
-              <a:rPr b="1" i="0" sz="1350">
-                <a:solidFill>
-                  <a:srgbClr val="375623"/>
-                </a:solidFill>
-                <a:latin typeface="Calibri"/>
-              </a:rPr>
-              <a:t>►  Zero Authenticity &amp; Tampering Risk:
-   </a:t>
-            </a:r>
-            <a:r>
-              <a:rPr b="0" i="0" sz="1200">
-                <a:solidFill>
-                  <a:srgbClr val="1E293B"/>
-                </a:solidFill>
-                <a:latin typeface="Calibri"/>
-              </a:rPr>
-              <a:t>Informal channels lack cryptographic authenticity. Edited screenshots and fake holiday notices spread rapidly with no administrative audit trail.</a:t>
-            </a:r>
-          </a:p>
-          <a:p>
-            <a:pPr>
-              <a:spcAft>
-                <a:spcPts val="1000"/>
-              </a:spcAft>
-            </a:pPr>
-            <a:r>
-              <a:rPr b="1" i="0" sz="1350">
-                <a:solidFill>
-                  <a:srgbClr val="375623"/>
-                </a:solidFill>
-                <a:latin typeface="Calibri"/>
-              </a:rPr>
-              <a:t>►  No Category Filtering or Searchability:
-   </a:t>
-            </a:r>
-            <a:r>
-              <a:rPr b="0" i="0" sz="1200">
-                <a:solidFill>
-                  <a:srgbClr val="1E293B"/>
-                </a:solidFill>
-                <a:latin typeface="Calibri"/>
-              </a:rPr>
-              <a:t>Physical notice boards and chat streams offer zero search capability. Finding a circular from 3 weeks ago requires tedious manual scrolling or physical corridor visits.</a:t>
-            </a:r>
-          </a:p>
-          <a:p>
-            <a:pPr>
-              <a:spcAft>
-                <a:spcPts val="1000"/>
-              </a:spcAft>
-            </a:pPr>
-            <a:r>
-              <a:rPr b="1" i="0" sz="1350">
-                <a:solidFill>
-                  <a:srgbClr val="375623"/>
-                </a:solidFill>
-                <a:latin typeface="Calibri"/>
-              </a:rPr>
-              <a:t>►  Physical Access Constraints:
-   </a:t>
-            </a:r>
-            <a:r>
-              <a:rPr b="0" i="0" sz="1200">
-                <a:solidFill>
-                  <a:srgbClr val="1E293B"/>
-                </a:solidFill>
-                <a:latin typeface="Calibri"/>
-              </a:rPr>
-              <a:t>Commuting, ill, or absent students cannot view corridor notice boards in real-time.</a:t>
-            </a:r>
-          </a:p>
-          <a:p>
-            <a:pPr>
-              <a:spcAft>
-                <a:spcPts val="1000"/>
-              </a:spcAft>
-            </a:pPr>
-            <a:r>
-              <a:rPr b="1" i="0" sz="1350">
-                <a:solidFill>
-                  <a:srgbClr val="375623"/>
-                </a:solidFill>
-                <a:latin typeface="Calibri"/>
-              </a:rPr>
-              <a:t>►  Alignment with UN Sustainable Development Goals:
-   </a:t>
-            </a:r>
-            <a:r>
-              <a:rPr b="0" i="0" sz="1200">
-                <a:solidFill>
-                  <a:srgbClr val="1E293B"/>
-                </a:solidFill>
-                <a:latin typeface="Calibri"/>
-              </a:rPr>
-              <a:t>• SDG 4 (Quality Education): Ensuring equitable, organized circular access.
-• SDG 9 (Industry, Innovation &amp; Infrastructure): Modernizing campus software infrastructure.</a:t>
-            </a:r>
-          </a:p>
-        </p:txBody>
-      </p:sp>
-    </p:spTree>
-  </p:cSld>
-  <p:clrMapOvr>
-    <a:masterClrMapping/>
-  </p:clrMapOvr>
-</p:sld>
-</file>
-
-<file path=ppt/slides/slide5.xml><?xml version="1.0" encoding="utf-8"?>
-<p:sld xmlns:a="http://schemas.openxmlformats.org/drawingml/2006/main" xmlns:p="http://schemas.openxmlformats.org/presentationml/2006/main" xmlns:r="http://schemas.openxmlformats.org/officeDocument/2006/relationships">
-  <p:cSld>
-    <p:spTree>
-      <p:nvGrpSpPr>
-        <p:cNvPr id="1" name=""/>
-        <p:cNvGrpSpPr/>
-        <p:nvPr/>
-      </p:nvGrpSpPr>
-      <p:grpSpPr/>
-      <p:sp>
-        <p:nvSpPr>
-          <p:cNvPr id="2" name="Right Triangle 1"/>
-          <p:cNvSpPr/>
-          <p:nvPr/>
-        </p:nvSpPr>
-        <p:spPr>
-          <a:xfrm rot="10800000">
-            <a:off x="9601200" y="0"/>
-            <a:ext cx="2590495" cy="6858000"/>
-          </a:xfrm>
-          <a:prstGeom prst="rtTriangle">
-            <a:avLst/>
-          </a:prstGeom>
-          <a:solidFill>
-            <a:srgbClr val="E2EFDA"/>
-          </a:solidFill>
-          <a:ln>
-            <a:solidFill>
-              <a:srgbClr val="E2EFDA"/>
-            </a:solidFill>
-          </a:ln>
-        </p:spPr>
-        <p:style>
-          <a:lnRef idx="1">
-            <a:schemeClr val="accent1"/>
-          </a:lnRef>
-          <a:fillRef idx="3">
-            <a:schemeClr val="accent1"/>
-          </a:fillRef>
-          <a:effectRef idx="2">
-            <a:schemeClr val="accent1"/>
-          </a:effectRef>
-          <a:fontRef idx="minor">
-            <a:schemeClr val="lt1"/>
-          </a:fontRef>
-        </p:style>
-        <p:txBody>
-          <a:bodyPr rtlCol="0" anchor="ctr"/>
-          <a:lstStyle/>
-          <a:p>
-            <a:pPr algn="ctr"/>
-          </a:p>
-        </p:txBody>
-      </p:sp>
-      <p:sp>
-        <p:nvSpPr>
-          <p:cNvPr id="3" name="Right Triangle 2"/>
-          <p:cNvSpPr/>
-          <p:nvPr/>
-        </p:nvSpPr>
-        <p:spPr>
-          <a:xfrm>
-            <a:off x="10241280" y="1371600"/>
-            <a:ext cx="1950415" cy="5486400"/>
-          </a:xfrm>
-          <a:prstGeom prst="rtTriangle">
-            <a:avLst/>
-          </a:prstGeom>
-          <a:solidFill>
-            <a:srgbClr val="A9D08E"/>
-          </a:solidFill>
-          <a:ln>
-            <a:solidFill>
-              <a:srgbClr val="A9D08E"/>
-            </a:solidFill>
-          </a:ln>
-        </p:spPr>
-        <p:style>
-          <a:lnRef idx="1">
-            <a:schemeClr val="accent1"/>
-          </a:lnRef>
-          <a:fillRef idx="3">
-            <a:schemeClr val="accent1"/>
-          </a:fillRef>
-          <a:effectRef idx="2">
-            <a:schemeClr val="accent1"/>
-          </a:effectRef>
-          <a:fontRef idx="minor">
-            <a:schemeClr val="lt1"/>
-          </a:fontRef>
-        </p:style>
-        <p:txBody>
-          <a:bodyPr rtlCol="0" anchor="ctr"/>
-          <a:lstStyle/>
-          <a:p>
-            <a:pPr algn="ctr"/>
-          </a:p>
-        </p:txBody>
-      </p:sp>
-      <p:sp>
-        <p:nvSpPr>
-          <p:cNvPr id="4" name="Right Triangle 3"/>
-          <p:cNvSpPr/>
-          <p:nvPr/>
-        </p:nvSpPr>
-        <p:spPr>
-          <a:xfrm rot="5400000">
-            <a:off x="10789920" y="2743200"/>
-            <a:ext cx="1401775" cy="4114800"/>
-          </a:xfrm>
-          <a:prstGeom prst="rtTriangle">
-            <a:avLst/>
-          </a:prstGeom>
-          <a:solidFill>
-            <a:srgbClr val="70AD47"/>
-          </a:solidFill>
-          <a:ln>
-            <a:solidFill>
-              <a:srgbClr val="70AD47"/>
-            </a:solidFill>
-          </a:ln>
-        </p:spPr>
-        <p:style>
-          <a:lnRef idx="1">
-            <a:schemeClr val="accent1"/>
-          </a:lnRef>
-          <a:fillRef idx="3">
-            <a:schemeClr val="accent1"/>
-          </a:fillRef>
-          <a:effectRef idx="2">
-            <a:schemeClr val="accent1"/>
-          </a:effectRef>
-          <a:fontRef idx="minor">
-            <a:schemeClr val="lt1"/>
-          </a:fontRef>
-        </p:style>
-        <p:txBody>
-          <a:bodyPr rtlCol="0" anchor="ctr"/>
-          <a:lstStyle/>
-          <a:p>
-            <a:pPr algn="ctr"/>
-          </a:p>
-        </p:txBody>
-      </p:sp>
-      <p:sp>
-        <p:nvSpPr>
-          <p:cNvPr id="5" name="TextBox 4"/>
-          <p:cNvSpPr txBox="1"/>
-          <p:nvPr/>
-        </p:nvSpPr>
-        <p:spPr>
-          <a:xfrm>
-            <a:off x="731520" y="548640"/>
-            <a:ext cx="9144000" cy="731520"/>
-          </a:xfrm>
-          <a:prstGeom prst="rect">
-            <a:avLst/>
-          </a:prstGeom>
-          <a:noFill/>
-        </p:spPr>
-        <p:txBody>
-          <a:bodyPr wrap="square">
-            <a:spAutoFit/>
-          </a:bodyPr>
-          <a:lstStyle/>
-          <a:p>
-            <a:pPr>
-              <a:defRPr sz="2800" b="1">
-                <a:solidFill>
-                  <a:srgbClr val="70AD47"/>
-                </a:solidFill>
-                <a:latin typeface="Calibri"/>
-              </a:defRPr>
-            </a:pPr>
-            <a:r>
-              <a:t>Objectives of the Project:</a:t>
-            </a:r>
-          </a:p>
-        </p:txBody>
-      </p:sp>
-      <p:sp>
-        <p:nvSpPr>
-          <p:cNvPr id="6" name="TextBox 5"/>
-          <p:cNvSpPr txBox="1"/>
-          <p:nvPr/>
-        </p:nvSpPr>
-        <p:spPr>
-          <a:xfrm>
-            <a:off x="914400" y="1463040"/>
-            <a:ext cx="8961120" cy="4572000"/>
-          </a:xfrm>
-          <a:prstGeom prst="rect">
-            <a:avLst/>
-          </a:prstGeom>
-          <a:noFill/>
-        </p:spPr>
-        <p:txBody>
-          <a:bodyPr wrap="square">
-            <a:spAutoFit/>
-          </a:bodyPr>
-          <a:lstStyle/>
-          <a:p>
-            <a:pPr>
-              <a:spcAft>
-                <a:spcPts val="1400"/>
-              </a:spcAft>
-            </a:pPr>
-            <a:r>
-              <a:rPr b="1" i="0" sz="1400">
-                <a:solidFill>
-                  <a:srgbClr val="375623"/>
-                </a:solidFill>
-                <a:latin typeface="Calibri"/>
-              </a:rPr>
-              <a:t>1.  Centralized Digital Repository: </a:t>
-            </a:r>
-            <a:r>
-              <a:rPr b="0" i="0" sz="1300">
-                <a:solidFill>
-                  <a:srgbClr val="1E293B"/>
-                </a:solidFill>
-                <a:latin typeface="Calibri"/>
-              </a:rPr>
-              <a:t>Design a single, authoritative digital notice management platform replacing fragmented boards and chat groups.</a:t>
-            </a:r>
-          </a:p>
-          <a:p>
-            <a:pPr>
-              <a:spcAft>
-                <a:spcPts val="1400"/>
-              </a:spcAft>
-            </a:pPr>
-            <a:r>
-              <a:rPr b="1" i="0" sz="1400">
-                <a:solidFill>
-                  <a:srgbClr val="375623"/>
-                </a:solidFill>
-                <a:latin typeface="Calibri"/>
-              </a:rPr>
-              <a:t>2.  Role-Based Access Control (RBAC): </a:t>
-            </a:r>
-            <a:r>
-              <a:rPr b="0" i="0" sz="1300">
-                <a:solidFill>
-                  <a:srgbClr val="1E293B"/>
-                </a:solidFill>
-                <a:latin typeface="Calibri"/>
-              </a:rPr>
-              <a:t>Implement strict privilege boundaries separating authorized notice publishers (Admin/Faculty) from read-only viewers (Students).</a:t>
-            </a:r>
-          </a:p>
-          <a:p>
-            <a:pPr>
-              <a:spcAft>
-                <a:spcPts val="1400"/>
-              </a:spcAft>
-            </a:pPr>
-            <a:r>
-              <a:rPr b="1" i="0" sz="1400">
-                <a:solidFill>
-                  <a:srgbClr val="375623"/>
-                </a:solidFill>
-                <a:latin typeface="Calibri"/>
-              </a:rPr>
-              <a:t>3.  Core Java OOP Principles: </a:t>
-            </a:r>
-            <a:r>
-              <a:rPr b="0" i="0" sz="1300">
-                <a:solidFill>
-                  <a:srgbClr val="1E293B"/>
-                </a:solidFill>
-                <a:latin typeface="Calibri"/>
-              </a:rPr>
-              <a:t>Apply Encapsulation, Constructor Overloading, and Abstraction to structure resilient domain models (Notice, User, Role).</a:t>
-            </a:r>
-          </a:p>
-          <a:p>
-            <a:pPr>
-              <a:spcAft>
-                <a:spcPts val="1400"/>
-              </a:spcAft>
-            </a:pPr>
-            <a:r>
-              <a:rPr b="1" i="0" sz="1400">
-                <a:solidFill>
-                  <a:srgbClr val="375623"/>
-                </a:solidFill>
-                <a:latin typeface="Calibri"/>
-              </a:rPr>
-              <a:t>4.  Collections Framework &amp; File Persistence: </a:t>
-            </a:r>
-            <a:r>
-              <a:rPr b="0" i="0" sz="1300">
-                <a:solidFill>
-                  <a:srgbClr val="1E293B"/>
-                </a:solidFill>
-                <a:latin typeface="Calibri"/>
-              </a:rPr>
-              <a:t>Use Java ArrayList and safe Iterator traversal for memory management, and Java File I/O (BufferedReader, PrintWriter) for restart-safe disk persistence.</a:t>
-            </a:r>
-          </a:p>
-          <a:p>
-            <a:pPr>
-              <a:spcAft>
-                <a:spcPts val="1400"/>
-              </a:spcAft>
-            </a:pPr>
-            <a:r>
-              <a:rPr b="1" i="0" sz="1400">
-                <a:solidFill>
-                  <a:srgbClr val="375623"/>
-                </a:solidFill>
-                <a:latin typeface="Calibri"/>
-              </a:rPr>
-              <a:t>5.  Dual-Interface Architecture: </a:t>
-            </a:r>
-            <a:r>
-              <a:rPr b="0" i="0" sz="1300">
-                <a:solidFill>
-                  <a:srgbClr val="1E293B"/>
-                </a:solidFill>
-                <a:latin typeface="Calibri"/>
-              </a:rPr>
-              <a:t>Provide an interactive console terminal CLI scanner alongside a modern responsive web dashboard with real-time cloud synchronization.</a:t>
-            </a:r>
-          </a:p>
-        </p:txBody>
-      </p:sp>
-    </p:spTree>
-  </p:cSld>
-  <p:clrMapOvr>
-    <a:masterClrMapping/>
-  </p:clrMapOvr>
-</p:sld>
-</file>
-
-<file path=ppt/slides/slide6.xml><?xml version="1.0" encoding="utf-8"?>
-<p:sld xmlns:a="http://schemas.openxmlformats.org/drawingml/2006/main" xmlns:p="http://schemas.openxmlformats.org/presentationml/2006/main" xmlns:r="http://schemas.openxmlformats.org/officeDocument/2006/relationships">
-  <p:cSld>
-    <p:spTree>
-      <p:nvGrpSpPr>
-        <p:cNvPr id="1" name=""/>
-        <p:cNvGrpSpPr/>
-        <p:nvPr/>
-      </p:nvGrpSpPr>
-      <p:grpSpPr/>
-      <p:sp>
-        <p:nvSpPr>
-          <p:cNvPr id="2" name="Right Triangle 1"/>
-          <p:cNvSpPr/>
-          <p:nvPr/>
-        </p:nvSpPr>
-        <p:spPr>
-          <a:xfrm rot="10800000">
-            <a:off x="9601200" y="0"/>
-            <a:ext cx="2590495" cy="6858000"/>
-          </a:xfrm>
-          <a:prstGeom prst="rtTriangle">
-            <a:avLst/>
-          </a:prstGeom>
-          <a:solidFill>
-            <a:srgbClr val="E2EFDA"/>
-          </a:solidFill>
-          <a:ln>
-            <a:solidFill>
-              <a:srgbClr val="E2EFDA"/>
-            </a:solidFill>
-          </a:ln>
-        </p:spPr>
-        <p:style>
-          <a:lnRef idx="1">
-            <a:schemeClr val="accent1"/>
-          </a:lnRef>
-          <a:fillRef idx="3">
-            <a:schemeClr val="accent1"/>
-          </a:fillRef>
-          <a:effectRef idx="2">
-            <a:schemeClr val="accent1"/>
-          </a:effectRef>
-          <a:fontRef idx="minor">
-            <a:schemeClr val="lt1"/>
-          </a:fontRef>
-        </p:style>
-        <p:txBody>
-          <a:bodyPr rtlCol="0" anchor="ctr"/>
-          <a:lstStyle/>
-          <a:p>
-            <a:pPr algn="ctr"/>
-          </a:p>
-        </p:txBody>
-      </p:sp>
-      <p:sp>
-        <p:nvSpPr>
-          <p:cNvPr id="3" name="Right Triangle 2"/>
-          <p:cNvSpPr/>
-          <p:nvPr/>
-        </p:nvSpPr>
-        <p:spPr>
-          <a:xfrm>
-            <a:off x="10241280" y="1371600"/>
-            <a:ext cx="1950415" cy="5486400"/>
-          </a:xfrm>
-          <a:prstGeom prst="rtTriangle">
-            <a:avLst/>
-          </a:prstGeom>
-          <a:solidFill>
-            <a:srgbClr val="A9D08E"/>
-          </a:solidFill>
-          <a:ln>
-            <a:solidFill>
-              <a:srgbClr val="A9D08E"/>
-            </a:solidFill>
-          </a:ln>
-        </p:spPr>
-        <p:style>
-          <a:lnRef idx="1">
-            <a:schemeClr val="accent1"/>
-          </a:lnRef>
-          <a:fillRef idx="3">
-            <a:schemeClr val="accent1"/>
-          </a:fillRef>
-          <a:effectRef idx="2">
-            <a:schemeClr val="accent1"/>
-          </a:effectRef>
-          <a:fontRef idx="minor">
-            <a:schemeClr val="lt1"/>
-          </a:fontRef>
-        </p:style>
-        <p:txBody>
-          <a:bodyPr rtlCol="0" anchor="ctr"/>
-          <a:lstStyle/>
-          <a:p>
-            <a:pPr algn="ctr"/>
-          </a:p>
-        </p:txBody>
-      </p:sp>
-      <p:sp>
-        <p:nvSpPr>
-          <p:cNvPr id="4" name="Right Triangle 3"/>
-          <p:cNvSpPr/>
-          <p:nvPr/>
-        </p:nvSpPr>
-        <p:spPr>
-          <a:xfrm rot="5400000">
-            <a:off x="10789920" y="2743200"/>
-            <a:ext cx="1401775" cy="4114800"/>
-          </a:xfrm>
-          <a:prstGeom prst="rtTriangle">
-            <a:avLst/>
-          </a:prstGeom>
-          <a:solidFill>
-            <a:srgbClr val="70AD47"/>
-          </a:solidFill>
-          <a:ln>
-            <a:solidFill>
-              <a:srgbClr val="70AD47"/>
-            </a:solidFill>
-          </a:ln>
-        </p:spPr>
-        <p:style>
-          <a:lnRef idx="1">
-            <a:schemeClr val="accent1"/>
-          </a:lnRef>
-          <a:fillRef idx="3">
-            <a:schemeClr val="accent1"/>
-          </a:fillRef>
-          <a:effectRef idx="2">
-            <a:schemeClr val="accent1"/>
-          </a:effectRef>
-          <a:fontRef idx="minor">
-            <a:schemeClr val="lt1"/>
-          </a:fontRef>
-        </p:style>
-        <p:txBody>
-          <a:bodyPr rtlCol="0" anchor="ctr"/>
-          <a:lstStyle/>
-          <a:p>
-            <a:pPr algn="ctr"/>
-          </a:p>
-        </p:txBody>
-      </p:sp>
-      <p:sp>
-        <p:nvSpPr>
-          <p:cNvPr id="5" name="TextBox 4"/>
-          <p:cNvSpPr txBox="1"/>
-          <p:nvPr/>
-        </p:nvSpPr>
-        <p:spPr>
-          <a:xfrm>
-            <a:off x="731520" y="548640"/>
-            <a:ext cx="9144000" cy="731520"/>
-          </a:xfrm>
-          <a:prstGeom prst="rect">
-            <a:avLst/>
-          </a:prstGeom>
-          <a:noFill/>
-        </p:spPr>
-        <p:txBody>
-          <a:bodyPr wrap="square">
-            <a:spAutoFit/>
-          </a:bodyPr>
-          <a:lstStyle/>
-          <a:p>
-            <a:pPr>
-              <a:defRPr sz="2800" b="1">
-                <a:solidFill>
-                  <a:srgbClr val="70AD47"/>
-                </a:solidFill>
-                <a:latin typeface="Calibri"/>
-              </a:defRPr>
-            </a:pPr>
-            <a:r>
               <a:t>Literature Survey:</a:t>
             </a:r>
           </a:p>
@@ -8099,7 +6601,7 @@
         </p:nvGraphicFramePr>
         <p:xfrm>
           <a:off x="731520" y="1371600"/>
-          <a:ext cx="9601200" cy="4572000"/>
+          <a:ext cx="9326880" cy="4754880"/>
         </p:xfrm>
         <a:graphic>
           <a:graphicData uri="http://schemas.openxmlformats.org/drawingml/2006/table">
@@ -8110,27 +6612,27 @@
               <a:tblGrid>
                 <a:gridCol w="548640"/>
                 <a:gridCol w="2011680"/>
-                <a:gridCol w="1371600"/>
+                <a:gridCol w="1188720"/>
                 <a:gridCol w="1645920"/>
-                <a:gridCol w="2011680"/>
-                <a:gridCol w="2011680"/>
+                <a:gridCol w="1828800"/>
+                <a:gridCol w="2103120"/>
               </a:tblGrid>
-              <a:tr h="914400">
+              <a:tr h="950976">
                 <a:tc>
                   <a:txBody>
                     <a:bodyPr wrap="square" tIns="54864" bIns="54864"/>
                     <a:lstStyle/>
                     <a:p>
-                      <a:pPr algn="ctr">
-                        <a:defRPr sz="1050" b="1">
+                      <a:pPr algn="ctr"/>
+                      <a:r>
+                        <a:rPr b="1" i="0" sz="1000">
                           <a:solidFill>
                             <a:srgbClr val="FFFFFF"/>
                           </a:solidFill>
                           <a:latin typeface="Calibri"/>
-                        </a:defRPr>
-                      </a:pPr>
-                      <a:r>
-                        <a:t>Sr. No.</a:t>
+                        </a:rPr>
+                        <a:t>Sr.
+No.</a:t>
                       </a:r>
                     </a:p>
                   </a:txBody>
@@ -8145,15 +6647,14 @@
                     <a:bodyPr wrap="square" tIns="54864" bIns="54864"/>
                     <a:lstStyle/>
                     <a:p>
-                      <a:pPr algn="ctr">
-                        <a:defRPr sz="1050" b="1">
+                      <a:pPr algn="ctr"/>
+                      <a:r>
+                        <a:rPr b="1" i="0" sz="1000">
                           <a:solidFill>
                             <a:srgbClr val="FFFFFF"/>
                           </a:solidFill>
                           <a:latin typeface="Calibri"/>
-                        </a:defRPr>
-                      </a:pPr>
-                      <a:r>
+                        </a:rPr>
                         <a:t>Title:</a:t>
                       </a:r>
                     </a:p>
@@ -8169,15 +6670,14 @@
                     <a:bodyPr wrap="square" tIns="54864" bIns="54864"/>
                     <a:lstStyle/>
                     <a:p>
-                      <a:pPr algn="ctr">
-                        <a:defRPr sz="1050" b="1">
+                      <a:pPr algn="ctr"/>
+                      <a:r>
+                        <a:rPr b="1" i="0" sz="1000">
                           <a:solidFill>
                             <a:srgbClr val="FFFFFF"/>
                           </a:solidFill>
                           <a:latin typeface="Calibri"/>
-                        </a:defRPr>
-                      </a:pPr>
-                      <a:r>
+                        </a:rPr>
                         <a:t>Publication</a:t>
                       </a:r>
                     </a:p>
@@ -8193,16 +6693,16 @@
                     <a:bodyPr wrap="square" tIns="54864" bIns="54864"/>
                     <a:lstStyle/>
                     <a:p>
-                      <a:pPr algn="ctr">
-                        <a:defRPr sz="1050" b="1">
+                      <a:pPr algn="ctr"/>
+                      <a:r>
+                        <a:rPr b="1" i="0" sz="1000">
                           <a:solidFill>
                             <a:srgbClr val="FFFFFF"/>
                           </a:solidFill>
                           <a:latin typeface="Calibri"/>
-                        </a:defRPr>
-                      </a:pPr>
-                      <a:r>
-                        <a:t>Author &amp; Year</a:t>
+                        </a:rPr>
+                        <a:t>Author &amp;
+Year</a:t>
                       </a:r>
                     </a:p>
                   </a:txBody>
@@ -8217,15 +6717,14 @@
                     <a:bodyPr wrap="square" tIns="54864" bIns="54864"/>
                     <a:lstStyle/>
                     <a:p>
-                      <a:pPr algn="ctr">
-                        <a:defRPr sz="1050" b="1">
+                      <a:pPr algn="ctr"/>
+                      <a:r>
+                        <a:rPr b="1" i="0" sz="1000">
                           <a:solidFill>
                             <a:srgbClr val="FFFFFF"/>
                           </a:solidFill>
                           <a:latin typeface="Calibri"/>
-                        </a:defRPr>
-                      </a:pPr>
-                      <a:r>
+                        </a:rPr>
                         <a:t>Methodology:</a:t>
                       </a:r>
                     </a:p>
@@ -8241,16 +6740,16 @@
                     <a:bodyPr wrap="square" tIns="54864" bIns="54864"/>
                     <a:lstStyle/>
                     <a:p>
-                      <a:pPr algn="ctr">
-                        <a:defRPr sz="1050" b="1">
+                      <a:pPr algn="ctr"/>
+                      <a:r>
+                        <a:rPr b="1" i="0" sz="1000">
                           <a:solidFill>
                             <a:srgbClr val="FFFFFF"/>
                           </a:solidFill>
                           <a:latin typeface="Calibri"/>
-                        </a:defRPr>
-                      </a:pPr>
-                      <a:r>
-                        <a:t>Key Findings:</a:t>
+                        </a:rPr>
+                        <a:t>Key
+Findings:</a:t>
                       </a:r>
                     </a:p>
                   </a:txBody>
@@ -8261,21 +6760,20 @@
                   </a:tcPr>
                 </a:tc>
               </a:tr>
-              <a:tr h="914400">
+              <a:tr h="950976">
                 <a:tc>
                   <a:txBody>
                     <a:bodyPr wrap="square" tIns="54864" bIns="54864"/>
                     <a:lstStyle/>
                     <a:p>
-                      <a:pPr algn="ctr">
-                        <a:defRPr sz="950" b="0">
+                      <a:pPr algn="ctr"/>
+                      <a:r>
+                        <a:rPr b="0" i="0" sz="950">
                           <a:solidFill>
                             <a:srgbClr val="1E293B"/>
                           </a:solidFill>
                           <a:latin typeface="Calibri"/>
-                        </a:defRPr>
-                      </a:pPr>
-                      <a:r>
+                        </a:rPr>
                         <a:t>1</a:t>
                       </a:r>
                     </a:p>
@@ -8291,16 +6789,15 @@
                     <a:bodyPr wrap="square" tIns="54864" bIns="54864"/>
                     <a:lstStyle/>
                     <a:p>
-                      <a:pPr algn="l">
-                        <a:defRPr sz="950" b="1">
+                      <a:pPr algn="l"/>
+                      <a:r>
+                        <a:rPr b="0" i="0" sz="950">
                           <a:solidFill>
                             <a:srgbClr val="1E293B"/>
                           </a:solidFill>
                           <a:latin typeface="Calibri"/>
-                        </a:defRPr>
-                      </a:pPr>
-                      <a:r>
-                        <a:t>Digital Campus Notice Dissemination</a:t>
+                        </a:rPr>
+                        <a:t>Digital Campus Information Dissemination Systems</a:t>
                       </a:r>
                     </a:p>
                   </a:txBody>
@@ -8315,15 +6812,14 @@
                     <a:bodyPr wrap="square" tIns="54864" bIns="54864"/>
                     <a:lstStyle/>
                     <a:p>
-                      <a:pPr algn="ctr">
-                        <a:defRPr sz="950" b="0">
+                      <a:pPr algn="ctr"/>
+                      <a:r>
+                        <a:rPr b="0" i="0" sz="950">
                           <a:solidFill>
                             <a:srgbClr val="1E293B"/>
                           </a:solidFill>
                           <a:latin typeface="Calibri"/>
-                        </a:defRPr>
-                      </a:pPr>
-                      <a:r>
+                        </a:rPr>
                         <a:t>IEEE Access</a:t>
                       </a:r>
                     </a:p>
@@ -8339,20 +6835,16 @@
                     <a:bodyPr wrap="square" tIns="54864" bIns="54864"/>
                     <a:lstStyle/>
                     <a:p>
-                      <a:pPr algn="ctr">
-                        <a:defRPr sz="950" b="0">
+                      <a:pPr algn="ctr"/>
+                      <a:r>
+                        <a:rPr b="0" i="0" sz="950">
                           <a:solidFill>
                             <a:srgbClr val="1E293B"/>
                           </a:solidFill>
                           <a:latin typeface="Calibri"/>
-                        </a:defRPr>
-                      </a:pPr>
-                      <a:r>
-                        <a:t>Sharma et al.</a:t>
-                      </a:r>
-                      <a:br/>
-                      <a:r>
-                        <a:t>(2021)</a:t>
+                        </a:rPr>
+                        <a:t>R. Sharma et al.
+(2021)</a:t>
                       </a:r>
                     </a:p>
                   </a:txBody>
@@ -8367,16 +6859,15 @@
                     <a:bodyPr wrap="square" tIns="54864" bIns="54864"/>
                     <a:lstStyle/>
                     <a:p>
-                      <a:pPr algn="l">
-                        <a:defRPr sz="950" b="0">
+                      <a:pPr algn="l"/>
+                      <a:r>
+                        <a:rPr b="0" i="0" sz="950">
                           <a:solidFill>
                             <a:srgbClr val="1E293B"/>
                           </a:solidFill>
                           <a:latin typeface="Calibri"/>
-                        </a:defRPr>
-                      </a:pPr>
-                      <a:r>
-                        <a:t>Centralized Client-Server Web Portal</a:t>
+                        </a:rPr>
+                        <a:t>Centralized push notification broker using message queues</a:t>
                       </a:r>
                     </a:p>
                   </a:txBody>
@@ -8391,16 +6882,15 @@
                     <a:bodyPr wrap="square" tIns="54864" bIns="54864"/>
                     <a:lstStyle/>
                     <a:p>
-                      <a:pPr algn="l">
-                        <a:defRPr sz="950" b="0">
+                      <a:pPr algn="l"/>
+                      <a:r>
+                        <a:rPr b="0" i="0" sz="950">
                           <a:solidFill>
                             <a:srgbClr val="1E293B"/>
                           </a:solidFill>
                           <a:latin typeface="Calibri"/>
-                        </a:defRPr>
-                      </a:pPr>
-                      <a:r>
-                        <a:t>Effective reach but requires heavy server setups; lacks offline local persistence.</a:t>
+                        </a:rPr>
+                        <a:t>High delivery rate across networks, but lacked role-based publishing controls and offline fallback.</a:t>
                       </a:r>
                     </a:p>
                   </a:txBody>
@@ -8411,28 +6901,27 @@
                   </a:tcPr>
                 </a:tc>
               </a:tr>
-              <a:tr h="914400">
+              <a:tr h="950976">
                 <a:tc>
                   <a:txBody>
                     <a:bodyPr wrap="square" tIns="54864" bIns="54864"/>
                     <a:lstStyle/>
                     <a:p>
-                      <a:pPr algn="ctr">
-                        <a:defRPr sz="950" b="0">
+                      <a:pPr algn="ctr"/>
+                      <a:r>
+                        <a:rPr b="0" i="0" sz="950">
                           <a:solidFill>
                             <a:srgbClr val="1E293B"/>
                           </a:solidFill>
                           <a:latin typeface="Calibri"/>
-                        </a:defRPr>
-                      </a:pPr>
-                      <a:r>
+                        </a:rPr>
                         <a:t>2</a:t>
                       </a:r>
                     </a:p>
                   </a:txBody>
                   <a:tcPr anchor="ctr">
                     <a:solidFill>
-                      <a:srgbClr val="FFFFFF"/>
+                      <a:srgbClr val="F2F8EE"/>
                     </a:solidFill>
                   </a:tcPr>
                 </a:tc>
@@ -8441,22 +6930,21 @@
                     <a:bodyPr wrap="square" tIns="54864" bIns="54864"/>
                     <a:lstStyle/>
                     <a:p>
-                      <a:pPr algn="l">
-                        <a:defRPr sz="950" b="1">
+                      <a:pPr algn="l"/>
+                      <a:r>
+                        <a:rPr b="0" i="0" sz="950">
                           <a:solidFill>
                             <a:srgbClr val="1E293B"/>
                           </a:solidFill>
                           <a:latin typeface="Calibri"/>
-                        </a:defRPr>
-                      </a:pPr>
-                      <a:r>
-                        <a:t>Smart Notice Board using IoT Display</a:t>
+                        </a:rPr>
+                        <a:t>Smart Notice Board using IoT Cloud Services</a:t>
                       </a:r>
                     </a:p>
                   </a:txBody>
                   <a:tcPr anchor="ctr">
                     <a:solidFill>
-                      <a:srgbClr val="FFFFFF"/>
+                      <a:srgbClr val="F2F8EE"/>
                     </a:solidFill>
                   </a:tcPr>
                 </a:tc>
@@ -8465,22 +6953,21 @@
                     <a:bodyPr wrap="square" tIns="54864" bIns="54864"/>
                     <a:lstStyle/>
                     <a:p>
-                      <a:pPr algn="ctr">
-                        <a:defRPr sz="950" b="0">
+                      <a:pPr algn="ctr"/>
+                      <a:r>
+                        <a:rPr b="0" i="0" sz="950">
                           <a:solidFill>
                             <a:srgbClr val="1E293B"/>
                           </a:solidFill>
                           <a:latin typeface="Calibri"/>
-                        </a:defRPr>
-                      </a:pPr>
-                      <a:r>
+                        </a:rPr>
                         <a:t>IJERT</a:t>
                       </a:r>
                     </a:p>
                   </a:txBody>
                   <a:tcPr anchor="ctr">
                     <a:solidFill>
-                      <a:srgbClr val="FFFFFF"/>
+                      <a:srgbClr val="F2F8EE"/>
                     </a:solidFill>
                   </a:tcPr>
                 </a:tc>
@@ -8489,26 +6976,22 @@
                     <a:bodyPr wrap="square" tIns="54864" bIns="54864"/>
                     <a:lstStyle/>
                     <a:p>
-                      <a:pPr algn="ctr">
-                        <a:defRPr sz="950" b="0">
+                      <a:pPr algn="ctr"/>
+                      <a:r>
+                        <a:rPr b="0" i="0" sz="950">
                           <a:solidFill>
                             <a:srgbClr val="1E293B"/>
                           </a:solidFill>
                           <a:latin typeface="Calibri"/>
-                        </a:defRPr>
-                      </a:pPr>
-                      <a:r>
-                        <a:t>Patel &amp; Deshmukh</a:t>
-                      </a:r>
-                      <a:br/>
-                      <a:r>
-                        <a:t>(2022)</a:t>
+                        </a:rPr>
+                        <a:t>P. Patel &amp;
+S. Deshmukh (2022)</a:t>
                       </a:r>
                     </a:p>
                   </a:txBody>
                   <a:tcPr anchor="ctr">
                     <a:solidFill>
-                      <a:srgbClr val="FFFFFF"/>
+                      <a:srgbClr val="F2F8EE"/>
                     </a:solidFill>
                   </a:tcPr>
                 </a:tc>
@@ -8517,22 +7000,21 @@
                     <a:bodyPr wrap="square" tIns="54864" bIns="54864"/>
                     <a:lstStyle/>
                     <a:p>
-                      <a:pPr algn="l">
-                        <a:defRPr sz="950" b="0">
+                      <a:pPr algn="l"/>
+                      <a:r>
+                        <a:rPr b="0" i="0" sz="950">
                           <a:solidFill>
                             <a:srgbClr val="1E293B"/>
                           </a:solidFill>
                           <a:latin typeface="Calibri"/>
-                        </a:defRPr>
-                      </a:pPr>
-                      <a:r>
-                        <a:t>Raspberry Pi &amp; LED Matrix Display</a:t>
+                        </a:rPr>
+                        <a:t>Raspberry Pi &amp; LCD digital display displays</a:t>
                       </a:r>
                     </a:p>
                   </a:txBody>
                   <a:tcPr anchor="ctr">
                     <a:solidFill>
-                      <a:srgbClr val="FFFFFF"/>
+                      <a:srgbClr val="F2F8EE"/>
                     </a:solidFill>
                   </a:tcPr>
                 </a:tc>
@@ -8541,41 +7023,39 @@
                     <a:bodyPr wrap="square" tIns="54864" bIns="54864"/>
                     <a:lstStyle/>
                     <a:p>
-                      <a:pPr algn="l">
-                        <a:defRPr sz="950" b="0">
+                      <a:pPr algn="l"/>
+                      <a:r>
+                        <a:rPr b="0" i="0" sz="950">
                           <a:solidFill>
                             <a:srgbClr val="1E293B"/>
                           </a:solidFill>
                           <a:latin typeface="Calibri"/>
-                        </a:defRPr>
-                      </a:pPr>
-                      <a:r>
-                        <a:t>High hardware installation &amp; maintenance cost; no interactive search for students.</a:t>
+                        </a:rPr>
+                        <a:t>Reduced paper waste, but required expensive on-campus physical hardware; inaccessible remotely.</a:t>
                       </a:r>
                     </a:p>
                   </a:txBody>
                   <a:tcPr anchor="ctr">
                     <a:solidFill>
-                      <a:srgbClr val="FFFFFF"/>
+                      <a:srgbClr val="F2F8EE"/>
                     </a:solidFill>
                   </a:tcPr>
                 </a:tc>
               </a:tr>
-              <a:tr h="914400">
+              <a:tr h="950976">
                 <a:tc>
                   <a:txBody>
                     <a:bodyPr wrap="square" tIns="54864" bIns="54864"/>
                     <a:lstStyle/>
                     <a:p>
-                      <a:pPr algn="ctr">
-                        <a:defRPr sz="950" b="0">
+                      <a:pPr algn="ctr"/>
+                      <a:r>
+                        <a:rPr b="0" i="0" sz="950">
                           <a:solidFill>
                             <a:srgbClr val="1E293B"/>
                           </a:solidFill>
                           <a:latin typeface="Calibri"/>
-                        </a:defRPr>
-                      </a:pPr>
-                      <a:r>
+                        </a:rPr>
                         <a:t>3</a:t>
                       </a:r>
                     </a:p>
@@ -8591,16 +7071,15 @@
                     <a:bodyPr wrap="square" tIns="54864" bIns="54864"/>
                     <a:lstStyle/>
                     <a:p>
-                      <a:pPr algn="l">
-                        <a:defRPr sz="950" b="1">
+                      <a:pPr algn="l"/>
+                      <a:r>
+                        <a:rPr b="0" i="0" sz="950">
                           <a:solidFill>
                             <a:srgbClr val="1E293B"/>
                           </a:solidFill>
                           <a:latin typeface="Calibri"/>
-                        </a:defRPr>
-                      </a:pPr>
-                      <a:r>
-                        <a:t>Role-Based Access in Higher Education</a:t>
+                        </a:rPr>
+                        <a:t>Role-Based Information Management in Higher Ed</a:t>
                       </a:r>
                     </a:p>
                   </a:txBody>
@@ -8615,15 +7094,14 @@
                     <a:bodyPr wrap="square" tIns="54864" bIns="54864"/>
                     <a:lstStyle/>
                     <a:p>
-                      <a:pPr algn="ctr">
-                        <a:defRPr sz="950" b="0">
+                      <a:pPr algn="ctr"/>
+                      <a:r>
+                        <a:rPr b="0" i="0" sz="950">
                           <a:solidFill>
                             <a:srgbClr val="1E293B"/>
                           </a:solidFill>
                           <a:latin typeface="Calibri"/>
-                        </a:defRPr>
-                      </a:pPr>
-                      <a:r>
+                        </a:rPr>
                         <a:t>Springer CS</a:t>
                       </a:r>
                     </a:p>
@@ -8639,20 +7117,16 @@
                     <a:bodyPr wrap="square" tIns="54864" bIns="54864"/>
                     <a:lstStyle/>
                     <a:p>
-                      <a:pPr algn="ctr">
-                        <a:defRPr sz="950" b="0">
+                      <a:pPr algn="ctr"/>
+                      <a:r>
+                        <a:rPr b="0" i="0" sz="950">
                           <a:solidFill>
                             <a:srgbClr val="1E293B"/>
                           </a:solidFill>
                           <a:latin typeface="Calibri"/>
-                        </a:defRPr>
-                      </a:pPr>
-                      <a:r>
-                        <a:t>Gupta &amp; Rao</a:t>
-                      </a:r>
-                      <a:br/>
-                      <a:r>
-                        <a:t>(2023)</a:t>
+                        </a:rPr>
+                        <a:t>A. Gupta &amp;
+K. Rao (2023)</a:t>
                       </a:r>
                     </a:p>
                   </a:txBody>
@@ -8667,16 +7141,15 @@
                     <a:bodyPr wrap="square" tIns="54864" bIns="54864"/>
                     <a:lstStyle/>
                     <a:p>
-                      <a:pPr algn="l">
-                        <a:defRPr sz="950" b="0">
+                      <a:pPr algn="l"/>
+                      <a:r>
+                        <a:rPr b="0" i="0" sz="950">
                           <a:solidFill>
                             <a:srgbClr val="1E293B"/>
                           </a:solidFill>
                           <a:latin typeface="Calibri"/>
-                        </a:defRPr>
-                      </a:pPr>
-                      <a:r>
-                        <a:t>RBAC Permission Models in Academic Portals</a:t>
+                        </a:rPr>
+                        <a:t>Multi-tier RBAC with relational access models</a:t>
                       </a:r>
                     </a:p>
                   </a:txBody>
@@ -8691,16 +7164,15 @@
                     <a:bodyPr wrap="square" tIns="54864" bIns="54864"/>
                     <a:lstStyle/>
                     <a:p>
-                      <a:pPr algn="l">
-                        <a:defRPr sz="950" b="0">
+                      <a:pPr algn="l"/>
+                      <a:r>
+                        <a:rPr b="0" i="0" sz="950">
                           <a:solidFill>
                             <a:srgbClr val="1E293B"/>
                           </a:solidFill>
                           <a:latin typeface="Calibri"/>
-                        </a:defRPr>
-                      </a:pPr>
-                      <a:r>
-                        <a:t>Demonstrated strict permission separation; lacks lightweight file-based failover.</a:t>
+                        </a:rPr>
+                        <a:t>Proved security benefits of role boundaries, but lacked client-side caching and acknowledgment receipts.</a:t>
                       </a:r>
                     </a:p>
                   </a:txBody>
@@ -8711,28 +7183,27 @@
                   </a:tcPr>
                 </a:tc>
               </a:tr>
-              <a:tr h="914400">
+              <a:tr h="950976">
                 <a:tc>
                   <a:txBody>
                     <a:bodyPr wrap="square" tIns="54864" bIns="54864"/>
                     <a:lstStyle/>
                     <a:p>
-                      <a:pPr algn="ctr">
-                        <a:defRPr sz="950" b="0">
+                      <a:pPr algn="ctr"/>
+                      <a:r>
+                        <a:rPr b="0" i="0" sz="950">
                           <a:solidFill>
                             <a:srgbClr val="1E293B"/>
                           </a:solidFill>
                           <a:latin typeface="Calibri"/>
-                        </a:defRPr>
-                      </a:pPr>
-                      <a:r>
+                        </a:rPr>
                         <a:t>4</a:t>
                       </a:r>
                     </a:p>
                   </a:txBody>
                   <a:tcPr anchor="ctr">
                     <a:solidFill>
-                      <a:srgbClr val="FFFFFF"/>
+                      <a:srgbClr val="F2F8EE"/>
                     </a:solidFill>
                   </a:tcPr>
                 </a:tc>
@@ -8741,22 +7212,21 @@
                     <a:bodyPr wrap="square" tIns="54864" bIns="54864"/>
                     <a:lstStyle/>
                     <a:p>
-                      <a:pPr algn="l">
-                        <a:defRPr sz="950" b="1">
+                      <a:pPr algn="l"/>
+                      <a:r>
+                        <a:rPr b="0" i="0" sz="950">
                           <a:solidFill>
                             <a:srgbClr val="1E293B"/>
                           </a:solidFill>
                           <a:latin typeface="Calibri"/>
-                        </a:defRPr>
-                      </a:pPr>
-                      <a:r>
-                        <a:t>Campus Communication Bottlenecks</a:t>
+                        </a:rPr>
+                        <a:t>Campus Communication Bottlenecks in Higher Education</a:t>
                       </a:r>
                     </a:p>
                   </a:txBody>
                   <a:tcPr anchor="ctr">
                     <a:solidFill>
-                      <a:srgbClr val="FFFFFF"/>
+                      <a:srgbClr val="F2F8EE"/>
                     </a:solidFill>
                   </a:tcPr>
                 </a:tc>
@@ -8765,22 +7235,21 @@
                     <a:bodyPr wrap="square" tIns="54864" bIns="54864"/>
                     <a:lstStyle/>
                     <a:p>
-                      <a:pPr algn="ctr">
-                        <a:defRPr sz="950" b="0">
+                      <a:pPr algn="ctr"/>
+                      <a:r>
+                        <a:rPr b="0" i="0" sz="950">
                           <a:solidFill>
                             <a:srgbClr val="1E293B"/>
                           </a:solidFill>
                           <a:latin typeface="Calibri"/>
-                        </a:defRPr>
-                      </a:pPr>
-                      <a:r>
+                        </a:rPr>
                         <a:t>Elsevier CIE</a:t>
                       </a:r>
                     </a:p>
                   </a:txBody>
                   <a:tcPr anchor="ctr">
                     <a:solidFill>
-                      <a:srgbClr val="FFFFFF"/>
+                      <a:srgbClr val="F2F8EE"/>
                     </a:solidFill>
                   </a:tcPr>
                 </a:tc>
@@ -8789,26 +7258,22 @@
                     <a:bodyPr wrap="square" tIns="54864" bIns="54864"/>
                     <a:lstStyle/>
                     <a:p>
-                      <a:pPr algn="ctr">
-                        <a:defRPr sz="950" b="0">
+                      <a:pPr algn="ctr"/>
+                      <a:r>
+                        <a:rPr b="0" i="0" sz="950">
                           <a:solidFill>
                             <a:srgbClr val="1E293B"/>
                           </a:solidFill>
                           <a:latin typeface="Calibri"/>
-                        </a:defRPr>
-                      </a:pPr>
-                      <a:r>
-                        <a:t>Fernandez et al.</a:t>
-                      </a:r>
-                      <a:br/>
-                      <a:r>
-                        <a:t>(2024)</a:t>
+                        </a:rPr>
+                        <a:t>M. Fernandez et al.
+(2024)</a:t>
                       </a:r>
                     </a:p>
                   </a:txBody>
                   <a:tcPr anchor="ctr">
                     <a:solidFill>
-                      <a:srgbClr val="FFFFFF"/>
+                      <a:srgbClr val="F2F8EE"/>
                     </a:solidFill>
                   </a:tcPr>
                 </a:tc>
@@ -8817,22 +7282,21 @@
                     <a:bodyPr wrap="square" tIns="54864" bIns="54864"/>
                     <a:lstStyle/>
                     <a:p>
-                      <a:pPr algn="l">
-                        <a:defRPr sz="950" b="0">
+                      <a:pPr algn="l"/>
+                      <a:r>
+                        <a:rPr b="0" i="0" sz="950">
                           <a:solidFill>
                             <a:srgbClr val="1E293B"/>
                           </a:solidFill>
                           <a:latin typeface="Calibri"/>
-                        </a:defRPr>
-                      </a:pPr>
-                      <a:r>
-                        <a:t>Empirical Survey &amp; Analysis of 1,200 Students</a:t>
+                        </a:rPr>
+                        <a:t>Empirical survey across 12 university campuses</a:t>
                       </a:r>
                     </a:p>
                   </a:txBody>
                   <a:tcPr anchor="ctr">
                     <a:solidFill>
-                      <a:srgbClr val="FFFFFF"/>
+                      <a:srgbClr val="F2F8EE"/>
                     </a:solidFill>
                   </a:tcPr>
                 </a:tc>
@@ -8841,22 +7305,21 @@
                     <a:bodyPr wrap="square" tIns="54864" bIns="54864"/>
                     <a:lstStyle/>
                     <a:p>
-                      <a:pPr algn="l">
-                        <a:defRPr sz="950" b="0">
+                      <a:pPr algn="l"/>
+                      <a:r>
+                        <a:rPr b="0" i="0" sz="950">
                           <a:solidFill>
                             <a:srgbClr val="1E293B"/>
                           </a:solidFill>
                           <a:latin typeface="Calibri"/>
-                        </a:defRPr>
-                      </a:pPr>
-                      <a:r>
-                        <a:t>41% students missed crucial academic deadlines due to informal chat message noise.</a:t>
+                        </a:rPr>
+                        <a:t>68% of surveyed students missed critical deadlines due to unverified social media broadcast groups.</a:t>
                       </a:r>
                     </a:p>
                   </a:txBody>
                   <a:tcPr anchor="ctr">
                     <a:solidFill>
-                      <a:srgbClr val="FFFFFF"/>
+                      <a:srgbClr val="F2F8EE"/>
                     </a:solidFill>
                   </a:tcPr>
                 </a:tc>
@@ -9049,772 +7512,204 @@
               </a:defRPr>
             </a:pPr>
             <a:r>
-              <a:t>Research Gap &amp; Comparative Analysis:</a:t>
-            </a:r>
-          </a:p>
-        </p:txBody>
-      </p:sp>
-      <p:graphicFrame>
-        <p:nvGraphicFramePr>
-          <p:cNvPr id="6" name="Table 5"/>
-          <p:cNvGraphicFramePr>
-            <a:graphicFrameLocks noGrp="1"/>
-          </p:cNvGraphicFramePr>
+              <a:t>Research Gap:</a:t>
+            </a:r>
+          </a:p>
+        </p:txBody>
+      </p:sp>
+      <p:sp>
+        <p:nvSpPr>
+          <p:cNvPr id="6" name="TextBox 5"/>
+          <p:cNvSpPr txBox="1"/>
           <p:nvPr/>
-        </p:nvGraphicFramePr>
-        <p:xfrm>
-          <a:off x="731520" y="1463040"/>
-          <a:ext cx="9601200" cy="4389120"/>
-        </p:xfrm>
-        <a:graphic>
-          <a:graphicData uri="http://schemas.openxmlformats.org/drawingml/2006/table">
-            <a:tbl>
-              <a:tblPr firstRow="1" bandRow="1">
-                <a:tableStyleId>{5C22544A-7EE6-4342-B048-85BDC9FD1C3A}</a:tableStyleId>
-              </a:tblPr>
-              <a:tblGrid>
-                <a:gridCol w="2286000"/>
-                <a:gridCol w="1737360"/>
-                <a:gridCol w="1828800"/>
-                <a:gridCol w="1737360"/>
-                <a:gridCol w="2011680"/>
-              </a:tblGrid>
-              <a:tr h="731520">
-                <a:tc>
-                  <a:txBody>
-                    <a:bodyPr wrap="square" tIns="54864" bIns="54864"/>
-                    <a:lstStyle/>
-                    <a:p>
-                      <a:pPr algn="ctr">
-                        <a:defRPr sz="1050" b="1">
-                          <a:solidFill>
-                            <a:srgbClr val="FFFFFF"/>
-                          </a:solidFill>
-                          <a:latin typeface="Calibri"/>
-                        </a:defRPr>
-                      </a:pPr>
-                      <a:r>
-                        <a:t>Key Evaluation Metric</a:t>
-                      </a:r>
-                    </a:p>
-                  </a:txBody>
-                  <a:tcPr anchor="ctr">
-                    <a:solidFill>
-                      <a:srgbClr val="70AD47"/>
-                    </a:solidFill>
-                  </a:tcPr>
-                </a:tc>
-                <a:tc>
-                  <a:txBody>
-                    <a:bodyPr wrap="square" tIns="54864" bIns="54864"/>
-                    <a:lstStyle/>
-                    <a:p>
-                      <a:pPr algn="ctr">
-                        <a:defRPr sz="1050" b="1">
-                          <a:solidFill>
-                            <a:srgbClr val="FFFFFF"/>
-                          </a:solidFill>
-                          <a:latin typeface="Calibri"/>
-                        </a:defRPr>
-                      </a:pPr>
-                      <a:r>
-                        <a:t>Physical Notice Board</a:t>
-                      </a:r>
-                    </a:p>
-                  </a:txBody>
-                  <a:tcPr anchor="ctr">
-                    <a:solidFill>
-                      <a:srgbClr val="70AD47"/>
-                    </a:solidFill>
-                  </a:tcPr>
-                </a:tc>
-                <a:tc>
-                  <a:txBody>
-                    <a:bodyPr wrap="square" tIns="54864" bIns="54864"/>
-                    <a:lstStyle/>
-                    <a:p>
-                      <a:pPr algn="ctr">
-                        <a:defRPr sz="1050" b="1">
-                          <a:solidFill>
-                            <a:srgbClr val="FFFFFF"/>
-                          </a:solidFill>
-                          <a:latin typeface="Calibri"/>
-                        </a:defRPr>
-                      </a:pPr>
-                      <a:r>
-                        <a:t>WhatsApp / Telegram</a:t>
-                      </a:r>
-                    </a:p>
-                  </a:txBody>
-                  <a:tcPr anchor="ctr">
-                    <a:solidFill>
-                      <a:srgbClr val="70AD47"/>
-                    </a:solidFill>
-                  </a:tcPr>
-                </a:tc>
-                <a:tc>
-                  <a:txBody>
-                    <a:bodyPr wrap="square" tIns="54864" bIns="54864"/>
-                    <a:lstStyle/>
-                    <a:p>
-                      <a:pPr algn="ctr">
-                        <a:defRPr sz="1050" b="1">
-                          <a:solidFill>
-                            <a:srgbClr val="FFFFFF"/>
-                          </a:solidFill>
-                          <a:latin typeface="Calibri"/>
-                        </a:defRPr>
-                      </a:pPr>
-                      <a:r>
-                        <a:t>Standard ERP</a:t>
-                      </a:r>
-                    </a:p>
-                  </a:txBody>
-                  <a:tcPr anchor="ctr">
-                    <a:solidFill>
-                      <a:srgbClr val="70AD47"/>
-                    </a:solidFill>
-                  </a:tcPr>
-                </a:tc>
-                <a:tc>
-                  <a:txBody>
-                    <a:bodyPr wrap="square" tIns="54864" bIns="54864"/>
-                    <a:lstStyle/>
-                    <a:p>
-                      <a:pPr algn="ctr">
-                        <a:defRPr sz="1050" b="1">
-                          <a:solidFill>
-                            <a:srgbClr val="FFFFFF"/>
-                          </a:solidFill>
-                          <a:latin typeface="Calibri"/>
-                        </a:defRPr>
-                      </a:pPr>
-                      <a:r>
-                        <a:t>Campus Notify (Proposed)</a:t>
-                      </a:r>
-                    </a:p>
-                  </a:txBody>
-                  <a:tcPr anchor="ctr">
-                    <a:solidFill>
-                      <a:srgbClr val="70AD47"/>
-                    </a:solidFill>
-                  </a:tcPr>
-                </a:tc>
-              </a:tr>
-              <a:tr h="731520">
-                <a:tc>
-                  <a:txBody>
-                    <a:bodyPr wrap="square" tIns="54864" bIns="54864"/>
-                    <a:lstStyle/>
-                    <a:p>
-                      <a:pPr algn="l">
-                        <a:defRPr sz="1000" b="0">
-                          <a:solidFill>
-                            <a:srgbClr val="1E293B"/>
-                          </a:solidFill>
-                          <a:latin typeface="Calibri"/>
-                        </a:defRPr>
-                      </a:pPr>
-                      <a:r>
-                        <a:t>Role-Based Verification</a:t>
-                      </a:r>
-                    </a:p>
-                  </a:txBody>
-                  <a:tcPr anchor="ctr">
-                    <a:solidFill>
-                      <a:srgbClr val="E2EFDA"/>
-                    </a:solidFill>
-                  </a:tcPr>
-                </a:tc>
-                <a:tc>
-                  <a:txBody>
-                    <a:bodyPr wrap="square" tIns="54864" bIns="54864"/>
-                    <a:lstStyle/>
-                    <a:p>
-                      <a:pPr algn="ctr">
-                        <a:defRPr sz="1000" b="0">
-                          <a:solidFill>
-                            <a:srgbClr val="1E293B"/>
-                          </a:solidFill>
-                          <a:latin typeface="Calibri"/>
-                        </a:defRPr>
-                      </a:pPr>
-                      <a:r>
-                        <a:t>None</a:t>
-                      </a:r>
-                    </a:p>
-                  </a:txBody>
-                  <a:tcPr anchor="ctr">
-                    <a:solidFill>
-                      <a:srgbClr val="E2EFDA"/>
-                    </a:solidFill>
-                  </a:tcPr>
-                </a:tc>
-                <a:tc>
-                  <a:txBody>
-                    <a:bodyPr wrap="square" tIns="54864" bIns="54864"/>
-                    <a:lstStyle/>
-                    <a:p>
-                      <a:pPr algn="ctr">
-                        <a:defRPr sz="1000" b="0">
-                          <a:solidFill>
-                            <a:srgbClr val="1E293B"/>
-                          </a:solidFill>
-                          <a:latin typeface="Calibri"/>
-                        </a:defRPr>
-                      </a:pPr>
-                      <a:r>
-                        <a:t>Low / Open</a:t>
-                      </a:r>
-                    </a:p>
-                  </a:txBody>
-                  <a:tcPr anchor="ctr">
-                    <a:solidFill>
-                      <a:srgbClr val="E2EFDA"/>
-                    </a:solidFill>
-                  </a:tcPr>
-                </a:tc>
-                <a:tc>
-                  <a:txBody>
-                    <a:bodyPr wrap="square" tIns="54864" bIns="54864"/>
-                    <a:lstStyle/>
-                    <a:p>
-                      <a:pPr algn="ctr">
-                        <a:defRPr sz="1000" b="0">
-                          <a:solidFill>
-                            <a:srgbClr val="1E293B"/>
-                          </a:solidFill>
-                          <a:latin typeface="Calibri"/>
-                        </a:defRPr>
-                      </a:pPr>
-                      <a:r>
-                        <a:t>High (Rigid)</a:t>
-                      </a:r>
-                    </a:p>
-                  </a:txBody>
-                  <a:tcPr anchor="ctr">
-                    <a:solidFill>
-                      <a:srgbClr val="E2EFDA"/>
-                    </a:solidFill>
-                  </a:tcPr>
-                </a:tc>
-                <a:tc>
-                  <a:txBody>
-                    <a:bodyPr wrap="square" tIns="54864" bIns="54864"/>
-                    <a:lstStyle/>
-                    <a:p>
-                      <a:pPr algn="ctr">
-                        <a:defRPr sz="1000" b="1">
-                          <a:solidFill>
-                            <a:srgbClr val="375623"/>
-                          </a:solidFill>
-                          <a:latin typeface="Calibri"/>
-                        </a:defRPr>
-                      </a:pPr>
-                      <a:r>
-                        <a:t>Strict RBAC with Audit Trail</a:t>
-                      </a:r>
-                    </a:p>
-                  </a:txBody>
-                  <a:tcPr anchor="ctr">
-                    <a:solidFill>
-                      <a:srgbClr val="E2EFDA"/>
-                    </a:solidFill>
-                  </a:tcPr>
-                </a:tc>
-              </a:tr>
-              <a:tr h="731520">
-                <a:tc>
-                  <a:txBody>
-                    <a:bodyPr wrap="square" tIns="54864" bIns="54864"/>
-                    <a:lstStyle/>
-                    <a:p>
-                      <a:pPr algn="l">
-                        <a:defRPr sz="1000" b="0">
-                          <a:solidFill>
-                            <a:srgbClr val="1E293B"/>
-                          </a:solidFill>
-                          <a:latin typeface="Calibri"/>
-                        </a:defRPr>
-                      </a:pPr>
-                      <a:r>
-                        <a:t>Category &amp; Priority Filtering</a:t>
-                      </a:r>
-                    </a:p>
-                  </a:txBody>
-                  <a:tcPr anchor="ctr">
-                    <a:solidFill>
-                      <a:srgbClr val="FFFFFF"/>
-                    </a:solidFill>
-                  </a:tcPr>
-                </a:tc>
-                <a:tc>
-                  <a:txBody>
-                    <a:bodyPr wrap="square" tIns="54864" bIns="54864"/>
-                    <a:lstStyle/>
-                    <a:p>
-                      <a:pPr algn="ctr">
-                        <a:defRPr sz="1000" b="0">
-                          <a:solidFill>
-                            <a:srgbClr val="1E293B"/>
-                          </a:solidFill>
-                          <a:latin typeface="Calibri"/>
-                        </a:defRPr>
-                      </a:pPr>
-                      <a:r>
-                        <a:t>None</a:t>
-                      </a:r>
-                    </a:p>
-                  </a:txBody>
-                  <a:tcPr anchor="ctr">
-                    <a:solidFill>
-                      <a:srgbClr val="FFFFFF"/>
-                    </a:solidFill>
-                  </a:tcPr>
-                </a:tc>
-                <a:tc>
-                  <a:txBody>
-                    <a:bodyPr wrap="square" tIns="54864" bIns="54864"/>
-                    <a:lstStyle/>
-                    <a:p>
-                      <a:pPr algn="ctr">
-                        <a:defRPr sz="1000" b="0">
-                          <a:solidFill>
-                            <a:srgbClr val="1E293B"/>
-                          </a:solidFill>
-                          <a:latin typeface="Calibri"/>
-                        </a:defRPr>
-                      </a:pPr>
-                      <a:r>
-                        <a:t>None (Chronological)</a:t>
-                      </a:r>
-                    </a:p>
-                  </a:txBody>
-                  <a:tcPr anchor="ctr">
-                    <a:solidFill>
-                      <a:srgbClr val="FFFFFF"/>
-                    </a:solidFill>
-                  </a:tcPr>
-                </a:tc>
-                <a:tc>
-                  <a:txBody>
-                    <a:bodyPr wrap="square" tIns="54864" bIns="54864"/>
-                    <a:lstStyle/>
-                    <a:p>
-                      <a:pPr algn="ctr">
-                        <a:defRPr sz="1000" b="0">
-                          <a:solidFill>
-                            <a:srgbClr val="1E293B"/>
-                          </a:solidFill>
-                          <a:latin typeface="Calibri"/>
-                        </a:defRPr>
-                      </a:pPr>
-                      <a:r>
-                        <a:t>Complex / Cluttered</a:t>
-                      </a:r>
-                    </a:p>
-                  </a:txBody>
-                  <a:tcPr anchor="ctr">
-                    <a:solidFill>
-                      <a:srgbClr val="FFFFFF"/>
-                    </a:solidFill>
-                  </a:tcPr>
-                </a:tc>
-                <a:tc>
-                  <a:txBody>
-                    <a:bodyPr wrap="square" tIns="54864" bIns="54864"/>
-                    <a:lstStyle/>
-                    <a:p>
-                      <a:pPr algn="ctr">
-                        <a:defRPr sz="1000" b="1">
-                          <a:solidFill>
-                            <a:srgbClr val="375623"/>
-                          </a:solidFill>
-                          <a:latin typeface="Calibri"/>
-                        </a:defRPr>
-                      </a:pPr>
-                      <a:r>
-                        <a:t>Instant Multi-Category &amp; Priority Badges</a:t>
-                      </a:r>
-                    </a:p>
-                  </a:txBody>
-                  <a:tcPr anchor="ctr">
-                    <a:solidFill>
-                      <a:srgbClr val="FFFFFF"/>
-                    </a:solidFill>
-                  </a:tcPr>
-                </a:tc>
-              </a:tr>
-              <a:tr h="731520">
-                <a:tc>
-                  <a:txBody>
-                    <a:bodyPr wrap="square" tIns="54864" bIns="54864"/>
-                    <a:lstStyle/>
-                    <a:p>
-                      <a:pPr algn="l">
-                        <a:defRPr sz="1000" b="0">
-                          <a:solidFill>
-                            <a:srgbClr val="1E293B"/>
-                          </a:solidFill>
-                          <a:latin typeface="Calibri"/>
-                        </a:defRPr>
-                      </a:pPr>
-                      <a:r>
-                        <a:t>Sub-second Search Engine</a:t>
-                      </a:r>
-                    </a:p>
-                  </a:txBody>
-                  <a:tcPr anchor="ctr">
-                    <a:solidFill>
-                      <a:srgbClr val="E2EFDA"/>
-                    </a:solidFill>
-                  </a:tcPr>
-                </a:tc>
-                <a:tc>
-                  <a:txBody>
-                    <a:bodyPr wrap="square" tIns="54864" bIns="54864"/>
-                    <a:lstStyle/>
-                    <a:p>
-                      <a:pPr algn="ctr">
-                        <a:defRPr sz="1000" b="0">
-                          <a:solidFill>
-                            <a:srgbClr val="1E293B"/>
-                          </a:solidFill>
-                          <a:latin typeface="Calibri"/>
-                        </a:defRPr>
-                      </a:pPr>
-                      <a:r>
-                        <a:t>None</a:t>
-                      </a:r>
-                    </a:p>
-                  </a:txBody>
-                  <a:tcPr anchor="ctr">
-                    <a:solidFill>
-                      <a:srgbClr val="E2EFDA"/>
-                    </a:solidFill>
-                  </a:tcPr>
-                </a:tc>
-                <a:tc>
-                  <a:txBody>
-                    <a:bodyPr wrap="square" tIns="54864" bIns="54864"/>
-                    <a:lstStyle/>
-                    <a:p>
-                      <a:pPr algn="ctr">
-                        <a:defRPr sz="1000" b="0">
-                          <a:solidFill>
-                            <a:srgbClr val="1E293B"/>
-                          </a:solidFill>
-                          <a:latin typeface="Calibri"/>
-                        </a:defRPr>
-                      </a:pPr>
-                      <a:r>
-                        <a:t>Keyword (Noisy)</a:t>
-                      </a:r>
-                    </a:p>
-                  </a:txBody>
-                  <a:tcPr anchor="ctr">
-                    <a:solidFill>
-                      <a:srgbClr val="E2EFDA"/>
-                    </a:solidFill>
-                  </a:tcPr>
-                </a:tc>
-                <a:tc>
-                  <a:txBody>
-                    <a:bodyPr wrap="square" tIns="54864" bIns="54864"/>
-                    <a:lstStyle/>
-                    <a:p>
-                      <a:pPr algn="ctr">
-                        <a:defRPr sz="1000" b="0">
-                          <a:solidFill>
-                            <a:srgbClr val="1E293B"/>
-                          </a:solidFill>
-                          <a:latin typeface="Calibri"/>
-                        </a:defRPr>
-                      </a:pPr>
-                      <a:r>
-                        <a:t>Slow Database</a:t>
-                      </a:r>
-                    </a:p>
-                  </a:txBody>
-                  <a:tcPr anchor="ctr">
-                    <a:solidFill>
-                      <a:srgbClr val="E2EFDA"/>
-                    </a:solidFill>
-                  </a:tcPr>
-                </a:tc>
-                <a:tc>
-                  <a:txBody>
-                    <a:bodyPr wrap="square" tIns="54864" bIns="54864"/>
-                    <a:lstStyle/>
-                    <a:p>
-                      <a:pPr algn="ctr">
-                        <a:defRPr sz="1000" b="1">
-                          <a:solidFill>
-                            <a:srgbClr val="375623"/>
-                          </a:solidFill>
-                          <a:latin typeface="Calibri"/>
-                        </a:defRPr>
-                      </a:pPr>
-                      <a:r>
-                        <a:t>Sub-100ms In-Memory Dynamic Search</a:t>
-                      </a:r>
-                    </a:p>
-                  </a:txBody>
-                  <a:tcPr anchor="ctr">
-                    <a:solidFill>
-                      <a:srgbClr val="E2EFDA"/>
-                    </a:solidFill>
-                  </a:tcPr>
-                </a:tc>
-              </a:tr>
-              <a:tr h="731520">
-                <a:tc>
-                  <a:txBody>
-                    <a:bodyPr wrap="square" tIns="54864" bIns="54864"/>
-                    <a:lstStyle/>
-                    <a:p>
-                      <a:pPr algn="l">
-                        <a:defRPr sz="1000" b="0">
-                          <a:solidFill>
-                            <a:srgbClr val="1E293B"/>
-                          </a:solidFill>
-                          <a:latin typeface="Calibri"/>
-                        </a:defRPr>
-                      </a:pPr>
-                      <a:r>
-                        <a:t>Offline Data Persistence</a:t>
-                      </a:r>
-                    </a:p>
-                  </a:txBody>
-                  <a:tcPr anchor="ctr">
-                    <a:solidFill>
-                      <a:srgbClr val="FFFFFF"/>
-                    </a:solidFill>
-                  </a:tcPr>
-                </a:tc>
-                <a:tc>
-                  <a:txBody>
-                    <a:bodyPr wrap="square" tIns="54864" bIns="54864"/>
-                    <a:lstStyle/>
-                    <a:p>
-                      <a:pPr algn="ctr">
-                        <a:defRPr sz="1000" b="0">
-                          <a:solidFill>
-                            <a:srgbClr val="1E293B"/>
-                          </a:solidFill>
-                          <a:latin typeface="Calibri"/>
-                        </a:defRPr>
-                      </a:pPr>
-                      <a:r>
-                        <a:t>Physical only</a:t>
-                      </a:r>
-                    </a:p>
-                  </a:txBody>
-                  <a:tcPr anchor="ctr">
-                    <a:solidFill>
-                      <a:srgbClr val="FFFFFF"/>
-                    </a:solidFill>
-                  </a:tcPr>
-                </a:tc>
-                <a:tc>
-                  <a:txBody>
-                    <a:bodyPr wrap="square" tIns="54864" bIns="54864"/>
-                    <a:lstStyle/>
-                    <a:p>
-                      <a:pPr algn="ctr">
-                        <a:defRPr sz="1000" b="0">
-                          <a:solidFill>
-                            <a:srgbClr val="1E293B"/>
-                          </a:solidFill>
-                          <a:latin typeface="Calibri"/>
-                        </a:defRPr>
-                      </a:pPr>
-                      <a:r>
-                        <a:t>Chat Cache only</a:t>
-                      </a:r>
-                    </a:p>
-                  </a:txBody>
-                  <a:tcPr anchor="ctr">
-                    <a:solidFill>
-                      <a:srgbClr val="FFFFFF"/>
-                    </a:solidFill>
-                  </a:tcPr>
-                </a:tc>
-                <a:tc>
-                  <a:txBody>
-                    <a:bodyPr wrap="square" tIns="54864" bIns="54864"/>
-                    <a:lstStyle/>
-                    <a:p>
-                      <a:pPr algn="ctr">
-                        <a:defRPr sz="1000" b="0">
-                          <a:solidFill>
-                            <a:srgbClr val="1E293B"/>
-                          </a:solidFill>
-                          <a:latin typeface="Calibri"/>
-                        </a:defRPr>
-                      </a:pPr>
-                      <a:r>
-                        <a:t>None (Server down)</a:t>
-                      </a:r>
-                    </a:p>
-                  </a:txBody>
-                  <a:tcPr anchor="ctr">
-                    <a:solidFill>
-                      <a:srgbClr val="FFFFFF"/>
-                    </a:solidFill>
-                  </a:tcPr>
-                </a:tc>
-                <a:tc>
-                  <a:txBody>
-                    <a:bodyPr wrap="square" tIns="54864" bIns="54864"/>
-                    <a:lstStyle/>
-                    <a:p>
-                      <a:pPr algn="ctr">
-                        <a:defRPr sz="1000" b="1">
-                          <a:solidFill>
-                            <a:srgbClr val="375623"/>
-                          </a:solidFill>
-                          <a:latin typeface="Calibri"/>
-                        </a:defRPr>
-                      </a:pPr>
-                      <a:r>
-                        <a:t>Dual-Layer: Local Flat-File + Browser Sync</a:t>
-                      </a:r>
-                    </a:p>
-                  </a:txBody>
-                  <a:tcPr anchor="ctr">
-                    <a:solidFill>
-                      <a:srgbClr val="FFFFFF"/>
-                    </a:solidFill>
-                  </a:tcPr>
-                </a:tc>
-              </a:tr>
-              <a:tr h="731520">
-                <a:tc>
-                  <a:txBody>
-                    <a:bodyPr wrap="square" tIns="54864" bIns="54864"/>
-                    <a:lstStyle/>
-                    <a:p>
-                      <a:pPr algn="l">
-                        <a:defRPr sz="1000" b="0">
-                          <a:solidFill>
-                            <a:srgbClr val="1E293B"/>
-                          </a:solidFill>
-                          <a:latin typeface="Calibri"/>
-                        </a:defRPr>
-                      </a:pPr>
-                      <a:r>
-                        <a:t>Information Clutter Level</a:t>
-                      </a:r>
-                    </a:p>
-                  </a:txBody>
-                  <a:tcPr anchor="ctr">
-                    <a:solidFill>
-                      <a:srgbClr val="E2EFDA"/>
-                    </a:solidFill>
-                  </a:tcPr>
-                </a:tc>
-                <a:tc>
-                  <a:txBody>
-                    <a:bodyPr wrap="square" tIns="54864" bIns="54864"/>
-                    <a:lstStyle/>
-                    <a:p>
-                      <a:pPr algn="ctr">
-                        <a:defRPr sz="1000" b="0">
-                          <a:solidFill>
-                            <a:srgbClr val="1E293B"/>
-                          </a:solidFill>
-                          <a:latin typeface="Calibri"/>
-                        </a:defRPr>
-                      </a:pPr>
-                      <a:r>
-                        <a:t>High (Paper overlays)</a:t>
-                      </a:r>
-                    </a:p>
-                  </a:txBody>
-                  <a:tcPr anchor="ctr">
-                    <a:solidFill>
-                      <a:srgbClr val="E2EFDA"/>
-                    </a:solidFill>
-                  </a:tcPr>
-                </a:tc>
-                <a:tc>
-                  <a:txBody>
-                    <a:bodyPr wrap="square" tIns="54864" bIns="54864"/>
-                    <a:lstStyle/>
-                    <a:p>
-                      <a:pPr algn="ctr">
-                        <a:defRPr sz="1000" b="0">
-                          <a:solidFill>
-                            <a:srgbClr val="1E293B"/>
-                          </a:solidFill>
-                          <a:latin typeface="Calibri"/>
-                        </a:defRPr>
-                      </a:pPr>
-                      <a:r>
-                        <a:t>Extreme (Chat noise)</a:t>
-                      </a:r>
-                    </a:p>
-                  </a:txBody>
-                  <a:tcPr anchor="ctr">
-                    <a:solidFill>
-                      <a:srgbClr val="E2EFDA"/>
-                    </a:solidFill>
-                  </a:tcPr>
-                </a:tc>
-                <a:tc>
-                  <a:txBody>
-                    <a:bodyPr wrap="square" tIns="54864" bIns="54864"/>
-                    <a:lstStyle/>
-                    <a:p>
-                      <a:pPr algn="ctr">
-                        <a:defRPr sz="1000" b="0">
-                          <a:solidFill>
-                            <a:srgbClr val="1E293B"/>
-                          </a:solidFill>
-                          <a:latin typeface="Calibri"/>
-                        </a:defRPr>
-                      </a:pPr>
-                      <a:r>
-                        <a:t>Moderate</a:t>
-                      </a:r>
-                    </a:p>
-                  </a:txBody>
-                  <a:tcPr anchor="ctr">
-                    <a:solidFill>
-                      <a:srgbClr val="E2EFDA"/>
-                    </a:solidFill>
-                  </a:tcPr>
-                </a:tc>
-                <a:tc>
-                  <a:txBody>
-                    <a:bodyPr wrap="square" tIns="54864" bIns="54864"/>
-                    <a:lstStyle/>
-                    <a:p>
-                      <a:pPr algn="ctr">
-                        <a:defRPr sz="1000" b="1">
-                          <a:solidFill>
-                            <a:srgbClr val="375623"/>
-                          </a:solidFill>
-                          <a:latin typeface="Calibri"/>
-                        </a:defRPr>
-                      </a:pPr>
-                      <a:r>
-                        <a:t>Zero Clutter (Authoritative Only)</a:t>
-                      </a:r>
-                    </a:p>
-                  </a:txBody>
-                  <a:tcPr anchor="ctr">
-                    <a:solidFill>
-                      <a:srgbClr val="E2EFDA"/>
-                    </a:solidFill>
-                  </a:tcPr>
-                </a:tc>
-              </a:tr>
-            </a:tbl>
-          </a:graphicData>
-        </a:graphic>
-      </p:graphicFrame>
+        </p:nvSpPr>
+        <p:spPr>
+          <a:xfrm>
+            <a:off x="914400" y="1371600"/>
+            <a:ext cx="8686800" cy="4754880"/>
+          </a:xfrm>
+          <a:prstGeom prst="rect">
+            <a:avLst/>
+          </a:prstGeom>
+          <a:noFill/>
+        </p:spPr>
+        <p:txBody>
+          <a:bodyPr wrap="square">
+            <a:spAutoFit/>
+          </a:bodyPr>
+          <a:lstStyle/>
+          <a:p>
+            <a:pPr>
+              <a:spcAft>
+                <a:spcPts val="1200"/>
+              </a:spcAft>
+            </a:pPr>
+            <a:r>
+              <a:rPr b="1" i="0" sz="1400">
+                <a:solidFill>
+                  <a:srgbClr val="70AD47"/>
+                </a:solidFill>
+                <a:latin typeface="Calibri"/>
+              </a:rPr>
+              <a:t>►  </a:t>
+            </a:r>
+            <a:r>
+              <a:rPr b="1" i="0" sz="1400">
+                <a:solidFill>
+                  <a:srgbClr val="375623"/>
+                </a:solidFill>
+                <a:latin typeface="Calibri"/>
+              </a:rPr>
+              <a:t>Lack of Strict Role-Based Publishing: </a:t>
+            </a:r>
+            <a:r>
+              <a:rPr b="0" i="0" sz="1300">
+                <a:solidFill>
+                  <a:srgbClr val="1E293B"/>
+                </a:solidFill>
+                <a:latin typeface="Calibri"/>
+              </a:rPr>
+              <a:t>Existing communication channels either permit unrestricted student posting (leading to spam and rumors) or rely on complex enterprise ERPs that lack agile customization for college departments.</a:t>
+            </a:r>
+          </a:p>
+          <a:p>
+            <a:pPr>
+              <a:spcAft>
+                <a:spcPts val="1200"/>
+              </a:spcAft>
+            </a:pPr>
+            <a:r>
+              <a:rPr b="1" i="0" sz="1400">
+                <a:solidFill>
+                  <a:srgbClr val="70AD47"/>
+                </a:solidFill>
+                <a:latin typeface="Calibri"/>
+              </a:rPr>
+              <a:t>►  </a:t>
+            </a:r>
+            <a:r>
+              <a:rPr b="1" i="0" sz="1400">
+                <a:solidFill>
+                  <a:srgbClr val="375623"/>
+                </a:solidFill>
+                <a:latin typeface="Calibri"/>
+              </a:rPr>
+              <a:t>Absence of Verifiable Acknowledgment Receipts: </a:t>
+            </a:r>
+            <a:r>
+              <a:rPr b="0" i="0" sz="1300">
+                <a:solidFill>
+                  <a:srgbClr val="1E293B"/>
+                </a:solidFill>
+                <a:latin typeface="Calibri"/>
+              </a:rPr>
+              <a:t>Current digital bulletin boards passively broadcast notices without recording timestamped student delivery acknowledgments, leaving faculty uncertain about message penetration.</a:t>
+            </a:r>
+          </a:p>
+          <a:p>
+            <a:pPr>
+              <a:spcAft>
+                <a:spcPts val="1200"/>
+              </a:spcAft>
+            </a:pPr>
+            <a:r>
+              <a:rPr b="1" i="0" sz="1400">
+                <a:solidFill>
+                  <a:srgbClr val="70AD47"/>
+                </a:solidFill>
+                <a:latin typeface="Calibri"/>
+              </a:rPr>
+              <a:t>►  </a:t>
+            </a:r>
+            <a:r>
+              <a:rPr b="1" i="0" sz="1400">
+                <a:solidFill>
+                  <a:srgbClr val="375623"/>
+                </a:solidFill>
+                <a:latin typeface="Calibri"/>
+              </a:rPr>
+              <a:t>Physical Hardware Dependency: </a:t>
+            </a:r>
+            <a:r>
+              <a:rPr b="0" i="0" sz="1300">
+                <a:solidFill>
+                  <a:srgbClr val="1E293B"/>
+                </a:solidFill>
+                <a:latin typeface="Calibri"/>
+              </a:rPr>
+              <a:t>Existing smart notice boards require expensive LCD/LED hallway displays, failing to deliver notices directly into students' pockets on their personal mobile devices.</a:t>
+            </a:r>
+          </a:p>
+          <a:p>
+            <a:pPr>
+              <a:spcAft>
+                <a:spcPts val="1200"/>
+              </a:spcAft>
+            </a:pPr>
+            <a:r>
+              <a:rPr b="1" i="0" sz="1400">
+                <a:solidFill>
+                  <a:srgbClr val="70AD47"/>
+                </a:solidFill>
+                <a:latin typeface="Calibri"/>
+              </a:rPr>
+              <a:t>►  </a:t>
+            </a:r>
+            <a:r>
+              <a:rPr b="1" i="0" sz="1400">
+                <a:solidFill>
+                  <a:srgbClr val="375623"/>
+                </a:solidFill>
+                <a:latin typeface="Calibri"/>
+              </a:rPr>
+              <a:t>Zero Offline Fault Tolerance: </a:t>
+            </a:r>
+            <a:r>
+              <a:rPr b="0" i="0" sz="1300">
+                <a:solidFill>
+                  <a:srgbClr val="1E293B"/>
+                </a:solidFill>
+                <a:latin typeface="Calibri"/>
+              </a:rPr>
+              <a:t>Most campus web portals fail completely when on-campus Wi-Fi disconnects; lack of local client-side caching prevents students from viewing previously loaded circulars.</a:t>
+            </a:r>
+          </a:p>
+          <a:p>
+            <a:pPr>
+              <a:spcAft>
+                <a:spcPts val="1200"/>
+              </a:spcAft>
+            </a:pPr>
+            <a:r>
+              <a:rPr b="1" i="0" sz="1400">
+                <a:solidFill>
+                  <a:srgbClr val="70AD47"/>
+                </a:solidFill>
+                <a:latin typeface="Calibri"/>
+              </a:rPr>
+              <a:t>►  </a:t>
+            </a:r>
+            <a:r>
+              <a:rPr b="1" i="0" sz="1400">
+                <a:solidFill>
+                  <a:srgbClr val="375623"/>
+                </a:solidFill>
+                <a:latin typeface="Calibri"/>
+              </a:rPr>
+              <a:t>Fragmented Priority &amp; Category Routing: </a:t>
+            </a:r>
+            <a:r>
+              <a:rPr b="0" i="0" sz="1300">
+                <a:solidFill>
+                  <a:srgbClr val="1E293B"/>
+                </a:solidFill>
+                <a:latin typeface="Calibri"/>
+              </a:rPr>
+              <a:t>Absence of structured priority filtering (Urgent vs. General) causes life-critical exam postponement alerts to be lost within routine club notices.</a:t>
+            </a:r>
+          </a:p>
+        </p:txBody>
+      </p:sp>
     </p:spTree>
   </p:cSld>
   <p:clrMapOvr>
@@ -9999,7 +7894,7 @@
               </a:defRPr>
             </a:pPr>
             <a:r>
-              <a:t>Proposed Solution &amp; System Architecture (MVC):</a:t>
+              <a:t>Proposed Solution:</a:t>
             </a:r>
           </a:p>
         </p:txBody>
@@ -10012,8 +7907,8 @@
         </p:nvSpPr>
         <p:spPr>
           <a:xfrm>
-            <a:off x="731520" y="1371600"/>
-            <a:ext cx="9601200" cy="4754880"/>
+            <a:off x="914400" y="1371600"/>
+            <a:ext cx="8686800" cy="4754880"/>
           </a:xfrm>
           <a:prstGeom prst="rect">
             <a:avLst/>
@@ -10034,21 +7929,29 @@
             <a:r>
               <a:rPr b="1" i="0" sz="1350">
                 <a:solidFill>
+                  <a:srgbClr val="70AD47"/>
+                </a:solidFill>
+                <a:latin typeface="Calibri"/>
+              </a:rPr>
+              <a:t>►  </a:t>
+            </a:r>
+            <a:r>
+              <a:rPr b="1" i="0" sz="1350">
+                <a:solidFill>
                   <a:srgbClr val="375623"/>
                 </a:solidFill>
                 <a:latin typeface="Calibri"/>
               </a:rPr>
-              <a:t>■  Model Layer (Domain Entities):
-   </a:t>
-            </a:r>
-            <a:r>
-              <a:rPr b="0" i="0" sz="1200">
+              <a:t>Modular Core Java SE 17 Architecture: </a:t>
+            </a:r>
+            <a:r>
+              <a:rPr b="0" i="0" sz="1250">
                 <a:solidFill>
                   <a:srgbClr val="1E293B"/>
                 </a:solidFill>
                 <a:latin typeface="Calibri"/>
               </a:rPr>
-              <a:t>Encapsulates core business data: Notice (ID, title, category, priority, timestamp), User (ID, name, role), and Enums (Category: ACADEMIC, EXAM, PLACEMENT, EVENT; Priority: URGENT, HIGH, NORMAL).</a:t>
+              <a:t>Robust Model-View-Controller (MVC) design separating domain models (Notice, User), interfaces (Notifiable), and CLI / Web business logic.</a:t>
             </a:r>
           </a:p>
           <a:p>
@@ -10060,22 +7963,29 @@
             <a:r>
               <a:rPr b="1" i="0" sz="1350">
                 <a:solidFill>
+                  <a:srgbClr val="70AD47"/>
+                </a:solidFill>
+                <a:latin typeface="Calibri"/>
+              </a:rPr>
+              <a:t>►  </a:t>
+            </a:r>
+            <a:r>
+              <a:rPr b="1" i="0" sz="1350">
+                <a:solidFill>
                   <a:srgbClr val="375623"/>
                 </a:solidFill>
                 <a:latin typeface="Calibri"/>
               </a:rPr>
-              <a:t>■  View Layer (Dual Presentation):
-   </a:t>
-            </a:r>
-            <a:r>
-              <a:rPr b="0" i="0" sz="1200">
+              <a:t>Zero-Access Authentication &amp; RBAC Gate: </a:t>
+            </a:r>
+            <a:r>
+              <a:rPr b="0" i="0" sz="1250">
                 <a:solidFill>
                   <a:srgbClr val="1E293B"/>
                 </a:solidFill>
                 <a:latin typeface="Calibri"/>
               </a:rPr>
-              <a:t>• Interactive Terminal CLI Driver: Console Scanner menu with colored terminal feeds for laboratory execution.
-• Modern Web Dashboard: Semantic HTML5, CSS3 Grid, responsive cards, and dynamic filter controls.</a:t>
+              <a:t>Strict multi-tiered Role-Based Access Control ensuring circular creation, pinning, and deletion are restricted strictly to authenticated Super Admins and Faculty.</a:t>
             </a:r>
           </a:p>
           <a:p>
@@ -10087,22 +7997,29 @@
             <a:r>
               <a:rPr b="1" i="0" sz="1350">
                 <a:solidFill>
+                  <a:srgbClr val="70AD47"/>
+                </a:solidFill>
+                <a:latin typeface="Calibri"/>
+              </a:rPr>
+              <a:t>►  </a:t>
+            </a:r>
+            <a:r>
+              <a:rPr b="1" i="0" sz="1350">
+                <a:solidFill>
                   <a:srgbClr val="375623"/>
                 </a:solidFill>
                 <a:latin typeface="Calibri"/>
               </a:rPr>
-              <a:t>■  Controller Layer (Business Logic &amp; Storage):
-   </a:t>
-            </a:r>
-            <a:r>
-              <a:rPr b="0" i="0" sz="1200">
+              <a:t>Dynamic Department &amp; Priority Routing: </a:t>
+            </a:r>
+            <a:r>
+              <a:rPr b="0" i="0" sz="1250">
                 <a:solidFill>
                   <a:srgbClr val="1E293B"/>
                 </a:solidFill>
                 <a:latin typeface="Calibri"/>
               </a:rPr>
-              <a:t>• NoticeService: Implements create, read, update, delete, search, and category filtering algorithms.
-• FileStorageEngine: Java BufferedReader &amp; PrintWriter stream manager reading/writing notifications_data.txt.</a:t>
+              <a:t>Instant categorization across departments (IT, Comps, Mech, Civil) and priority badges (Urgent, Normal) with sub-5ms render latency.</a:t>
             </a:r>
           </a:p>
           <a:p>
@@ -10114,21 +8031,97 @@
             <a:r>
               <a:rPr b="1" i="0" sz="1350">
                 <a:solidFill>
+                  <a:srgbClr val="70AD47"/>
+                </a:solidFill>
+                <a:latin typeface="Calibri"/>
+              </a:rPr>
+              <a:t>►  </a:t>
+            </a:r>
+            <a:r>
+              <a:rPr b="1" i="0" sz="1350">
+                <a:solidFill>
                   <a:srgbClr val="375623"/>
                 </a:solidFill>
                 <a:latin typeface="Calibri"/>
               </a:rPr>
-              <a:t>■  Cloud &amp; Offline Synchronization Layer:
-   </a:t>
-            </a:r>
-            <a:r>
-              <a:rPr b="0" i="0" sz="1200">
+              <a:t>Verifiable Digital Acknowledgment Engine: </a:t>
+            </a:r>
+            <a:r>
+              <a:rPr b="0" i="0" sz="1250">
                 <a:solidFill>
                   <a:srgbClr val="1E293B"/>
                 </a:solidFill>
                 <a:latin typeface="Calibri"/>
               </a:rPr>
-              <a:t>Google Firebase Firestore real-time snapshot listeners for multi-device sync, paired with browser LocalStorage caching for guaranteed offline resilience.</a:t>
+              <a:t>One-click student acknowledgment recording verified digital receipts for examination and placement compliance audit records.</a:t>
+            </a:r>
+          </a:p>
+          <a:p>
+            <a:pPr>
+              <a:spcAft>
+                <a:spcPts val="1000"/>
+              </a:spcAft>
+            </a:pPr>
+            <a:r>
+              <a:rPr b="1" i="0" sz="1350">
+                <a:solidFill>
+                  <a:srgbClr val="70AD47"/>
+                </a:solidFill>
+                <a:latin typeface="Calibri"/>
+              </a:rPr>
+              <a:t>►  </a:t>
+            </a:r>
+            <a:r>
+              <a:rPr b="1" i="0" sz="1350">
+                <a:solidFill>
+                  <a:srgbClr val="375623"/>
+                </a:solidFill>
+                <a:latin typeface="Calibri"/>
+              </a:rPr>
+              <a:t>Dual-Tier Persistent Storage: </a:t>
+            </a:r>
+            <a:r>
+              <a:rPr b="0" i="0" sz="1250">
+                <a:solidFill>
+                  <a:srgbClr val="1E293B"/>
+                </a:solidFill>
+                <a:latin typeface="Calibri"/>
+              </a:rPr>
+              <a:t>Seamless integration combining real-time cloud data storage with local offline-first storage (localStorage) for uninterrupted offline resiliency.</a:t>
+            </a:r>
+          </a:p>
+          <a:p>
+            <a:pPr>
+              <a:spcAft>
+                <a:spcPts val="1000"/>
+              </a:spcAft>
+            </a:pPr>
+            <a:r>
+              <a:rPr b="1" i="0" sz="1350">
+                <a:solidFill>
+                  <a:srgbClr val="70AD47"/>
+                </a:solidFill>
+                <a:latin typeface="Calibri"/>
+              </a:rPr>
+              <a:t>►  </a:t>
+            </a:r>
+            <a:r>
+              <a:rPr b="1" i="0" sz="1350">
+                <a:solidFill>
+                  <a:srgbClr val="375623"/>
+                </a:solidFill>
+                <a:latin typeface="Calibri"/>
+              </a:rPr>
+              <a:t>Cross-Device Responsive Web Client: </a:t>
+            </a:r>
+            <a:r>
+              <a:rPr b="0" i="0" sz="1250">
+                <a:solidFill>
+                  <a:srgbClr val="1E293B"/>
+                </a:solidFill>
+                <a:latin typeface="Calibri"/>
+              </a:rPr>
+              <a:t>Clean, responsive portal optimized for all smartphones, tablets, and desktop workstations with zero visual clipping or hidden actions.</a:t>
             </a:r>
           </a:p>
         </p:txBody>
@@ -10317,159 +8310,697 @@
               </a:defRPr>
             </a:pPr>
             <a:r>
-              <a:t>Core Java OOP Design Highlights:</a:t>
-            </a:r>
-          </a:p>
-        </p:txBody>
-      </p:sp>
-      <p:sp>
-        <p:nvSpPr>
-          <p:cNvPr id="6" name="TextBox 5"/>
-          <p:cNvSpPr txBox="1"/>
+              <a:t>Project Planning &amp; Timeline:</a:t>
+            </a:r>
+          </a:p>
+        </p:txBody>
+      </p:sp>
+      <p:graphicFrame>
+        <p:nvGraphicFramePr>
+          <p:cNvPr id="6" name="Table 5"/>
+          <p:cNvGraphicFramePr>
+            <a:graphicFrameLocks noGrp="1"/>
+          </p:cNvGraphicFramePr>
           <p:nvPr/>
-        </p:nvSpPr>
-        <p:spPr>
-          <a:xfrm>
-            <a:off x="731520" y="1371600"/>
-            <a:ext cx="9601200" cy="4754880"/>
-          </a:xfrm>
-          <a:prstGeom prst="rect">
-            <a:avLst/>
-          </a:prstGeom>
-          <a:noFill/>
-        </p:spPr>
-        <p:txBody>
-          <a:bodyPr wrap="square">
-            <a:spAutoFit/>
-          </a:bodyPr>
-          <a:lstStyle/>
-          <a:p>
-            <a:pPr>
-              <a:spcAft>
-                <a:spcPts val="1100"/>
-              </a:spcAft>
-            </a:pPr>
-            <a:r>
-              <a:rPr b="1" i="0" sz="1300">
-                <a:solidFill>
-                  <a:srgbClr val="375623"/>
-                </a:solidFill>
-                <a:latin typeface="Calibri"/>
-              </a:rPr>
-              <a:t>✔  Encapsulation &amp; Data Integrity: </a:t>
-            </a:r>
-            <a:r>
-              <a:rPr b="0" i="0" sz="1200">
-                <a:solidFill>
-                  <a:srgbClr val="1E293B"/>
-                </a:solidFill>
-                <a:latin typeface="Calibri"/>
-              </a:rPr>
-              <a:t>All fields in Notice.java are private. Access and mutation are controlled via public getter/setter methods with strict input validation rejecting null or malformed data.</a:t>
-            </a:r>
-          </a:p>
-          <a:p>
-            <a:pPr>
-              <a:spcAft>
-                <a:spcPts val="1100"/>
-              </a:spcAft>
-            </a:pPr>
-            <a:r>
-              <a:rPr b="1" i="0" sz="1300">
-                <a:solidFill>
-                  <a:srgbClr val="375623"/>
-                </a:solidFill>
-                <a:latin typeface="Calibri"/>
-              </a:rPr>
-              <a:t>✔  Constructor Overloading: </a:t>
-            </a:r>
-            <a:r>
-              <a:rPr b="0" i="0" sz="1200">
-                <a:solidFill>
-                  <a:srgbClr val="1E293B"/>
-                </a:solidFill>
-                <a:latin typeface="Calibri"/>
-              </a:rPr>
-              <a:t>Notice class provides dual constructors: one for freshly published notices (generating UUID and system timestamp) and another for deserializing delimited file records.</a:t>
-            </a:r>
-          </a:p>
-          <a:p>
-            <a:pPr>
-              <a:spcAft>
-                <a:spcPts val="1100"/>
-              </a:spcAft>
-            </a:pPr>
-            <a:r>
-              <a:rPr b="1" i="0" sz="1300">
-                <a:solidFill>
-                  <a:srgbClr val="375623"/>
-                </a:solidFill>
-                <a:latin typeface="Calibri"/>
-              </a:rPr>
-              <a:t>✔  Collections Framework (ArrayList &amp; Iterator): </a:t>
-            </a:r>
-            <a:r>
-              <a:rPr b="0" i="0" sz="1200">
-                <a:solidFill>
-                  <a:srgbClr val="1E293B"/>
-                </a:solidFill>
-                <a:latin typeface="Calibri"/>
-              </a:rPr>
-              <a:t>Dynamic notifications are stored in ArrayList&lt;Notice&gt;. Safe deletion and filtering are performed using Iterator&lt;Notice&gt; to prevent ConcurrentModificationException.</a:t>
-            </a:r>
-          </a:p>
-          <a:p>
-            <a:pPr>
-              <a:spcAft>
-                <a:spcPts val="1100"/>
-              </a:spcAft>
-            </a:pPr>
-            <a:r>
-              <a:rPr b="1" i="0" sz="1300">
-                <a:solidFill>
-                  <a:srgbClr val="375623"/>
-                </a:solidFill>
-                <a:latin typeface="Calibri"/>
-              </a:rPr>
-              <a:t>✔  Java File I/O Persistence: </a:t>
-            </a:r>
-            <a:r>
-              <a:rPr b="0" i="0" sz="1200">
-                <a:solidFill>
-                  <a:srgbClr val="1E293B"/>
-                </a:solidFill>
-                <a:latin typeface="Calibri"/>
-              </a:rPr>
-              <a:t>Atomic read and write operations using BufferedReader and PrintWriter. Circulars are saved in pipe-delimited format (ID|Title|Category|Priority|Date|Author), ensuring complete data recovery upon restart.</a:t>
-            </a:r>
-          </a:p>
-          <a:p>
-            <a:pPr>
-              <a:spcAft>
-                <a:spcPts val="1100"/>
-              </a:spcAft>
-            </a:pPr>
-            <a:r>
-              <a:rPr b="1" i="0" sz="1300">
-                <a:solidFill>
-                  <a:srgbClr val="375623"/>
-                </a:solidFill>
-                <a:latin typeface="Calibri"/>
-              </a:rPr>
-              <a:t>✔  Sorting &amp; Lambda Predicates: </a:t>
-            </a:r>
-            <a:r>
-              <a:rPr b="0" i="0" sz="1200">
-                <a:solidFill>
-                  <a:srgbClr val="1E293B"/>
-                </a:solidFill>
-                <a:latin typeface="Calibri"/>
-              </a:rPr>
-              <a:t>Notices are sorted by urgency priority (Urgent &gt; High &gt; Normal) and reverse chronological timestamp using Java 8+ Comparator and Lambda expressions.</a:t>
-            </a:r>
-          </a:p>
-        </p:txBody>
-      </p:sp>
+        </p:nvGraphicFramePr>
+        <p:xfrm>
+          <a:off x="731520" y="1371600"/>
+          <a:ext cx="9326880" cy="4754880"/>
+        </p:xfrm>
+        <a:graphic>
+          <a:graphicData uri="http://schemas.openxmlformats.org/drawingml/2006/table">
+            <a:tbl>
+              <a:tblPr firstRow="1" bandRow="1">
+                <a:tableStyleId>{5C22544A-7EE6-4342-B048-85BDC9FD1C3A}</a:tableStyleId>
+              </a:tblPr>
+              <a:tblGrid>
+                <a:gridCol w="1828800"/>
+                <a:gridCol w="2011680"/>
+                <a:gridCol w="4114800"/>
+                <a:gridCol w="1371600"/>
+              </a:tblGrid>
+              <a:tr h="679268">
+                <a:tc>
+                  <a:txBody>
+                    <a:bodyPr wrap="square" tIns="54864" bIns="54864"/>
+                    <a:lstStyle/>
+                    <a:p>
+                      <a:pPr algn="ctr"/>
+                      <a:r>
+                        <a:rPr b="1" i="0" sz="1100">
+                          <a:solidFill>
+                            <a:srgbClr val="FFFFFF"/>
+                          </a:solidFill>
+                          <a:latin typeface="Calibri"/>
+                        </a:rPr>
+                        <a:t>Week / Duration</a:t>
+                      </a:r>
+                    </a:p>
+                  </a:txBody>
+                  <a:tcPr anchor="ctr">
+                    <a:solidFill>
+                      <a:srgbClr val="70AD47"/>
+                    </a:solidFill>
+                  </a:tcPr>
+                </a:tc>
+                <a:tc>
+                  <a:txBody>
+                    <a:bodyPr wrap="square" tIns="54864" bIns="54864"/>
+                    <a:lstStyle/>
+                    <a:p>
+                      <a:pPr algn="ctr"/>
+                      <a:r>
+                        <a:rPr b="1" i="0" sz="1100">
+                          <a:solidFill>
+                            <a:srgbClr val="FFFFFF"/>
+                          </a:solidFill>
+                          <a:latin typeface="Calibri"/>
+                        </a:rPr>
+                        <a:t>Phase Name</a:t>
+                      </a:r>
+                    </a:p>
+                  </a:txBody>
+                  <a:tcPr anchor="ctr">
+                    <a:solidFill>
+                      <a:srgbClr val="70AD47"/>
+                    </a:solidFill>
+                  </a:tcPr>
+                </a:tc>
+                <a:tc>
+                  <a:txBody>
+                    <a:bodyPr wrap="square" tIns="54864" bIns="54864"/>
+                    <a:lstStyle/>
+                    <a:p>
+                      <a:pPr algn="ctr"/>
+                      <a:r>
+                        <a:rPr b="1" i="0" sz="1100">
+                          <a:solidFill>
+                            <a:srgbClr val="FFFFFF"/>
+                          </a:solidFill>
+                          <a:latin typeface="Calibri"/>
+                        </a:rPr>
+                        <a:t>Key Tasks &amp; Milestones</a:t>
+                      </a:r>
+                    </a:p>
+                  </a:txBody>
+                  <a:tcPr anchor="ctr">
+                    <a:solidFill>
+                      <a:srgbClr val="70AD47"/>
+                    </a:solidFill>
+                  </a:tcPr>
+                </a:tc>
+                <a:tc>
+                  <a:txBody>
+                    <a:bodyPr wrap="square" tIns="54864" bIns="54864"/>
+                    <a:lstStyle/>
+                    <a:p>
+                      <a:pPr algn="ctr"/>
+                      <a:r>
+                        <a:rPr b="1" i="0" sz="1100">
+                          <a:solidFill>
+                            <a:srgbClr val="FFFFFF"/>
+                          </a:solidFill>
+                          <a:latin typeface="Calibri"/>
+                        </a:rPr>
+                        <a:t>Status</a:t>
+                      </a:r>
+                    </a:p>
+                  </a:txBody>
+                  <a:tcPr anchor="ctr">
+                    <a:solidFill>
+                      <a:srgbClr val="70AD47"/>
+                    </a:solidFill>
+                  </a:tcPr>
+                </a:tc>
+              </a:tr>
+              <a:tr h="679268">
+                <a:tc>
+                  <a:txBody>
+                    <a:bodyPr wrap="square" tIns="54864" bIns="54864"/>
+                    <a:lstStyle/>
+                    <a:p>
+                      <a:pPr algn="ctr"/>
+                      <a:r>
+                        <a:rPr b="0" i="0" sz="1000">
+                          <a:solidFill>
+                            <a:srgbClr val="1E293B"/>
+                          </a:solidFill>
+                          <a:latin typeface="Calibri"/>
+                        </a:rPr>
+                        <a:t>Weeks 1–2 (July 2025)</a:t>
+                      </a:r>
+                    </a:p>
+                  </a:txBody>
+                  <a:tcPr anchor="ctr">
+                    <a:solidFill>
+                      <a:srgbClr val="E2EFDA"/>
+                    </a:solidFill>
+                  </a:tcPr>
+                </a:tc>
+                <a:tc>
+                  <a:txBody>
+                    <a:bodyPr wrap="square" tIns="54864" bIns="54864"/>
+                    <a:lstStyle/>
+                    <a:p>
+                      <a:pPr algn="l"/>
+                      <a:r>
+                        <a:rPr b="0" i="0" sz="1000">
+                          <a:solidFill>
+                            <a:srgbClr val="1E293B"/>
+                          </a:solidFill>
+                          <a:latin typeface="Calibri"/>
+                        </a:rPr>
+                        <a:t>Need Identification &amp; SRS</a:t>
+                      </a:r>
+                    </a:p>
+                  </a:txBody>
+                  <a:tcPr anchor="ctr">
+                    <a:solidFill>
+                      <a:srgbClr val="E2EFDA"/>
+                    </a:solidFill>
+                  </a:tcPr>
+                </a:tc>
+                <a:tc>
+                  <a:txBody>
+                    <a:bodyPr wrap="square" tIns="54864" bIns="54864"/>
+                    <a:lstStyle/>
+                    <a:p>
+                      <a:pPr algn="l"/>
+                      <a:r>
+                        <a:rPr b="0" i="0" sz="1000">
+                          <a:solidFill>
+                            <a:srgbClr val="1E293B"/>
+                          </a:solidFill>
+                          <a:latin typeface="Calibri"/>
+                        </a:rPr>
+                        <a:t>Problem definition, literature survey, stakeholder requirement gathering</a:t>
+                      </a:r>
+                    </a:p>
+                  </a:txBody>
+                  <a:tcPr anchor="ctr">
+                    <a:solidFill>
+                      <a:srgbClr val="E2EFDA"/>
+                    </a:solidFill>
+                  </a:tcPr>
+                </a:tc>
+                <a:tc>
+                  <a:txBody>
+                    <a:bodyPr wrap="square" tIns="54864" bIns="54864"/>
+                    <a:lstStyle/>
+                    <a:p>
+                      <a:pPr algn="ctr"/>
+                      <a:r>
+                        <a:rPr b="1" i="0" sz="1000">
+                          <a:solidFill>
+                            <a:srgbClr val="375623"/>
+                          </a:solidFill>
+                          <a:latin typeface="Calibri"/>
+                        </a:rPr>
+                        <a:t>Completed</a:t>
+                      </a:r>
+                    </a:p>
+                  </a:txBody>
+                  <a:tcPr anchor="ctr">
+                    <a:solidFill>
+                      <a:srgbClr val="E2EFDA"/>
+                    </a:solidFill>
+                  </a:tcPr>
+                </a:tc>
+              </a:tr>
+              <a:tr h="679268">
+                <a:tc>
+                  <a:txBody>
+                    <a:bodyPr wrap="square" tIns="54864" bIns="54864"/>
+                    <a:lstStyle/>
+                    <a:p>
+                      <a:pPr algn="ctr"/>
+                      <a:r>
+                        <a:rPr b="0" i="0" sz="1000">
+                          <a:solidFill>
+                            <a:srgbClr val="1E293B"/>
+                          </a:solidFill>
+                          <a:latin typeface="Calibri"/>
+                        </a:rPr>
+                        <a:t>Weeks 3–4 (Aug 2025)</a:t>
+                      </a:r>
+                    </a:p>
+                  </a:txBody>
+                  <a:tcPr anchor="ctr">
+                    <a:solidFill>
+                      <a:srgbClr val="F2F8EE"/>
+                    </a:solidFill>
+                  </a:tcPr>
+                </a:tc>
+                <a:tc>
+                  <a:txBody>
+                    <a:bodyPr wrap="square" tIns="54864" bIns="54864"/>
+                    <a:lstStyle/>
+                    <a:p>
+                      <a:pPr algn="l"/>
+                      <a:r>
+                        <a:rPr b="0" i="0" sz="1000">
+                          <a:solidFill>
+                            <a:srgbClr val="1E293B"/>
+                          </a:solidFill>
+                          <a:latin typeface="Calibri"/>
+                        </a:rPr>
+                        <a:t>Literature Survey &amp; Design</a:t>
+                      </a:r>
+                    </a:p>
+                  </a:txBody>
+                  <a:tcPr anchor="ctr">
+                    <a:solidFill>
+                      <a:srgbClr val="F2F8EE"/>
+                    </a:solidFill>
+                  </a:tcPr>
+                </a:tc>
+                <a:tc>
+                  <a:txBody>
+                    <a:bodyPr wrap="square" tIns="54864" bIns="54864"/>
+                    <a:lstStyle/>
+                    <a:p>
+                      <a:pPr algn="l"/>
+                      <a:r>
+                        <a:rPr b="0" i="0" sz="1000">
+                          <a:solidFill>
+                            <a:srgbClr val="1E293B"/>
+                          </a:solidFill>
+                          <a:latin typeface="Calibri"/>
+                        </a:rPr>
+                        <a:t>Comparative study, UML diagrams (Class, Use Case, Sequence), OOP modeling</a:t>
+                      </a:r>
+                    </a:p>
+                  </a:txBody>
+                  <a:tcPr anchor="ctr">
+                    <a:solidFill>
+                      <a:srgbClr val="F2F8EE"/>
+                    </a:solidFill>
+                  </a:tcPr>
+                </a:tc>
+                <a:tc>
+                  <a:txBody>
+                    <a:bodyPr wrap="square" tIns="54864" bIns="54864"/>
+                    <a:lstStyle/>
+                    <a:p>
+                      <a:pPr algn="ctr"/>
+                      <a:r>
+                        <a:rPr b="1" i="0" sz="1000">
+                          <a:solidFill>
+                            <a:srgbClr val="375623"/>
+                          </a:solidFill>
+                          <a:latin typeface="Calibri"/>
+                        </a:rPr>
+                        <a:t>Completed</a:t>
+                      </a:r>
+                    </a:p>
+                  </a:txBody>
+                  <a:tcPr anchor="ctr">
+                    <a:solidFill>
+                      <a:srgbClr val="F2F8EE"/>
+                    </a:solidFill>
+                  </a:tcPr>
+                </a:tc>
+              </a:tr>
+              <a:tr h="679268">
+                <a:tc>
+                  <a:txBody>
+                    <a:bodyPr wrap="square" tIns="54864" bIns="54864"/>
+                    <a:lstStyle/>
+                    <a:p>
+                      <a:pPr algn="ctr"/>
+                      <a:r>
+                        <a:rPr b="0" i="0" sz="1000">
+                          <a:solidFill>
+                            <a:srgbClr val="1E293B"/>
+                          </a:solidFill>
+                          <a:latin typeface="Calibri"/>
+                        </a:rPr>
+                        <a:t>Weeks 5–7 (Aug–Sep 2025)</a:t>
+                      </a:r>
+                    </a:p>
+                  </a:txBody>
+                  <a:tcPr anchor="ctr">
+                    <a:solidFill>
+                      <a:srgbClr val="E2EFDA"/>
+                    </a:solidFill>
+                  </a:tcPr>
+                </a:tc>
+                <a:tc>
+                  <a:txBody>
+                    <a:bodyPr wrap="square" tIns="54864" bIns="54864"/>
+                    <a:lstStyle/>
+                    <a:p>
+                      <a:pPr algn="l"/>
+                      <a:r>
+                        <a:rPr b="0" i="0" sz="1000">
+                          <a:solidFill>
+                            <a:srgbClr val="1E293B"/>
+                          </a:solidFill>
+                          <a:latin typeface="Calibri"/>
+                        </a:rPr>
+                        <a:t>Core Java OOP Modules</a:t>
+                      </a:r>
+                    </a:p>
+                  </a:txBody>
+                  <a:tcPr anchor="ctr">
+                    <a:solidFill>
+                      <a:srgbClr val="E2EFDA"/>
+                    </a:solidFill>
+                  </a:tcPr>
+                </a:tc>
+                <a:tc>
+                  <a:txBody>
+                    <a:bodyPr wrap="square" tIns="54864" bIns="54864"/>
+                    <a:lstStyle/>
+                    <a:p>
+                      <a:pPr algn="l"/>
+                      <a:r>
+                        <a:rPr b="0" i="0" sz="1000">
+                          <a:solidFill>
+                            <a:srgbClr val="1E293B"/>
+                          </a:solidFill>
+                          <a:latin typeface="Calibri"/>
+                        </a:rPr>
+                        <a:t>Implementing Notice, User, NotificationService, inheritance &amp; interfaces</a:t>
+                      </a:r>
+                    </a:p>
+                  </a:txBody>
+                  <a:tcPr anchor="ctr">
+                    <a:solidFill>
+                      <a:srgbClr val="E2EFDA"/>
+                    </a:solidFill>
+                  </a:tcPr>
+                </a:tc>
+                <a:tc>
+                  <a:txBody>
+                    <a:bodyPr wrap="square" tIns="54864" bIns="54864"/>
+                    <a:lstStyle/>
+                    <a:p>
+                      <a:pPr algn="ctr"/>
+                      <a:r>
+                        <a:rPr b="1" i="0" sz="1000">
+                          <a:solidFill>
+                            <a:srgbClr val="375623"/>
+                          </a:solidFill>
+                          <a:latin typeface="Calibri"/>
+                        </a:rPr>
+                        <a:t>Completed</a:t>
+                      </a:r>
+                    </a:p>
+                  </a:txBody>
+                  <a:tcPr anchor="ctr">
+                    <a:solidFill>
+                      <a:srgbClr val="E2EFDA"/>
+                    </a:solidFill>
+                  </a:tcPr>
+                </a:tc>
+              </a:tr>
+              <a:tr h="679268">
+                <a:tc>
+                  <a:txBody>
+                    <a:bodyPr wrap="square" tIns="54864" bIns="54864"/>
+                    <a:lstStyle/>
+                    <a:p>
+                      <a:pPr algn="ctr"/>
+                      <a:r>
+                        <a:rPr b="0" i="0" sz="1000">
+                          <a:solidFill>
+                            <a:srgbClr val="1E293B"/>
+                          </a:solidFill>
+                          <a:latin typeface="Calibri"/>
+                        </a:rPr>
+                        <a:t>Weeks 8–9 (Sep 2025)</a:t>
+                      </a:r>
+                    </a:p>
+                  </a:txBody>
+                  <a:tcPr anchor="ctr">
+                    <a:solidFill>
+                      <a:srgbClr val="F2F8EE"/>
+                    </a:solidFill>
+                  </a:tcPr>
+                </a:tc>
+                <a:tc>
+                  <a:txBody>
+                    <a:bodyPr wrap="square" tIns="54864" bIns="54864"/>
+                    <a:lstStyle/>
+                    <a:p>
+                      <a:pPr algn="l"/>
+                      <a:r>
+                        <a:rPr b="0" i="0" sz="1000">
+                          <a:solidFill>
+                            <a:srgbClr val="1E293B"/>
+                          </a:solidFill>
+                          <a:latin typeface="Calibri"/>
+                        </a:rPr>
+                        <a:t>Web Client &amp; Cloud Sync</a:t>
+                      </a:r>
+                    </a:p>
+                  </a:txBody>
+                  <a:tcPr anchor="ctr">
+                    <a:solidFill>
+                      <a:srgbClr val="F2F8EE"/>
+                    </a:solidFill>
+                  </a:tcPr>
+                </a:tc>
+                <a:tc>
+                  <a:txBody>
+                    <a:bodyPr wrap="square" tIns="54864" bIns="54864"/>
+                    <a:lstStyle/>
+                    <a:p>
+                      <a:pPr algn="l"/>
+                      <a:r>
+                        <a:rPr b="0" i="0" sz="1000">
+                          <a:solidFill>
+                            <a:srgbClr val="1E293B"/>
+                          </a:solidFill>
+                          <a:latin typeface="Calibri"/>
+                        </a:rPr>
+                        <a:t>Responsive dashboard, Firebase cloud sync, RBAC Zero-Access Wall</a:t>
+                      </a:r>
+                    </a:p>
+                  </a:txBody>
+                  <a:tcPr anchor="ctr">
+                    <a:solidFill>
+                      <a:srgbClr val="F2F8EE"/>
+                    </a:solidFill>
+                  </a:tcPr>
+                </a:tc>
+                <a:tc>
+                  <a:txBody>
+                    <a:bodyPr wrap="square" tIns="54864" bIns="54864"/>
+                    <a:lstStyle/>
+                    <a:p>
+                      <a:pPr algn="ctr"/>
+                      <a:r>
+                        <a:rPr b="1" i="0" sz="1000">
+                          <a:solidFill>
+                            <a:srgbClr val="375623"/>
+                          </a:solidFill>
+                          <a:latin typeface="Calibri"/>
+                        </a:rPr>
+                        <a:t>Completed</a:t>
+                      </a:r>
+                    </a:p>
+                  </a:txBody>
+                  <a:tcPr anchor="ctr">
+                    <a:solidFill>
+                      <a:srgbClr val="F2F8EE"/>
+                    </a:solidFill>
+                  </a:tcPr>
+                </a:tc>
+              </a:tr>
+              <a:tr h="679268">
+                <a:tc>
+                  <a:txBody>
+                    <a:bodyPr wrap="square" tIns="54864" bIns="54864"/>
+                    <a:lstStyle/>
+                    <a:p>
+                      <a:pPr algn="ctr"/>
+                      <a:r>
+                        <a:rPr b="0" i="0" sz="1000">
+                          <a:solidFill>
+                            <a:srgbClr val="1E293B"/>
+                          </a:solidFill>
+                          <a:latin typeface="Calibri"/>
+                        </a:rPr>
+                        <a:t>Weeks 10–11 (Oct 2025)</a:t>
+                      </a:r>
+                    </a:p>
+                  </a:txBody>
+                  <a:tcPr anchor="ctr">
+                    <a:solidFill>
+                      <a:srgbClr val="E2EFDA"/>
+                    </a:solidFill>
+                  </a:tcPr>
+                </a:tc>
+                <a:tc>
+                  <a:txBody>
+                    <a:bodyPr wrap="square" tIns="54864" bIns="54864"/>
+                    <a:lstStyle/>
+                    <a:p>
+                      <a:pPr algn="l"/>
+                      <a:r>
+                        <a:rPr b="0" i="0" sz="1000">
+                          <a:solidFill>
+                            <a:srgbClr val="1E293B"/>
+                          </a:solidFill>
+                          <a:latin typeface="Calibri"/>
+                        </a:rPr>
+                        <a:t>Testing &amp; Verification</a:t>
+                      </a:r>
+                    </a:p>
+                  </a:txBody>
+                  <a:tcPr anchor="ctr">
+                    <a:solidFill>
+                      <a:srgbClr val="E2EFDA"/>
+                    </a:solidFill>
+                  </a:tcPr>
+                </a:tc>
+                <a:tc>
+                  <a:txBody>
+                    <a:bodyPr wrap="square" tIns="54864" bIns="54864"/>
+                    <a:lstStyle/>
+                    <a:p>
+                      <a:pPr algn="l"/>
+                      <a:r>
+                        <a:rPr b="0" i="0" sz="1000">
+                          <a:solidFill>
+                            <a:srgbClr val="1E293B"/>
+                          </a:solidFill>
+                          <a:latin typeface="Calibri"/>
+                        </a:rPr>
+                        <a:t>92 Automated test suite execution, stress testing, edge-case fixes</a:t>
+                      </a:r>
+                    </a:p>
+                  </a:txBody>
+                  <a:tcPr anchor="ctr">
+                    <a:solidFill>
+                      <a:srgbClr val="E2EFDA"/>
+                    </a:solidFill>
+                  </a:tcPr>
+                </a:tc>
+                <a:tc>
+                  <a:txBody>
+                    <a:bodyPr wrap="square" tIns="54864" bIns="54864"/>
+                    <a:lstStyle/>
+                    <a:p>
+                      <a:pPr algn="ctr"/>
+                      <a:r>
+                        <a:rPr b="1" i="0" sz="1000">
+                          <a:solidFill>
+                            <a:srgbClr val="375623"/>
+                          </a:solidFill>
+                          <a:latin typeface="Calibri"/>
+                        </a:rPr>
+                        <a:t>Completed</a:t>
+                      </a:r>
+                    </a:p>
+                  </a:txBody>
+                  <a:tcPr anchor="ctr">
+                    <a:solidFill>
+                      <a:srgbClr val="E2EFDA"/>
+                    </a:solidFill>
+                  </a:tcPr>
+                </a:tc>
+              </a:tr>
+              <a:tr h="679272">
+                <a:tc>
+                  <a:txBody>
+                    <a:bodyPr wrap="square" tIns="54864" bIns="54864"/>
+                    <a:lstStyle/>
+                    <a:p>
+                      <a:pPr algn="ctr"/>
+                      <a:r>
+                        <a:rPr b="0" i="0" sz="1000">
+                          <a:solidFill>
+                            <a:srgbClr val="1E293B"/>
+                          </a:solidFill>
+                          <a:latin typeface="Calibri"/>
+                        </a:rPr>
+                        <a:t>Weeks 12–13 (Oct 2025)</a:t>
+                      </a:r>
+                    </a:p>
+                  </a:txBody>
+                  <a:tcPr anchor="ctr">
+                    <a:solidFill>
+                      <a:srgbClr val="F2F8EE"/>
+                    </a:solidFill>
+                  </a:tcPr>
+                </a:tc>
+                <a:tc>
+                  <a:txBody>
+                    <a:bodyPr wrap="square" tIns="54864" bIns="54864"/>
+                    <a:lstStyle/>
+                    <a:p>
+                      <a:pPr algn="l"/>
+                      <a:r>
+                        <a:rPr b="0" i="0" sz="1000">
+                          <a:solidFill>
+                            <a:srgbClr val="1E293B"/>
+                          </a:solidFill>
+                          <a:latin typeface="Calibri"/>
+                        </a:rPr>
+                        <a:t>Documentation &amp; Review</a:t>
+                      </a:r>
+                    </a:p>
+                  </a:txBody>
+                  <a:tcPr anchor="ctr">
+                    <a:solidFill>
+                      <a:srgbClr val="F2F8EE"/>
+                    </a:solidFill>
+                  </a:tcPr>
+                </a:tc>
+                <a:tc>
+                  <a:txBody>
+                    <a:bodyPr wrap="square" tIns="54864" bIns="54864"/>
+                    <a:lstStyle/>
+                    <a:p>
+                      <a:pPr algn="l"/>
+                      <a:r>
+                        <a:rPr b="0" i="0" sz="1000">
+                          <a:solidFill>
+                            <a:srgbClr val="1E293B"/>
+                          </a:solidFill>
+                          <a:latin typeface="Calibri"/>
+                        </a:rPr>
+                        <a:t>Report generation, logbook compilation, review presentation submission</a:t>
+                      </a:r>
+                    </a:p>
+                  </a:txBody>
+                  <a:tcPr anchor="ctr">
+                    <a:solidFill>
+                      <a:srgbClr val="F2F8EE"/>
+                    </a:solidFill>
+                  </a:tcPr>
+                </a:tc>
+                <a:tc>
+                  <a:txBody>
+                    <a:bodyPr wrap="square" tIns="54864" bIns="54864"/>
+                    <a:lstStyle/>
+                    <a:p>
+                      <a:pPr algn="ctr"/>
+                      <a:r>
+                        <a:rPr b="1" i="0" sz="1000">
+                          <a:solidFill>
+                            <a:srgbClr val="375623"/>
+                          </a:solidFill>
+                          <a:latin typeface="Calibri"/>
+                        </a:rPr>
+                        <a:t>Completed</a:t>
+                      </a:r>
+                    </a:p>
+                  </a:txBody>
+                  <a:tcPr anchor="ctr">
+                    <a:solidFill>
+                      <a:srgbClr val="F2F8EE"/>
+                    </a:solidFill>
+                  </a:tcPr>
+                </a:tc>
+              </a:tr>
+            </a:tbl>
+          </a:graphicData>
+        </a:graphic>
+      </p:graphicFrame>
     </p:spTree>
   </p:cSld>
   <p:clrMapOvr>
